--- a/presentation/臺灣房價預測_正式報告_v22.pptx
+++ b/presentation/臺灣房價預測_正式報告_v22.pptx
@@ -2,28 +2,27 @@
 <file path=ppt/presentation.xml><?xml version="1.0" encoding="utf-8"?>
 <p:presentation xmlns:p="http://schemas.openxmlformats.org/presentationml/2006/main">
   <p:sldMasterIdLst>
-    <p:sldMasterId xmlns:r="http://schemas.openxmlformats.org/officeDocument/2006/relationships" id="2147483648" r:id="Rc6d7be600b184d8f"/>
+    <p:sldMasterId xmlns:r="http://schemas.openxmlformats.org/officeDocument/2006/relationships" id="2147483648" r:id="Rf179163807b446a0"/>
   </p:sldMasterIdLst>
   <p:notesMasterIdLst>
-    <p:notesMasterId xmlns:r="http://schemas.openxmlformats.org/officeDocument/2006/relationships" r:id="R32b73e40cbdc4740"/>
+    <p:notesMasterId xmlns:r="http://schemas.openxmlformats.org/officeDocument/2006/relationships" r:id="R8d7a60e6d20847ce"/>
   </p:notesMasterIdLst>
   <p:sldIdLst>
-    <p:sldId xmlns:r="http://schemas.openxmlformats.org/officeDocument/2006/relationships" id="256" r:id="Re9ef365a215a42a3"/>
-    <p:sldId xmlns:r="http://schemas.openxmlformats.org/officeDocument/2006/relationships" id="257" r:id="R58fd509bb73549f9"/>
-    <p:sldId xmlns:r="http://schemas.openxmlformats.org/officeDocument/2006/relationships" id="258" r:id="R10e85783fe0b4e86"/>
-    <p:sldId xmlns:r="http://schemas.openxmlformats.org/officeDocument/2006/relationships" id="259" r:id="Rc4c17a1888154080"/>
-    <p:sldId xmlns:r="http://schemas.openxmlformats.org/officeDocument/2006/relationships" id="260" r:id="R132c3be685cc4079"/>
-    <p:sldId xmlns:r="http://schemas.openxmlformats.org/officeDocument/2006/relationships" id="261" r:id="R2d0b8b20bfe84da8"/>
-    <p:sldId xmlns:r="http://schemas.openxmlformats.org/officeDocument/2006/relationships" id="262" r:id="R4d2f171c044043f0"/>
-    <p:sldId xmlns:r="http://schemas.openxmlformats.org/officeDocument/2006/relationships" id="263" r:id="Rfeac76dd26424f96"/>
-    <p:sldId xmlns:r="http://schemas.openxmlformats.org/officeDocument/2006/relationships" id="264" r:id="R743a079406564b53"/>
-    <p:sldId xmlns:r="http://schemas.openxmlformats.org/officeDocument/2006/relationships" id="265" r:id="R32a7745176934913"/>
-    <p:sldId xmlns:r="http://schemas.openxmlformats.org/officeDocument/2006/relationships" id="266" r:id="R0357d46af35a4589"/>
-    <p:sldId xmlns:r="http://schemas.openxmlformats.org/officeDocument/2006/relationships" id="267" r:id="R716fbf91735a4cd6"/>
-    <p:sldId xmlns:r="http://schemas.openxmlformats.org/officeDocument/2006/relationships" id="268" r:id="R93ad007babdc46fc"/>
-    <p:sldId xmlns:r="http://schemas.openxmlformats.org/officeDocument/2006/relationships" id="269" r:id="R30d1a3a8db3a4246"/>
-    <p:sldId xmlns:r="http://schemas.openxmlformats.org/officeDocument/2006/relationships" id="270" r:id="R4df441c5ff564ac8"/>
-    <p:sldId xmlns:r="http://schemas.openxmlformats.org/officeDocument/2006/relationships" id="271" r:id="Rc16af13d10b84321"/>
+    <p:sldId xmlns:r="http://schemas.openxmlformats.org/officeDocument/2006/relationships" id="256" r:id="R256ace0bf8e8436c"/>
+    <p:sldId xmlns:r="http://schemas.openxmlformats.org/officeDocument/2006/relationships" id="257" r:id="Rd23b62c045b54c73"/>
+    <p:sldId xmlns:r="http://schemas.openxmlformats.org/officeDocument/2006/relationships" id="258" r:id="R2038e4c60ba24381"/>
+    <p:sldId xmlns:r="http://schemas.openxmlformats.org/officeDocument/2006/relationships" id="259" r:id="Rd860835c0ab5484f"/>
+    <p:sldId xmlns:r="http://schemas.openxmlformats.org/officeDocument/2006/relationships" id="260" r:id="Rc494588fdc6f4171"/>
+    <p:sldId xmlns:r="http://schemas.openxmlformats.org/officeDocument/2006/relationships" id="261" r:id="R6c2d84cdad6a4428"/>
+    <p:sldId xmlns:r="http://schemas.openxmlformats.org/officeDocument/2006/relationships" id="262" r:id="R1fe5977933974d29"/>
+    <p:sldId xmlns:r="http://schemas.openxmlformats.org/officeDocument/2006/relationships" id="263" r:id="Rd22b3f97b83848b8"/>
+    <p:sldId xmlns:r="http://schemas.openxmlformats.org/officeDocument/2006/relationships" id="264" r:id="Rb3c94690af4f45e2"/>
+    <p:sldId xmlns:r="http://schemas.openxmlformats.org/officeDocument/2006/relationships" id="265" r:id="R95e0b20c3b324f4c"/>
+    <p:sldId xmlns:r="http://schemas.openxmlformats.org/officeDocument/2006/relationships" id="266" r:id="Rd8811302f5c145b8"/>
+    <p:sldId xmlns:r="http://schemas.openxmlformats.org/officeDocument/2006/relationships" id="267" r:id="Rfeeb183de15c4140"/>
+    <p:sldId xmlns:r="http://schemas.openxmlformats.org/officeDocument/2006/relationships" id="268" r:id="Reb8bef58293b4e5a"/>
+    <p:sldId xmlns:r="http://schemas.openxmlformats.org/officeDocument/2006/relationships" id="269" r:id="R28fc6784900c4afd"/>
+    <p:sldId xmlns:r="http://schemas.openxmlformats.org/officeDocument/2006/relationships" id="270" r:id="Red772d1d2f8c4cd2"/>
   </p:sldIdLst>
   <p:sldSz cx="12192000" cy="6858000"/>
   <p:notesSz cx="6858000" cy="9144000"/>
@@ -467,7 +466,7 @@
           </a:p>
           <a:p xmlns:a="http://schemas.openxmlformats.org/drawingml/2006/main">
             <a:r>
-              <a:t>今天分享臺灣房屋總價預測。這是一個監督式回歸問題，輸入房屋與交易屬性，輸出連續的總價數值。我會說明 v22 的資料處理、模型方法、實驗結果與推論重現。Private 成績仍未知。</a:t>
+              <a:t>本專題預測每一筆房屋交易的總價。我們選定一套模型作為最終提交，接下來依序說明資料處理、預測方法、評估結果，以及程式如何重新產生提交檔。目標是預測連續的價格數字，因此這是監督式回歸問題。</a:t>
             </a:r>
           </a:p>
           <a:p xmlns:a="http://schemas.openxmlformats.org/drawingml/2006/main">
@@ -493,16 +492,6 @@
           <a:p xmlns:a="http://schemas.openxmlformats.org/drawingml/2006/main">
             <a:r>
               <a:t>Photo used under the Unsplash License as contextual imagery only.</a:t>
-            </a:r>
-          </a:p>
-          <a:p xmlns:a="http://schemas.openxmlformats.org/drawingml/2006/main">
-            <a:r>
-              <a:t/>
-            </a:r>
-          </a:p>
-          <a:p xmlns:a="http://schemas.openxmlformats.org/drawingml/2006/main">
-            <a:r>
-              <a:t>本簡報整理 v22 已完成的方法與結果。Private 成績未知，最終候選尚未定案。</a:t>
             </a:r>
           </a:p>
         </p:txBody>
@@ -572,7 +561,7 @@
           <a:lstStyle xmlns:a="http://schemas.openxmlformats.org/drawingml/2006/main"/>
           <a:p xmlns:a="http://schemas.openxmlformats.org/drawingml/2006/main">
             <a:r>
-              <a:t>建議時間：45 秒</a:t>
+              <a:t>建議時間：40 秒</a:t>
             </a:r>
           </a:p>
           <a:p xmlns:a="http://schemas.openxmlformats.org/drawingml/2006/main">
@@ -582,7 +571,7 @@
           </a:p>
           <a:p xmlns:a="http://schemas.openxmlformats.org/drawingml/2006/main">
             <a:r>
-              <a:t>不能只挑支持 v22 的結果。v24 在三個年度的整體 MAE 都比 v22 更低，但 Public 排序相反。v24 單價分支採兩個 CatBoost seed 各半，已移除這條分支原有的 LightGBM 比例，其他兩條分支保持。它在最新年度真價至少一億的三百一十九筆資料中，群內 MAE 又比 v22 增加約九十點九七萬元。這是局部群組的差值，不是全體變差。我們因此保留 v24 作互補候選，不能宣稱 v22 每個評估都最好。</a:t>
+              <a:t>這套模型提交到 Kaggle 後，Public MAE 是一百九十九萬八千五百六十八點五七零六元，約一百九十九點八六萬元。意思是在公開評分的交易中，平均絕對總價誤差約為這個金額，不代表每筆都錯一樣多。這是 test 的一部分，與前頁三個歷史年度不同，不能把它們的分數直接混算。Private 使用其餘約七成，最終分數還不知道。</a:t>
             </a:r>
           </a:p>
           <a:p xmlns:a="http://schemas.openxmlformats.org/drawingml/2006/main">
@@ -597,27 +586,7 @@
           </a:p>
           <a:p xmlns:a="http://schemas.openxmlformats.org/drawingml/2006/main">
             <a:r>
-              <a:t>evidence/reports/round83_delivery.md</a:t>
-            </a:r>
-          </a:p>
-          <a:p xmlns:a="http://schemas.openxmlformats.org/drawingml/2006/main">
-            <a:r>
-              <a:t>REPORT.md，第 5、6 節</a:t>
-            </a:r>
-          </a:p>
-          <a:p xmlns:a="http://schemas.openxmlformats.org/drawingml/2006/main">
-            <a:r>
-              <a:t>research/src/round83_final.py</a:t>
-            </a:r>
-          </a:p>
-          <a:p xmlns:a="http://schemas.openxmlformats.org/drawingml/2006/main">
-            <a:r>
-              <a:t/>
-            </a:r>
-          </a:p>
-          <a:p xmlns:a="http://schemas.openxmlformats.org/drawingml/2006/main">
-            <a:r>
-              <a:t>本簡報整理 v22 已完成的方法與結果。Private 成績未知，最終候選尚未定案。</a:t>
+              <a:t>evidence/outputs/kaggle_feedback/public_submissions_v19_v24_20260927.json</a:t>
             </a:r>
           </a:p>
         </p:txBody>
@@ -687,7 +656,7 @@
           <a:lstStyle xmlns:a="http://schemas.openxmlformats.org/drawingml/2006/main"/>
           <a:p xmlns:a="http://schemas.openxmlformats.org/drawingml/2006/main">
             <a:r>
-              <a:t>建議時間：40 秒</a:t>
+              <a:t>建議時間：45 秒</a:t>
             </a:r>
           </a:p>
           <a:p xmlns:a="http://schemas.openxmlformats.org/drawingml/2006/main">
@@ -697,7 +666,7 @@
           </a:p>
           <a:p xmlns:a="http://schemas.openxmlformats.org/drawingml/2006/main">
             <a:r>
-              <a:t>平均分數會掩蓋不同族群的差異。例如最新回測年度，真價五千萬到一億這一群有一千七百二十五筆，v22 的群內平均誤差仍比 v20 多約二十點四七萬元。這不是全體 MAE 增加二十萬，也不能在預測時按未知真價決定用哪個模型。另一個風險是反覆看同一批驗證資料，方法會逐漸適應這些窗口。因此我們保留不利結果，不把 bootstrap 解讀成 Private 勝率。</a:t>
+              <a:t>這個方法仍有幾項限制。總價 MAE 容易受高價或大面積交易的巨大誤差影響，因此不能只看全體平均，還要檢查價格群和新舊建案。其次，歷史時間窗已多次參與選型，會累積對驗證資料的適應，bootstrap 也不能消除這個偏差。最後，道路位置不是精確門牌，新建案或缺失地址可能找不到可靠參考。這些限制不會因為我們已決定提交模型而消失。</a:t>
             </a:r>
           </a:p>
           <a:p xmlns:a="http://schemas.openxmlformats.org/drawingml/2006/main">
@@ -712,22 +681,7 @@
           </a:p>
           <a:p xmlns:a="http://schemas.openxmlformats.org/drawingml/2006/main">
             <a:r>
-              <a:t>evidence/reports/round79_report.md</a:t>
-            </a:r>
-          </a:p>
-          <a:p xmlns:a="http://schemas.openxmlformats.org/drawingml/2006/main">
-            <a:r>
               <a:t>REPORT.md，第 5、7 節</a:t>
-            </a:r>
-          </a:p>
-          <a:p xmlns:a="http://schemas.openxmlformats.org/drawingml/2006/main">
-            <a:r>
-              <a:t/>
-            </a:r>
-          </a:p>
-          <a:p xmlns:a="http://schemas.openxmlformats.org/drawingml/2006/main">
-            <a:r>
-              <a:t>本簡報整理 v22 已完成的方法與結果。Private 成績未知，最終候選尚未定案。</a:t>
             </a:r>
           </a:p>
         </p:txBody>
@@ -807,7 +761,7 @@
           </a:p>
           <a:p xmlns:a="http://schemas.openxmlformats.org/drawingml/2006/main">
             <a:r>
-              <a:t>這次新增的是可執行的推論入口。我們從原 test Excel 重新產生特徵，搭配保存的地理資料、編碼與價格先驗，真正載入四個樹模型和兩個神經網路，再重算參考與空間修正。四萬七千零七十三筆的未取整結果完全一致，最大差為零，最終 CSV 的完整 SHA256 也相同。單一入口耗時八十四點七四秒，這是同一台電腦既有環境的實測，不是重訓時間。全新安裝、從零重訓與地理資料重建還沒有驗證。</a:t>
+              <a:t>我們已把推論整理成單一程式入口。從原 test Excel 重新產生特徵，搭配保存的地理、編碼與價格先驗，真正載入四個樹模型及兩個神經網路，再重算三條分支。四萬七千零七十三筆未取整預測全部一致，最大差是零，最終 CSV 的完整 SHA256 也相同。這個入口在同一台電腦既有環境耗時八十四點七四秒，並非訓練時間。全新安裝、從零重訓與地理重建尚未驗證。</a:t>
             </a:r>
           </a:p>
           <a:p xmlns:a="http://schemas.openxmlformats.org/drawingml/2006/main">
@@ -833,16 +787,6 @@
           <a:p xmlns:a="http://schemas.openxmlformats.org/drawingml/2006/main">
             <a:r>
               <a:t>src/predict_v22.py</a:t>
-            </a:r>
-          </a:p>
-          <a:p xmlns:a="http://schemas.openxmlformats.org/drawingml/2006/main">
-            <a:r>
-              <a:t/>
-            </a:r>
-          </a:p>
-          <a:p xmlns:a="http://schemas.openxmlformats.org/drawingml/2006/main">
-            <a:r>
-              <a:t>本簡報整理 v22 已完成的方法與結果。Private 成績未知，最終候選尚未定案。</a:t>
             </a:r>
           </a:p>
         </p:txBody>
@@ -912,7 +856,7 @@
           <a:lstStyle xmlns:a="http://schemas.openxmlformats.org/drawingml/2006/main"/>
           <a:p xmlns:a="http://schemas.openxmlformats.org/drawingml/2006/main">
             <a:r>
-              <a:t>建議時間：35 秒</a:t>
+              <a:t>建議時間：30 秒</a:t>
             </a:r>
           </a:p>
           <a:p xmlns:a="http://schemas.openxmlformats.org/drawingml/2006/main">
@@ -922,7 +866,7 @@
           </a:p>
           <a:p xmlns:a="http://schemas.openxmlformats.org/drawingml/2006/main">
             <a:r>
-              <a:t>v22 把近期成交權重加入單價學習，再與對數與神經網路分支組合，Public MAE 約一百九十九點八六萬元。程式與正式報告已整理成獨立交付目錄，推論入口已完成全量核對。但 v24 的本機優勢與高價群的退步提醒我們，較低的 Public 不能保證 Private 較好。後續研究方向是固定候選配方做時間切分穩定性檢查。畫面是私人 GitHub 儲存庫，閱覽需要授權。</a:t>
+              <a:t>本研究將房價預測視為總價回歸，結合特徵處理、近期成交加權和不同價格表示，再逐筆取三條分支的中位數。目前 Public MAE 約一百九十九點八六萬元，Private 尚未知。所選模型的推論程式、正式報告及提交檔身分都有保存。畫面是私人 GitHub 儲存庫，閱覽需要授權。謝謝。</a:t>
             </a:r>
           </a:p>
           <a:p xmlns:a="http://schemas.openxmlformats.org/drawingml/2006/main">
@@ -948,16 +892,6 @@
           <a:p xmlns:a="http://schemas.openxmlformats.org/drawingml/2006/main">
             <a:r>
               <a:t>https://github.com/ziyi930108/nycu-house-price-regression</a:t>
-            </a:r>
-          </a:p>
-          <a:p xmlns:a="http://schemas.openxmlformats.org/drawingml/2006/main">
-            <a:r>
-              <a:t/>
-            </a:r>
-          </a:p>
-          <a:p xmlns:a="http://schemas.openxmlformats.org/drawingml/2006/main">
-            <a:r>
-              <a:t>本簡報整理 v22 已完成的方法與結果。Private 成績未知，最終候選尚未定案。</a:t>
             </a:r>
           </a:p>
         </p:txBody>
@@ -1037,7 +971,7 @@
           </a:p>
           <a:p xmlns:a="http://schemas.openxmlformats.org/drawingml/2006/main">
             <a:r>
-              <a:t>這頁供模型細節問答。C_unit 是 R79 單價 CatBoost，L_unit 是既有單價 LightGBM，C_raw 是直接總價 CatBoost，C_log 是近期加權對數 CatBoost。N_area 是面積連結 NN，N_prior 是近期加權先驗倍率 NN。所有變數先還原成元。R 為 reference trend，S 同時接收原基準與 reference 結果。最外層取逐筆中位數，沒有在 median 後再乘面積或再次做趨勢。</a:t>
+              <a:t>C_unit 是近期加權單價 CatBoost，L_unit 是單價 LightGBM 還原總價。C_raw 與 C_log 是直接總價和對數 CatBoost，N_area 與 N_prior 是面積連結和先驗倍率神經網路。所有符號已換回元。R 是 fit 中成交參考與時間趨勢，S 接收原基準及參考結果做空間修正。逐分支修正後才取中位數，最後不再乘面積或重複修正。</a:t>
             </a:r>
           </a:p>
           <a:p xmlns:a="http://schemas.openxmlformats.org/drawingml/2006/main">
@@ -1057,27 +991,7 @@
           </a:p>
           <a:p xmlns:a="http://schemas.openxmlformats.org/drawingml/2006/main">
             <a:r>
-              <a:t>research/src/round79_final.py:153</a:t>
-            </a:r>
-          </a:p>
-          <a:p xmlns:a="http://schemas.openxmlformats.org/drawingml/2006/main">
-            <a:r>
-              <a:t>research/src/round71_final.py:115</a:t>
-            </a:r>
-          </a:p>
-          <a:p xmlns:a="http://schemas.openxmlformats.org/drawingml/2006/main">
-            <a:r>
-              <a:t>research/src/round46_trial_release.py:243</a:t>
-            </a:r>
-          </a:p>
-          <a:p xmlns:a="http://schemas.openxmlformats.org/drawingml/2006/main">
-            <a:r>
-              <a:t/>
-            </a:r>
-          </a:p>
-          <a:p xmlns:a="http://schemas.openxmlformats.org/drawingml/2006/main">
-            <a:r>
-              <a:t>本簡報整理 v22 已完成的方法與結果。Private 成績未知，最終候選尚未定案。</a:t>
+              <a:t>src/predict_v22.py</a:t>
             </a:r>
           </a:p>
         </p:txBody>
@@ -1157,7 +1071,7 @@
           </a:p>
           <a:p xmlns:a="http://schemas.openxmlformats.org/drawingml/2006/main">
             <a:r>
-              <a:t>R79 是實驗編號，v22 是提交檔版本名。這段只保留核心概念，完整來源還有日期權重來源、列序、特徵、保存與重載檢查。主要 CatBoost 使用 GPU、兩千九百九十九棵樹、深度八、學習率零點零六五與 seed 四十二，沒有 query eval_set 或 early stopping。資料特徵在 house_features.py，全量 fit 在 round79_final_unit.py，組合在 round79_final.py，CSV 檢查在 round79_release.py。交付已新增 src/predict_v22.py，使用原 test 加十七項保存 artifact 真正重跑六模型。這是保存模型推論，不是從零重訓。</a:t>
+              <a:t>有效面積先用正且有限的建物面積，再用車位面積，仍無效才取一。這是數值縮放規則，不是宣稱實際室內面積等於一。CatBoost 使用兩千九百九十九次迭代、深度八、學習率零點零六五、MAE 和 seed 四十二。它不使用 query 價格作訓練、eval_set 或 early stopping。模型推論入口已全量驗證，完整從零重訓仍是不同的工作範圍。</a:t>
             </a:r>
           </a:p>
           <a:p xmlns:a="http://schemas.openxmlformats.org/drawingml/2006/main">
@@ -1177,137 +1091,12 @@
           </a:p>
           <a:p xmlns:a="http://schemas.openxmlformats.org/drawingml/2006/main">
             <a:r>
-              <a:t>research/src/round79_recency_unit.py:78</a:t>
-            </a:r>
-          </a:p>
-          <a:p xmlns:a="http://schemas.openxmlformats.org/drawingml/2006/main">
-            <a:r>
-              <a:t>evidence/outputs/round79/final_model/model/metadata.json</a:t>
-            </a:r>
-          </a:p>
-          <a:p xmlns:a="http://schemas.openxmlformats.org/drawingml/2006/main">
-            <a:r>
-              <a:t/>
-            </a:r>
-          </a:p>
-          <a:p xmlns:a="http://schemas.openxmlformats.org/drawingml/2006/main">
-            <a:r>
-              <a:t>本簡報整理 v22 已完成的方法與結果。Private 成績未知，最終候選尚未定案。</a:t>
-            </a:r>
-          </a:p>
-        </p:txBody>
-      </p:sp>
-      <p:sp>
-        <p:nvSpPr>
-          <p:cNvPr id="4" name="Slide Number Placeholder 3"/>
-          <p:cNvSpPr>
-            <a:spLocks xmlns:a="http://schemas.openxmlformats.org/drawingml/2006/main" noGrp="1"/>
-          </p:cNvSpPr>
-          <p:nvPr>
-            <p:ph type="sldNum" idx="5"/>
-          </p:nvPr>
-        </p:nvSpPr>
-        <p:spPr/>
-        <p:txBody>
-          <a:bodyPr xmlns:a="http://schemas.openxmlformats.org/drawingml/2006/main"/>
-          <a:lstStyle xmlns:a="http://schemas.openxmlformats.org/drawingml/2006/main"/>
-          <a:p xmlns:a="http://schemas.openxmlformats.org/drawingml/2006/main"/>
-        </p:txBody>
-      </p:sp>
-    </p:spTree>
-  </p:cSld>
-  <p:clrMapOvr>
-    <a:masterClrMapping xmlns:a="http://schemas.openxmlformats.org/drawingml/2006/main"/>
-  </p:clrMapOvr>
-</p:notes>
-</file>
-
-<file path=ppt/notesSlides/notesSlide16.xml><?xml version="1.0" encoding="utf-8"?>
-<p:notes xmlns:p="http://schemas.openxmlformats.org/presentationml/2006/main">
-  <p:cSld>
-    <p:spTree>
-      <p:nvGrpSpPr>
-        <p:cNvPr id="1" name=""/>
-        <p:cNvGrpSpPr/>
-        <p:nvPr/>
-      </p:nvGrpSpPr>
-      <p:grpSpPr>
-        <a:xfrm xmlns:a="http://schemas.openxmlformats.org/drawingml/2006/main"/>
-      </p:grpSpPr>
-      <p:sp>
-        <p:nvSpPr>
-          <p:cNvPr id="2" name="Slide Image Placeholder 1"/>
-          <p:cNvSpPr>
-            <a:spLocks xmlns:a="http://schemas.openxmlformats.org/drawingml/2006/main" noGrp="1"/>
-          </p:cNvSpPr>
-          <p:nvPr>
-            <p:ph type="sldImg" idx="0"/>
-          </p:nvPr>
-        </p:nvSpPr>
-        <p:spPr/>
-      </p:sp>
-      <p:sp>
-        <p:nvSpPr>
-          <p:cNvPr id="3" name="Notes Placeholder 2"/>
-          <p:cNvSpPr>
-            <a:spLocks xmlns:a="http://schemas.openxmlformats.org/drawingml/2006/main" noGrp="1"/>
-          </p:cNvSpPr>
-          <p:nvPr>
-            <p:ph type="body" idx="1"/>
-          </p:nvPr>
-        </p:nvSpPr>
-        <p:spPr/>
-        <p:txBody>
-          <a:bodyPr xmlns:a="http://schemas.openxmlformats.org/drawingml/2006/main"/>
-          <a:lstStyle xmlns:a="http://schemas.openxmlformats.org/drawingml/2006/main"/>
-          <a:p xmlns:a="http://schemas.openxmlformats.org/drawingml/2006/main">
-            <a:r>
-              <a:t>建議時間：問答時使用</a:t>
-            </a:r>
-          </a:p>
-          <a:p xmlns:a="http://schemas.openxmlformats.org/drawingml/2006/main">
-            <a:r>
-              <a:t/>
-            </a:r>
-          </a:p>
-          <a:p xmlns:a="http://schemas.openxmlformats.org/drawingml/2006/main">
-            <a:r>
-              <a:t>若被問到外部資料：價格標籤只來自課程 train 與 valid，外部 OSM 道路資訊只提供地理特徵，沒有查成交答案。若問 OOF：價格先驗採五折建案分組，避免本建案標籤直接進入其先驗，這不是時間 OOF，不能聲稱每筆先驗都只用當日以前的交易。若問 median：它降低單支極端輸出的影響，但不能保證沒有偏誤。若問正式交付：原 test 加保存狀態的推論已核對全部四萬七千零七十三筆，程式與報告已整理。模型與課程交易資料留在本機，GitHub 不包含它們。新環境安裝、其他硬體與從零重訓仍未測。CPU 神經網路可能因數值運算產生不同結果，不能保證位元相同。</a:t>
-            </a:r>
-          </a:p>
-          <a:p xmlns:a="http://schemas.openxmlformats.org/drawingml/2006/main">
-            <a:r>
-              <a:t/>
-            </a:r>
-          </a:p>
-          <a:p xmlns:a="http://schemas.openxmlformats.org/drawingml/2006/main">
-            <a:r>
-              <a:t>資料來源（不必口述）</a:t>
-            </a:r>
-          </a:p>
-          <a:p xmlns:a="http://schemas.openxmlformats.org/drawingml/2006/main">
-            <a:r>
-              <a:t>REPORT.md，第 2 至 4 節</a:t>
-            </a:r>
-          </a:p>
-          <a:p xmlns:a="http://schemas.openxmlformats.org/drawingml/2006/main">
-            <a:r>
-              <a:t>REPORT.md，第 5、7 節</a:t>
-            </a:r>
-          </a:p>
-          <a:p xmlns:a="http://schemas.openxmlformats.org/drawingml/2006/main">
-            <a:r>
-              <a:t>docs/REPRODUCIBILITY.md</a:t>
-            </a:r>
-          </a:p>
-          <a:p xmlns:a="http://schemas.openxmlformats.org/drawingml/2006/main">
-            <a:r>
-              <a:t/>
-            </a:r>
-          </a:p>
-          <a:p xmlns:a="http://schemas.openxmlformats.org/drawingml/2006/main">
-            <a:r>
-              <a:t>本簡報整理 v22 已完成的方法與結果。Private 成績未知，最終候選尚未定案。</a:t>
+              <a:t>research/src/round79_recency_unit.py</a:t>
+            </a:r>
+          </a:p>
+          <a:p xmlns:a="http://schemas.openxmlformats.org/drawingml/2006/main">
+            <a:r>
+              <a:t>src/predict_v22.py</a:t>
             </a:r>
           </a:p>
         </p:txBody>
@@ -1387,7 +1176,7 @@
           </a:p>
           <a:p xmlns:a="http://schemas.openxmlformats.org/drawingml/2006/main">
             <a:r>
-              <a:t>先說明分數的意義。例如真價一千萬元，預測一千一百萬元，絕對誤差就是一百萬元。把所有評分交易的誤差平均，就是 MAE。公開分數約使用 test 的三成，最終看的 Private 則是另外七成。這與課程另外提供的 valid 不同。分數是總價誤差，不是準確率，也不表示每筆都錯同樣的金額。</a:t>
+              <a:t>例如一筆交易真價一千萬元，我們預測一千一百萬元，絕對誤差就是一百萬元。把所有評分交易的誤差平均，就是 MAE，越低越好。這是金額誤差，不是準確率。公開分數約使用 test 的三成，Private 使用其餘七成，與另外提供的 valid 檔案不同。</a:t>
             </a:r>
           </a:p>
           <a:p xmlns:a="http://schemas.openxmlformats.org/drawingml/2006/main">
@@ -1402,27 +1191,12 @@
           </a:p>
           <a:p xmlns:a="http://schemas.openxmlformats.org/drawingml/2006/main">
             <a:r>
-              <a:t>REPORT.md，第 2 至 4 節</a:t>
+              <a:t>REPORT.md，第 1 節</a:t>
             </a:r>
           </a:p>
           <a:p xmlns:a="http://schemas.openxmlformats.org/drawingml/2006/main">
             <a:r>
               <a:t>evidence/outputs/kaggle_feedback/public_submissions_v19_v24_20260927.json</a:t>
-            </a:r>
-          </a:p>
-          <a:p xmlns:a="http://schemas.openxmlformats.org/drawingml/2006/main">
-            <a:r>
-              <a:t>User-provided competition evaluation and leaderboard screenshots in this conversation.</a:t>
-            </a:r>
-          </a:p>
-          <a:p xmlns:a="http://schemas.openxmlformats.org/drawingml/2006/main">
-            <a:r>
-              <a:t/>
-            </a:r>
-          </a:p>
-          <a:p xmlns:a="http://schemas.openxmlformats.org/drawingml/2006/main">
-            <a:r>
-              <a:t>本簡報整理 v22 已完成的方法與結果。Private 成績未知，最終候選尚未定案。</a:t>
             </a:r>
           </a:p>
         </p:txBody>
@@ -1502,7 +1276,7 @@
           </a:p>
           <a:p xmlns:a="http://schemas.openxmlformats.org/drawingml/2006/main">
             <a:r>
-              <a:t>原 train 有四十五萬五千七百八十七列，先去掉混入的三列英文表頭，再去掉五百二十九列完全重複交易。最終加入 valid，移除二十八筆跨集重複，得到四十六萬七千二百二十一筆。重複判定包含價格但排除編號，不是按 ID 刪除。這張表是最終 fit 的資料，年度回測另按時間切分且不混入 valid。test 四萬七千零七十三筆全數保留，依 sample 順序輸出。</a:t>
+              <a:t>原 train 有四十五萬五千七百八十七列，移除混入的三列英文表頭，再排除五百二十九列完全重複交易。最終加入 valid 並移除二十八列跨集重複，得到四十六萬七千二百二十一筆。重複判定包含價格、排除編號，不是按照相同 ID 刪除。年度回測則另按時間切分且不混 valid。test 四萬七千零七十三筆全部保留，依 sample 順序輸出。</a:t>
             </a:r>
           </a:p>
           <a:p xmlns:a="http://schemas.openxmlformats.org/drawingml/2006/main">
@@ -1517,27 +1291,17 @@
           </a:p>
           <a:p xmlns:a="http://schemas.openxmlformats.org/drawingml/2006/main">
             <a:r>
-              <a:t>REPORT.md，第 2 節</a:t>
-            </a:r>
-          </a:p>
-          <a:p xmlns:a="http://schemas.openxmlformats.org/drawingml/2006/main">
-            <a:r>
-              <a:t>research/src/model_common.py:25</a:t>
-            </a:r>
-          </a:p>
-          <a:p xmlns:a="http://schemas.openxmlformats.org/drawingml/2006/main">
-            <a:r>
-              <a:t>research/src/round79_final.py:83</a:t>
-            </a:r>
-          </a:p>
-          <a:p xmlns:a="http://schemas.openxmlformats.org/drawingml/2006/main">
-            <a:r>
-              <a:t/>
-            </a:r>
-          </a:p>
-          <a:p xmlns:a="http://schemas.openxmlformats.org/drawingml/2006/main">
-            <a:r>
-              <a:t>本簡報整理 v22 已完成的方法與結果。Private 成績未知，最終候選尚未定案。</a:t>
+              <a:t>REPORT.md，第 2 至 4 節</a:t>
+            </a:r>
+          </a:p>
+          <a:p xmlns:a="http://schemas.openxmlformats.org/drawingml/2006/main">
+            <a:r>
+              <a:t>research/src/prepare_data.py</a:t>
+            </a:r>
+          </a:p>
+          <a:p xmlns:a="http://schemas.openxmlformats.org/drawingml/2006/main">
+            <a:r>
+              <a:t>research/src/model_common.py</a:t>
             </a:r>
           </a:p>
         </p:txBody>
@@ -1607,7 +1371,7 @@
           <a:lstStyle xmlns:a="http://schemas.openxmlformats.org/drawingml/2006/main"/>
           <a:p xmlns:a="http://schemas.openxmlformats.org/drawingml/2006/main">
             <a:r>
-              <a:t>建議時間：35 秒</a:t>
+              <a:t>建議時間：40 秒</a:t>
             </a:r>
           </a:p>
           <a:p xmlns:a="http://schemas.openxmlformats.org/drawingml/2006/main">
@@ -1617,7 +1381,7 @@
           </a:p>
           <a:p xmlns:a="http://schemas.openxmlformats.org/drawingml/2006/main">
             <a:r>
-              <a:t>共同基礎有八十七個特徵，包括民國日期、中文樓層、地址與面積比例等轉換。單價 CatBoost 再加八個道路地理欄位，共九十五個，其中二十三個類別欄。這個維度只適用這支樹模型，神經網路另有自己的編碼。編號、目標價格、完整備註與解約情形不作輸入。道路位置也不等同精確門牌。外部地圖沒有成交價格，我們沒有去內政部查 test 的答案。</a:t>
+              <a:t>共同基礎有八十七個特徵，包括民國日期、中文樓層、地址與面積比例等。單價 CatBoost 再加八個道路地理欄位，共九十五欄，其中二十三欄為類別。其他模型有自己的編碼維度。編號、目標價格、完整備註與解約情形不作輸入。價格標籤只來自課程資料，OSM 道路地圖沒有提供成交價格，也沒有查詢內政部的 test 答案。</a:t>
             </a:r>
           </a:p>
           <a:p xmlns:a="http://schemas.openxmlformats.org/drawingml/2006/main">
@@ -1637,22 +1401,12 @@
           </a:p>
           <a:p xmlns:a="http://schemas.openxmlformats.org/drawingml/2006/main">
             <a:r>
-              <a:t>research/src/house_features.py:99</a:t>
-            </a:r>
-          </a:p>
-          <a:p xmlns:a="http://schemas.openxmlformats.org/drawingml/2006/main">
-            <a:r>
-              <a:t>research/src/round6_geo.py:9</a:t>
-            </a:r>
-          </a:p>
-          <a:p xmlns:a="http://schemas.openxmlformats.org/drawingml/2006/main">
-            <a:r>
-              <a:t/>
-            </a:r>
-          </a:p>
-          <a:p xmlns:a="http://schemas.openxmlformats.org/drawingml/2006/main">
-            <a:r>
-              <a:t>本簡報整理 v22 已完成的方法與結果。Private 成績未知，最終候選尚未定案。</a:t>
+              <a:t>research/src/house_features.py</a:t>
+            </a:r>
+          </a:p>
+          <a:p xmlns:a="http://schemas.openxmlformats.org/drawingml/2006/main">
+            <a:r>
+              <a:t>evidence/data_external/geography/ATTRIBUTION.md</a:t>
             </a:r>
           </a:p>
         </p:txBody>
@@ -1722,7 +1476,7 @@
           <a:lstStyle xmlns:a="http://schemas.openxmlformats.org/drawingml/2006/main"/>
           <a:p xmlns:a="http://schemas.openxmlformats.org/drawingml/2006/main">
             <a:r>
-              <a:t>建議時間：50 秒</a:t>
+              <a:t>建議時間：55 秒</a:t>
             </a:r>
           </a:p>
           <a:p xmlns:a="http://schemas.openxmlformats.org/drawingml/2006/main">
@@ -1732,7 +1486,7 @@
           </a:p>
           <a:p xmlns:a="http://schemas.openxmlformats.org/drawingml/2006/main">
             <a:r>
-              <a:t>v22 有三條價格分支，分支內還包含多個模型。單價分支學每單位面積價格，再乘回面積。對數分支用另一種尺度表示總價，神經網路提供不同的非線性預測。每條分支先還原成元，再以訓練資料中的同建案、地址、道路等可比成交與時間趨勢修正，必要時補上空間修正。最後逐筆取三個價格的中位數。這可以降低某一條分支極端輸出的影響，但三條一起錯時仍會錯。完整係數放在附錄。</a:t>
+              <a:t>總價可以從單價乘上面積來理解，所以我們先建立單價分支，學習單位面積價格後乘回面積。對數分支結合直接總價與對數總價，神經網路則用面積連結和價格先驗倍率提供不同的非線性預測。共有三個 CatBoost、一個 LightGBM 和兩個 NN，其中同一個 LightGBM 在三條分支共用，所以模型總數是六個。所有模型先換回總價元，再利用 fit 中的建案、地址或道路等可比成交與時間趨勢修正，支持較弱時補充固定的空間修正。最後才組合三條分支。</a:t>
             </a:r>
           </a:p>
           <a:p xmlns:a="http://schemas.openxmlformats.org/drawingml/2006/main">
@@ -1752,27 +1506,7 @@
           </a:p>
           <a:p xmlns:a="http://schemas.openxmlformats.org/drawingml/2006/main">
             <a:r>
-              <a:t>research/src/round79_final.py:153</a:t>
-            </a:r>
-          </a:p>
-          <a:p xmlns:a="http://schemas.openxmlformats.org/drawingml/2006/main">
-            <a:r>
-              <a:t>research/src/round71_final.py:115</a:t>
-            </a:r>
-          </a:p>
-          <a:p xmlns:a="http://schemas.openxmlformats.org/drawingml/2006/main">
-            <a:r>
-              <a:t>research/src/round46_trial_release.py:243</a:t>
-            </a:r>
-          </a:p>
-          <a:p xmlns:a="http://schemas.openxmlformats.org/drawingml/2006/main">
-            <a:r>
-              <a:t/>
-            </a:r>
-          </a:p>
-          <a:p xmlns:a="http://schemas.openxmlformats.org/drawingml/2006/main">
-            <a:r>
-              <a:t>本簡報整理 v22 已完成的方法與結果。Private 成績未知，最終候選尚未定案。</a:t>
+              <a:t>src/predict_v22.py</a:t>
             </a:r>
           </a:p>
         </p:txBody>
@@ -1852,7 +1586,7 @@
           </a:p>
           <a:p xmlns:a="http://schemas.openxmlformats.org/drawingml/2006/main">
             <a:r>
-              <a:t>v22 相對 v20 的主要改動，是在單價 CatBoost 原有面積權重上，乘上日期權重。日期採三百六十五天半衰期，所以相差一年的有效成交，較早一筆的日期權重約是一半。圖中的一、零點五、零點二五是正規化前的相對值，實際資料還會正規化再乘面積權重。這不是只留下最近一年，而是仍保留可用舊資料。面積權重讓單價損失對齊總價 MAE，日期權重則讓近期成交更有影響力。</a:t>
+              <a:t>房價會隨時間改變，單價 CatBoost 因此採三百六十五天半衰期的日期權重。同一 fit 內相差一年的有效交易，較早一筆日期權重約是一半。圖上是正規化前的比例，實際權重會正規化後再乘面積權重。面積權重把單價誤差對齊總價誤差，日期權重提高近期成交在訓練中的影響。舊資料仍保留。這張圖只在說明單價模型的設計，其他分支各有其訓練目標。</a:t>
             </a:r>
           </a:p>
           <a:p xmlns:a="http://schemas.openxmlformats.org/drawingml/2006/main">
@@ -1872,22 +1606,7 @@
           </a:p>
           <a:p xmlns:a="http://schemas.openxmlformats.org/drawingml/2006/main">
             <a:r>
-              <a:t>research/src/round79_recency_unit.py:78</a:t>
-            </a:r>
-          </a:p>
-          <a:p xmlns:a="http://schemas.openxmlformats.org/drawingml/2006/main">
-            <a:r>
-              <a:t>research/src/round60_recency_price_prior.py:49</a:t>
-            </a:r>
-          </a:p>
-          <a:p xmlns:a="http://schemas.openxmlformats.org/drawingml/2006/main">
-            <a:r>
-              <a:t/>
-            </a:r>
-          </a:p>
-          <a:p xmlns:a="http://schemas.openxmlformats.org/drawingml/2006/main">
-            <a:r>
-              <a:t>本簡報整理 v22 已完成的方法與結果。Private 成績未知，最終候選尚未定案。</a:t>
+              <a:t>research/src/round79_recency_unit.py</a:t>
             </a:r>
           </a:p>
         </p:txBody>
@@ -1967,7 +1686,7 @@
           </a:p>
           <a:p xmlns:a="http://schemas.openxmlformats.org/drawingml/2006/main">
             <a:r>
-              <a:t>我們用三個完整年度做時間回測，每次只用評分起點以前的 train，預測接下來一年。模型、編碼與價格參考都必須依該期 fit 建立，不能把看過評分價格的全量模型拿回來測。這比把年份隨機混在一起，更接近用過去推估未來。不過這些年度已反覆用於研究，晚期訓練也包含較早的評分年度，因此不是三個獨立試驗，也不是新盲測。</a:t>
+              <a:t>這是方便理解的假設例子，不是真實交易。假設三條分支修正後分別預測一千兩百萬、一千三百二十萬和一千九百萬，排序後的中間值是一千三百二十萬，所以它成為這一筆的最終預測。下一筆交易的中間值可能來自另一條分支。這樣能降低單條極端輸出的影響，但若三條一起偏高或偏低，中位數也無法消除共同錯誤。</a:t>
             </a:r>
           </a:p>
           <a:p xmlns:a="http://schemas.openxmlformats.org/drawingml/2006/main">
@@ -1982,22 +1701,12 @@
           </a:p>
           <a:p xmlns:a="http://schemas.openxmlformats.org/drawingml/2006/main">
             <a:r>
-              <a:t>REPORT.md，第 5、7 節</a:t>
-            </a:r>
-          </a:p>
-          <a:p xmlns:a="http://schemas.openxmlformats.org/drawingml/2006/main">
-            <a:r>
-              <a:t>evidence/outputs/round79/plan.json</a:t>
-            </a:r>
-          </a:p>
-          <a:p xmlns:a="http://schemas.openxmlformats.org/drawingml/2006/main">
-            <a:r>
-              <a:t/>
-            </a:r>
-          </a:p>
-          <a:p xmlns:a="http://schemas.openxmlformats.org/drawingml/2006/main">
-            <a:r>
-              <a:t>本簡報整理 v22 已完成的方法與結果。Private 成績未知，最終候選尚未定案。</a:t>
+              <a:t>REPORT.md，第 2 至 4 節</a:t>
+            </a:r>
+          </a:p>
+          <a:p xmlns:a="http://schemas.openxmlformats.org/drawingml/2006/main">
+            <a:r>
+              <a:t>Illustrative numbers only; not model predictions or evaluation evidence.</a:t>
             </a:r>
           </a:p>
         </p:txBody>
@@ -2077,7 +1786,7 @@
           </a:p>
           <a:p xmlns:a="http://schemas.openxmlformats.org/drawingml/2006/main">
             <a:r>
-              <a:t>這張圖按時間順序比較 v20 與 v22，單位是萬元。v22 三期的整體 MAE 都較低，改善幅度依序約二點六五、零點六二、一點九四百分比。最小的改善出現在中間年度，配對抽樣區間也跨過零，所以不能說三期都證明有穩定優勢。這些結果提供跨時間的比較依據，但窗口重用造成的選型偏差仍然存在。</a:t>
+              <a:t>我們用三個完整年度做時間回測。每次只用評分起點以前的 train，再預測接下來一年。模型、編碼、價格先驗與成交參考都必須按同一期 fit 建立，避免未來的 query 價格洩漏。回測不加入另外提供的 valid。這些歷史時間窗曾多次參與研究，較晚的訓練也包含較早的評分年度，因此它們不是三次獨立盲測。</a:t>
             </a:r>
           </a:p>
           <a:p xmlns:a="http://schemas.openxmlformats.org/drawingml/2006/main">
@@ -2092,27 +1801,12 @@
           </a:p>
           <a:p xmlns:a="http://schemas.openxmlformats.org/drawingml/2006/main">
             <a:r>
-              <a:t>evidence/reports/round79_report.md</a:t>
-            </a:r>
-          </a:p>
-          <a:p xmlns:a="http://schemas.openxmlformats.org/drawingml/2006/main">
-            <a:r>
-              <a:t>evidence/outputs/round79/results.json</a:t>
-            </a:r>
-          </a:p>
-          <a:p xmlns:a="http://schemas.openxmlformats.org/drawingml/2006/main">
-            <a:r>
-              <a:t>evidence/outputs/round79/paired_vs_v20/results.json</a:t>
-            </a:r>
-          </a:p>
-          <a:p xmlns:a="http://schemas.openxmlformats.org/drawingml/2006/main">
-            <a:r>
-              <a:t/>
-            </a:r>
-          </a:p>
-          <a:p xmlns:a="http://schemas.openxmlformats.org/drawingml/2006/main">
-            <a:r>
-              <a:t>本簡報整理 v22 已完成的方法與結果。Private 成績未知，最終候選尚未定案。</a:t>
+              <a:t>REPORT.md，第 5、7 節</a:t>
+            </a:r>
+          </a:p>
+          <a:p xmlns:a="http://schemas.openxmlformats.org/drawingml/2006/main">
+            <a:r>
+              <a:t>evidence/outputs/round79/plan.json</a:t>
             </a:r>
           </a:p>
         </p:txBody>
@@ -2182,7 +1876,7 @@
           <a:lstStyle xmlns:a="http://schemas.openxmlformats.org/drawingml/2006/main"/>
           <a:p xmlns:a="http://schemas.openxmlformats.org/drawingml/2006/main">
             <a:r>
-              <a:t>建議時間：45 秒</a:t>
+              <a:t>建議時間：40 秒</a:t>
             </a:r>
           </a:p>
           <a:p xmlns:a="http://schemas.openxmlformats.org/drawingml/2006/main">
@@ -2192,7 +1886,7 @@
           </a:p>
           <a:p xmlns:a="http://schemas.openxmlformats.org/drawingml/2006/main">
             <a:r>
-              <a:t>這是使用者實際提交後提供的六個 Public 分數，圖上以萬元顯示。v22 的完整 MAE 是一百九十九萬八千五百六十八點五七零六元，在這六版中最低。相對 v20，平均每筆誤差少約七萬一千兩百六十九元，降低三點四四百分比。這是 MAE 降低，不是準確率增加。較新的 v23 和 v24 在這次 Public 沒有超過 v22，但最終七成 test 的 Private 仍未知，不能把公開結果當成 Private 保證。</a:t>
+              <a:t>固定同一套方法，在三個時間切分分別重建模型與狀態後，整體 MAE 依序約二百三十點九四萬、一百四十點七四萬與一百三十八點三二萬元。這三根柱子的評分交易不同，房屋組成與市場狀態也不同，所以不能把後兩期較低直接解釋成模型改版的進步。它們描述這套方法在不同年度的誤差範圍。</a:t>
             </a:r>
           </a:p>
           <a:p xmlns:a="http://schemas.openxmlformats.org/drawingml/2006/main">
@@ -2207,22 +1901,12 @@
           </a:p>
           <a:p xmlns:a="http://schemas.openxmlformats.org/drawingml/2006/main">
             <a:r>
-              <a:t>evidence/outputs/kaggle_feedback/public_submissions_v19_v24_20260927.json</a:t>
-            </a:r>
-          </a:p>
-          <a:p xmlns:a="http://schemas.openxmlformats.org/drawingml/2006/main">
-            <a:r>
-              <a:t>evidence/outputs/kaggle_feedback/public_submissions_v19_v24_20260927.png</a:t>
-            </a:r>
-          </a:p>
-          <a:p xmlns:a="http://schemas.openxmlformats.org/drawingml/2006/main">
-            <a:r>
-              <a:t/>
-            </a:r>
-          </a:p>
-          <a:p xmlns:a="http://schemas.openxmlformats.org/drawingml/2006/main">
-            <a:r>
-              <a:t>本簡報整理 v22 已完成的方法與結果。Private 成績未知，最終候選尚未定案。</a:t>
+              <a:t>REPORT.md，第 5、7 節</a:t>
+            </a:r>
+          </a:p>
+          <a:p xmlns:a="http://schemas.openxmlformats.org/drawingml/2006/main">
+            <a:r>
+              <a:t>evidence/outputs/round79/results.json</a:t>
             </a:r>
           </a:p>
         </p:txBody>
@@ -2290,7 +1974,7 @@
   </p:cSld>
   <p:clrMap bg1="lt1" tx1="dk1" bg2="lt2" tx2="dk2" accent1="accent1" accent2="accent2" accent3="accent3" accent4="accent4" accent5="accent5" accent6="accent6" hlink="hlink" folHlink="folHlink"/>
   <p:sldLayoutIdLst>
-    <p:sldLayoutId xmlns:r="http://schemas.openxmlformats.org/officeDocument/2006/relationships" id="2147483649" r:id="R06a72e2fce8a496a"/>
+    <p:sldLayoutId xmlns:r="http://schemas.openxmlformats.org/officeDocument/2006/relationships" id="2147483649" r:id="Rc353ef50ebf14df7"/>
   </p:sldLayoutIdLst>
   <p:txStyles>
     <p:titleStyle>
@@ -3150,26 +2834,53 @@
           <c:idx val="0"/>
           <c:order val="0"/>
           <c:tx>
-            <c:v>v20</c:v>
+            <c:v>假設預測</c:v>
           </c:tx>
           <c:spPr>
             <a:solidFill xmlns:a="http://schemas.openxmlformats.org/drawingml/2006/main">
               <a:srgbClr val="ABB7AC"/>
             </a:solidFill>
           </c:spPr>
+          <c:dPt>
+            <c:idx val="0"/>
+            <c:invertIfNegative val="0"/>
+            <c:spPr>
+              <a:solidFill xmlns:a="http://schemas.openxmlformats.org/drawingml/2006/main">
+                <a:srgbClr val="ABB7AC"/>
+              </a:solidFill>
+            </c:spPr>
+          </c:dPt>
+          <c:dPt>
+            <c:idx val="1"/>
+            <c:invertIfNegative val="0"/>
+            <c:spPr>
+              <a:solidFill xmlns:a="http://schemas.openxmlformats.org/drawingml/2006/main">
+                <a:srgbClr val="31644F"/>
+              </a:solidFill>
+            </c:spPr>
+          </c:dPt>
+          <c:dPt>
+            <c:idx val="2"/>
+            <c:invertIfNegative val="0"/>
+            <c:spPr>
+              <a:solidFill xmlns:a="http://schemas.openxmlformats.org/drawingml/2006/main">
+                <a:srgbClr val="ABB7AC"/>
+              </a:solidFill>
+            </c:spPr>
+          </c:dPt>
           <c:cat>
             <c:strRef>
               <c:f>'Chart Data'!$A$2:$A$4</c:f>
               <c:strCache>
                 <c:ptCount val="3"/>
                 <c:pt idx="0">
-                  <c:v>2021–2022</c:v>
+                  <c:v>單價分支</c:v>
                 </c:pt>
                 <c:pt idx="1">
-                  <c:v>2022–2023</c:v>
+                  <c:v>對數分支</c:v>
                 </c:pt>
                 <c:pt idx="2">
-                  <c:v>2023–2024</c:v>
+                  <c:v>神經網路分支</c:v>
                 </c:pt>
               </c:strCache>
             </c:strRef>
@@ -3178,63 +2889,16 @@
             <c:numRef>
               <c:f>'Chart Data'!$B$2:$B$4</c:f>
               <c:numCache>
-                <c:formatCode>0.00</c:formatCode>
+                <c:formatCode>#,##0</c:formatCode>
                 <c:ptCount val="3"/>
                 <c:pt idx="0">
-                  <c:v>237.22</c:v>
+                  <c:v>1200</c:v>
                 </c:pt>
                 <c:pt idx="1">
-                  <c:v>141.61</c:v>
+                  <c:v>1320</c:v>
                 </c:pt>
                 <c:pt idx="2">
-                  <c:v>141.07</c:v>
-                </c:pt>
-              </c:numCache>
-            </c:numRef>
-          </c:val>
-        </c:ser>
-        <c:ser>
-          <c:idx val="1"/>
-          <c:order val="1"/>
-          <c:tx>
-            <c:v>v22</c:v>
-          </c:tx>
-          <c:spPr>
-            <a:solidFill xmlns:a="http://schemas.openxmlformats.org/drawingml/2006/main">
-              <a:srgbClr val="31644F"/>
-            </a:solidFill>
-          </c:spPr>
-          <c:cat>
-            <c:strRef>
-              <c:f>'Chart Data'!$C$2:$C$4</c:f>
-              <c:strCache>
-                <c:ptCount val="3"/>
-                <c:pt idx="0">
-                  <c:v>2021–2022</c:v>
-                </c:pt>
-                <c:pt idx="1">
-                  <c:v>2022–2023</c:v>
-                </c:pt>
-                <c:pt idx="2">
-                  <c:v>2023–2024</c:v>
-                </c:pt>
-              </c:strCache>
-            </c:strRef>
-          </c:cat>
-          <c:val>
-            <c:numRef>
-              <c:f>'Chart Data'!$D$2:$D$4</c:f>
-              <c:numCache>
-                <c:formatCode>0.00</c:formatCode>
-                <c:ptCount val="3"/>
-                <c:pt idx="0">
-                  <c:v>230.94</c:v>
-                </c:pt>
-                <c:pt idx="1">
-                  <c:v>140.74</c:v>
-                </c:pt>
-                <c:pt idx="2">
-                  <c:v>138.32</c:v>
+                  <c:v>1900</c:v>
                 </c:pt>
               </c:numCache>
             </c:numRef>
@@ -3246,7 +2910,7 @@
             <a:lstStyle xmlns:a="http://schemas.openxmlformats.org/drawingml/2006/main"/>
             <a:p xmlns:a="http://schemas.openxmlformats.org/drawingml/2006/main">
               <a:pPr>
-                <a:defRPr sz="1650">
+                <a:defRPr sz="1800" b="1">
                   <a:solidFill>
                     <a:srgbClr val="34483F"/>
                   </a:solidFill>
@@ -3266,7 +2930,7 @@
           <c:showBubbleSize val="0"/>
           <c:showLeaderLines val="0"/>
         </c:dLbls>
-        <c:gapWidth val="80"/>
+        <c:gapWidth val="100"/>
         <c:axId val="48650112"/>
         <c:axId val="48672768"/>
       </c:barChart>
@@ -3309,7 +2973,7 @@
         <c:axId val="48672768"/>
         <c:scaling>
           <c:orientation val="minMax"/>
-          <c:max val="260"/>
+          <c:max val="2200"/>
           <c:min val="0"/>
         </c:scaling>
         <c:delete val="0"/>
@@ -3323,7 +2987,7 @@
             </a:ln>
           </c:spPr>
         </c:majorGridlines>
-        <c:numFmt formatCode="0"/>
+        <c:numFmt formatCode="#,##0"/>
         <c:majorTickMark val="none"/>
         <c:minorTickMark val="none"/>
         <c:spPr>
@@ -3351,32 +3015,12 @@
         </c:txPr>
         <c:crossAx val="48650112"/>
         <c:crossBetween val="between"/>
-        <c:majorUnit val="50"/>
+        <c:majorUnit val="500"/>
       </c:valAx>
       <c:spPr>
         <a:noFill xmlns:a="http://schemas.openxmlformats.org/drawingml/2006/main"/>
       </c:spPr>
     </c:plotArea>
-    <c:legend>
-      <c:legendPos val="t"/>
-      <c:overlay val="0"/>
-      <c:txPr>
-        <a:bodyPr xmlns:a="http://schemas.openxmlformats.org/drawingml/2006/main" anchorCtr="1"/>
-        <a:lstStyle xmlns:a="http://schemas.openxmlformats.org/drawingml/2006/main"/>
-        <a:p xmlns:a="http://schemas.openxmlformats.org/drawingml/2006/main">
-          <a:pPr>
-            <a:defRPr sz="1800">
-              <a:solidFill>
-                <a:srgbClr val="34483F"/>
-              </a:solidFill>
-              <a:latin typeface="Microsoft JhengHei"/>
-              <a:ea typeface="Microsoft JhengHei"/>
-              <a:cs typeface="Microsoft JhengHei"/>
-            </a:defRPr>
-          </a:pPr>
-        </a:p>
-      </c:txPr>
-    </c:legend>
     <c:plotVisOnly val="1"/>
   </c:chart>
   <c:spPr>
@@ -3404,116 +3048,44 @@
           <c:idx val="0"/>
           <c:order val="0"/>
           <c:tx>
-            <c:v>Public MAE</c:v>
+            <c:v>提交模型的時間回測</c:v>
           </c:tx>
           <c:spPr>
             <a:solidFill xmlns:a="http://schemas.openxmlformats.org/drawingml/2006/main">
-              <a:srgbClr val="ABB7AC"/>
+              <a:srgbClr val="31644F"/>
             </a:solidFill>
           </c:spPr>
-          <c:dPt>
-            <c:idx val="0"/>
-            <c:invertIfNegative val="0"/>
-            <c:spPr>
-              <a:solidFill xmlns:a="http://schemas.openxmlformats.org/drawingml/2006/main">
-                <a:srgbClr val="ABB7AC"/>
-              </a:solidFill>
-            </c:spPr>
-          </c:dPt>
-          <c:dPt>
-            <c:idx val="1"/>
-            <c:invertIfNegative val="0"/>
-            <c:spPr>
-              <a:solidFill xmlns:a="http://schemas.openxmlformats.org/drawingml/2006/main">
-                <a:srgbClr val="ABB7AC"/>
-              </a:solidFill>
-            </c:spPr>
-          </c:dPt>
-          <c:dPt>
-            <c:idx val="2"/>
-            <c:invertIfNegative val="0"/>
-            <c:spPr>
-              <a:solidFill xmlns:a="http://schemas.openxmlformats.org/drawingml/2006/main">
-                <a:srgbClr val="ABB7AC"/>
-              </a:solidFill>
-            </c:spPr>
-          </c:dPt>
-          <c:dPt>
-            <c:idx val="3"/>
-            <c:invertIfNegative val="0"/>
-            <c:spPr>
-              <a:solidFill xmlns:a="http://schemas.openxmlformats.org/drawingml/2006/main">
-                <a:srgbClr val="31644F"/>
-              </a:solidFill>
-            </c:spPr>
-          </c:dPt>
-          <c:dPt>
-            <c:idx val="4"/>
-            <c:invertIfNegative val="0"/>
-            <c:spPr>
-              <a:solidFill xmlns:a="http://schemas.openxmlformats.org/drawingml/2006/main">
-                <a:srgbClr val="ABB7AC"/>
-              </a:solidFill>
-            </c:spPr>
-          </c:dPt>
-          <c:dPt>
-            <c:idx val="5"/>
-            <c:invertIfNegative val="0"/>
-            <c:spPr>
-              <a:solidFill xmlns:a="http://schemas.openxmlformats.org/drawingml/2006/main">
-                <a:srgbClr val="ABB7AC"/>
-              </a:solidFill>
-            </c:spPr>
-          </c:dPt>
           <c:cat>
             <c:strRef>
-              <c:f>'Chart Data'!$A$2:$A$7</c:f>
+              <c:f>'Chart Data'!$A$2:$A$4</c:f>
               <c:strCache>
-                <c:ptCount val="6"/>
+                <c:ptCount val="3"/>
                 <c:pt idx="0">
-                  <c:v>v19</c:v>
+                  <c:v>2021–2022</c:v>
                 </c:pt>
                 <c:pt idx="1">
-                  <c:v>v20</c:v>
+                  <c:v>2022–2023</c:v>
                 </c:pt>
                 <c:pt idx="2">
-                  <c:v>v21</c:v>
-                </c:pt>
-                <c:pt idx="3">
-                  <c:v>v22</c:v>
-                </c:pt>
-                <c:pt idx="4">
-                  <c:v>v23</c:v>
-                </c:pt>
-                <c:pt idx="5">
-                  <c:v>v24</c:v>
+                  <c:v>2023–2024</c:v>
                 </c:pt>
               </c:strCache>
             </c:strRef>
           </c:cat>
           <c:val>
             <c:numRef>
-              <c:f>'Chart Data'!$B$2:$B$7</c:f>
+              <c:f>'Chart Data'!$B$2:$B$4</c:f>
               <c:numCache>
                 <c:formatCode>0.00</c:formatCode>
-                <c:ptCount val="6"/>
+                <c:ptCount val="3"/>
                 <c:pt idx="0">
-                  <c:v>238.73</c:v>
+                  <c:v>230.94</c:v>
                 </c:pt>
                 <c:pt idx="1">
-                  <c:v>206.98</c:v>
+                  <c:v>140.74</c:v>
                 </c:pt>
                 <c:pt idx="2">
-                  <c:v>207.1</c:v>
-                </c:pt>
-                <c:pt idx="3">
-                  <c:v>199.86</c:v>
-                </c:pt>
-                <c:pt idx="4">
-                  <c:v>202.7</c:v>
-                </c:pt>
-                <c:pt idx="5">
-                  <c:v>208.3</c:v>
+                  <c:v>138.32</c:v>
                 </c:pt>
               </c:numCache>
             </c:numRef>
@@ -3525,7 +3097,7 @@
             <a:lstStyle xmlns:a="http://schemas.openxmlformats.org/drawingml/2006/main"/>
             <a:p xmlns:a="http://schemas.openxmlformats.org/drawingml/2006/main">
               <a:pPr>
-                <a:defRPr sz="1650">
+                <a:defRPr sz="2025" b="1">
                   <a:solidFill>
                     <a:srgbClr val="34483F"/>
                   </a:solidFill>
@@ -3545,7 +3117,7 @@
           <c:showBubbleSize val="0"/>
           <c:showLeaderLines val="0"/>
         </c:dLbls>
-        <c:gapWidth val="80"/>
+        <c:gapWidth val="125"/>
         <c:axId val="48650112"/>
         <c:axId val="48672768"/>
       </c:barChart>
@@ -3678,7 +3250,7 @@
           <p:nvPr/>
         </p:nvPicPr>
         <p:blipFill>
-          <a:blip xmlns:r="http://schemas.openxmlformats.org/officeDocument/2006/relationships" xmlns:a="http://schemas.openxmlformats.org/drawingml/2006/main" r:embed="Rad811960d82e4f6e"/>
+          <a:blip xmlns:r="http://schemas.openxmlformats.org/officeDocument/2006/relationships" xmlns:a="http://schemas.openxmlformats.org/drawingml/2006/main" r:embed="Rca02be455ac24704"/>
           <a:srcRect xmlns:a="http://schemas.openxmlformats.org/drawingml/2006/main" l="25667" t="0" r="25667" b="0"/>
           <a:stretch xmlns:a="http://schemas.openxmlformats.org/drawingml/2006/main">
             <a:fillRect l="0" t="0" r="0" b="0"/>
@@ -3696,10 +3268,10 @@
       </p:pic>
       <p:sp>
         <p:nvSpPr>
-          <p:cNvPr id="2" name="cover-title">
+          <p:cNvPr id="2" name="text">
             <a:extLst xmlns:a="http://schemas.openxmlformats.org/drawingml/2006/main">
               <a:ext uri="{FF2B5EF4-FFF2-40B4-BE49-F238E27FC236}">
-                <a16:creationId xmlns:a16="http://schemas.microsoft.com/office/drawing/2014/main" id="{82A6297E-C458-4C95-983A-654A04A49BF6}"/>
+                <a16:creationId xmlns:a16="http://schemas.microsoft.com/office/drawing/2014/main" id="{E0410D95-4F90-41C0-9A59-9C3A86871D3D}"/>
               </a:ext>
             </a:extLst>
           </p:cNvPr>
@@ -3779,7 +3351,7 @@
           <p:cNvPr id="3" name="text">
             <a:extLst xmlns:a="http://schemas.openxmlformats.org/drawingml/2006/main">
               <a:ext uri="{FF2B5EF4-FFF2-40B4-BE49-F238E27FC236}">
-                <a16:creationId xmlns:a16="http://schemas.microsoft.com/office/drawing/2014/main" id="{C7E3EE57-BFE9-4E1E-8660-23D66F3A24BF}"/>
+                <a16:creationId xmlns:a16="http://schemas.microsoft.com/office/drawing/2014/main" id="{BA06AC2A-FE19-4799-9655-31504DE96130}"/>
               </a:ext>
             </a:extLst>
           </p:cNvPr>
@@ -3826,7 +3398,7 @@
                 <a:ea typeface="Microsoft JhengHei"/>
                 <a:cs typeface="Microsoft JhengHei"/>
               </a:rPr>
-              <a:t>近期成交加權與多模型組合</a:t>
+              <a:t>近期成交加權與多模型回歸</a:t>
             </a:r>
           </a:p>
         </p:txBody>
@@ -3836,7 +3408,7 @@
           <p:cNvPr id="4" name="text">
             <a:extLst xmlns:a="http://schemas.openxmlformats.org/drawingml/2006/main">
               <a:ext uri="{FF2B5EF4-FFF2-40B4-BE49-F238E27FC236}">
-                <a16:creationId xmlns:a16="http://schemas.microsoft.com/office/drawing/2014/main" id="{1E91F539-D61F-48FE-A044-D2D92E02FF5B}"/>
+                <a16:creationId xmlns:a16="http://schemas.microsoft.com/office/drawing/2014/main" id="{D8DDDACE-9E9A-4F12-B06A-DA71E973AC74}"/>
               </a:ext>
             </a:extLst>
           </p:cNvPr>
@@ -3883,7 +3455,7 @@
                 <a:ea typeface="Microsoft JhengHei"/>
                 <a:cs typeface="Microsoft JhengHei"/>
               </a:rPr>
-              <a:t>v22 研究成果報告</a:t>
+              <a:t>本次選定提交模型 v22</a:t>
             </a:r>
           </a:p>
         </p:txBody>
@@ -3893,7 +3465,7 @@
           <p:cNvPr id="5" name="text">
             <a:extLst xmlns:a="http://schemas.openxmlformats.org/drawingml/2006/main">
               <a:ext uri="{FF2B5EF4-FFF2-40B4-BE49-F238E27FC236}">
-                <a16:creationId xmlns:a16="http://schemas.microsoft.com/office/drawing/2014/main" id="{9653E386-02ED-451B-869C-8D8DAF9C3693}"/>
+                <a16:creationId xmlns:a16="http://schemas.microsoft.com/office/drawing/2014/main" id="{7F0A4845-4E3D-4CA2-933E-717A0C164B69}"/>
               </a:ext>
             </a:extLst>
           </p:cNvPr>
@@ -3940,7 +3512,7 @@
                 <a:ea typeface="Microsoft JhengHei"/>
                 <a:cs typeface="Microsoft JhengHei"/>
               </a:rPr>
-              <a:t>監督式回歸專題</a:t>
+              <a:t>機器學習專題報告</a:t>
             </a:r>
           </a:p>
         </p:txBody>
@@ -3950,7 +3522,7 @@
           <p:cNvPr id="6" name="text">
             <a:extLst xmlns:a="http://schemas.openxmlformats.org/drawingml/2006/main">
               <a:ext uri="{FF2B5EF4-FFF2-40B4-BE49-F238E27FC236}">
-                <a16:creationId xmlns:a16="http://schemas.microsoft.com/office/drawing/2014/main" id="{025AE81B-90A8-4C2A-B960-06B99796F2EB}"/>
+                <a16:creationId xmlns:a16="http://schemas.microsoft.com/office/drawing/2014/main" id="{9499BD7C-4D9E-48D6-87D6-C35076F5CBB3}"/>
               </a:ext>
             </a:extLst>
           </p:cNvPr>
@@ -4005,7 +3577,7 @@
     </p:spTree>
     <p:extLst>
       <p:ext uri="{BB962C8B-B14F-4D97-AF65-F5344CB8AC3E}">
-        <p14:creationId xmlns:p14="http://schemas.microsoft.com/office/powerpoint/2010/main" val="1065756010"/>
+        <p14:creationId xmlns:p14="http://schemas.microsoft.com/office/powerpoint/2010/main" val="982052645"/>
       </p:ext>
     </p:extLst>
   </p:cSld>
@@ -4036,7 +3608,7 @@
           <p:cNvPr id="9" name="slide-title">
             <a:extLst xmlns:a="http://schemas.openxmlformats.org/drawingml/2006/main">
               <a:ext uri="{FF2B5EF4-FFF2-40B4-BE49-F238E27FC236}">
-                <a16:creationId xmlns:a16="http://schemas.microsoft.com/office/drawing/2014/main" id="{6D0DD904-4FC3-411E-83DE-831475396EE0}"/>
+                <a16:creationId xmlns:a16="http://schemas.microsoft.com/office/drawing/2014/main" id="{0DC1883C-E994-41BE-B39B-00397179CE57}"/>
               </a:ext>
             </a:extLst>
           </p:cNvPr>
@@ -4083,7 +3655,7 @@
                 <a:ea typeface="Microsoft JhengHei"/>
                 <a:cs typeface="Microsoft JhengHei"/>
               </a:rPr>
-              <a:t>v24 的三期本機整體 MAE 更低</a:t>
+              <a:t>Kaggle Public 的平均誤差約 199.86 萬元</a:t>
             </a:r>
           </a:p>
         </p:txBody>
@@ -4093,7 +3665,7 @@
           <p:cNvPr id="2" name="text">
             <a:extLst xmlns:a="http://schemas.openxmlformats.org/drawingml/2006/main">
               <a:ext uri="{FF2B5EF4-FFF2-40B4-BE49-F238E27FC236}">
-                <a16:creationId xmlns:a16="http://schemas.microsoft.com/office/drawing/2014/main" id="{5C342BB2-77B2-432F-AB33-CB0483B89C91}"/>
+                <a16:creationId xmlns:a16="http://schemas.microsoft.com/office/drawing/2014/main" id="{74E9EFD9-DD56-4B19-90DA-01940EA7BA50}"/>
               </a:ext>
             </a:extLst>
           </p:cNvPr>
@@ -4140,7 +3712,7 @@
                 <a:ea typeface="Microsoft JhengHei"/>
                 <a:cs typeface="Microsoft JhengHei"/>
               </a:rPr>
-              <a:t>臺灣房屋總價預測／v22</a:t>
+              <a:t>臺灣房屋總價預測</a:t>
             </a:r>
           </a:p>
         </p:txBody>
@@ -4150,7 +3722,7 @@
           <p:cNvPr id="3" name="text">
             <a:extLst xmlns:a="http://schemas.openxmlformats.org/drawingml/2006/main">
               <a:ext uri="{FF2B5EF4-FFF2-40B4-BE49-F238E27FC236}">
-                <a16:creationId xmlns:a16="http://schemas.microsoft.com/office/drawing/2014/main" id="{CB3EE54E-3F99-419A-A8BB-724DE9E9083B}"/>
+                <a16:creationId xmlns:a16="http://schemas.microsoft.com/office/drawing/2014/main" id="{6DFFBA8B-B11C-4535-8000-4EB969C334C8}"/>
               </a:ext>
             </a:extLst>
           </p:cNvPr>
@@ -4207,7 +3779,7 @@
           <p:cNvPr id="4" name="text">
             <a:extLst xmlns:a="http://schemas.openxmlformats.org/drawingml/2006/main">
               <a:ext uri="{FF2B5EF4-FFF2-40B4-BE49-F238E27FC236}">
-                <a16:creationId xmlns:a16="http://schemas.microsoft.com/office/drawing/2014/main" id="{31F81FCA-B05C-461B-A440-415EA9D81800}"/>
+                <a16:creationId xmlns:a16="http://schemas.microsoft.com/office/drawing/2014/main" id="{C2A10D84-5DEC-4025-842D-C69F98D53AFA}"/>
               </a:ext>
             </a:extLst>
           </p:cNvPr>
@@ -4218,8 +3790,8 @@
         </p:nvSpPr>
         <p:spPr>
           <a:xfrm xmlns:a="http://schemas.openxmlformats.org/drawingml/2006/main">
-            <a:off x="685800" y="1409700"/>
-            <a:ext cx="10820400" cy="381000"/>
+            <a:off x="685800" y="1847850"/>
+            <a:ext cx="10668000" cy="1266825"/>
           </a:xfrm>
           <a:prstGeom xmlns:a="http://schemas.openxmlformats.org/drawingml/2006/main" prst="rect">
             <a:avLst/>
@@ -4236,378 +3808,35 @@
           <a:lstStyle xmlns:a="http://schemas.openxmlformats.org/drawingml/2006/main"/>
           <a:p xmlns:a="http://schemas.openxmlformats.org/drawingml/2006/main">
             <a:pPr algn="l">
-              <a:defRPr sz="1875" b="0">
-                <a:solidFill>
-                  <a:srgbClr val="69776D"/>
-                </a:solidFill>
-                <a:latin typeface="Microsoft JhengHei"/>
-                <a:ea typeface="Microsoft JhengHei"/>
-                <a:cs typeface="Microsoft JhengHei"/>
-              </a:defRPr>
-            </a:pPr>
-            <a:r>
-              <a:rPr sz="1875" b="0">
-                <a:solidFill>
-                  <a:srgbClr val="69776D"/>
-                </a:solidFill>
-                <a:latin typeface="Microsoft JhengHei"/>
-                <a:ea typeface="Microsoft JhengHei"/>
-                <a:cs typeface="Microsoft JhengHei"/>
-              </a:rPr>
-              <a:t>總價 MAE（萬元，越低越好）</a:t>
-            </a:r>
-          </a:p>
-        </p:txBody>
-      </p:sp>
-      <p:graphicFrame>
-        <p:nvGraphicFramePr>
-          <p:cNvPr id="13" name=""/>
-          <p:cNvGraphicFramePr/>
-          <p:nvPr/>
-        </p:nvGraphicFramePr>
-        <p:xfrm>
-          <a:off xmlns:a="http://schemas.openxmlformats.org/drawingml/2006/main" x="685800" y="2000250"/>
-          <a:ext xmlns:a="http://schemas.openxmlformats.org/drawingml/2006/main" cx="10820400" cy="2667000"/>
-        </p:xfrm>
-        <a:graphic xmlns:a="http://schemas.openxmlformats.org/drawingml/2006/main">
-          <a:graphicData uri="http://schemas.openxmlformats.org/drawingml/2006/table">
-            <a:tbl>
-              <a:tblPr/>
-              <a:tblGrid>
-                <a:gridCol w="5143500"/>
-                <a:gridCol w="2838450"/>
-                <a:gridCol w="2838450"/>
-              </a:tblGrid>
-              <a:tr h="666750">
-                <a:tc>
-                  <a:txBody>
-                    <a:bodyPr lIns="152400" tIns="76200" rIns="114300" bIns="76200">
-                      <a:noAutofit/>
-                    </a:bodyPr>
-                    <a:lstStyle/>
-                    <a:p>
-                      <a:r>
-                        <a:rPr sz="2025" b="1">
-                          <a:solidFill>
-                            <a:srgbClr val="FFFFFF"/>
-                          </a:solidFill>
-                          <a:latin typeface="Microsoft JhengHei"/>
-                          <a:ea typeface="Microsoft JhengHei"/>
-                          <a:cs typeface="Microsoft JhengHei"/>
-                        </a:rPr>
-                        <a:t>評分年度</a:t>
-                      </a:r>
-                    </a:p>
-                  </a:txBody>
-                  <a:tcPr marL="91440" marR="91440" marT="45720" marB="45720" anchor="ctr">
-                    <a:solidFill>
-                      <a:srgbClr val="203D35"/>
-                    </a:solidFill>
-                  </a:tcPr>
-                </a:tc>
-                <a:tc>
-                  <a:txBody>
-                    <a:bodyPr lIns="152400" tIns="76200" rIns="114300" bIns="76200">
-                      <a:noAutofit/>
-                    </a:bodyPr>
-                    <a:lstStyle/>
-                    <a:p>
-                      <a:r>
-                        <a:rPr sz="2025" b="1">
-                          <a:solidFill>
-                            <a:srgbClr val="FFFFFF"/>
-                          </a:solidFill>
-                          <a:latin typeface="Microsoft JhengHei"/>
-                          <a:ea typeface="Microsoft JhengHei"/>
-                          <a:cs typeface="Microsoft JhengHei"/>
-                        </a:rPr>
-                        <a:t>v22</a:t>
-                      </a:r>
-                    </a:p>
-                  </a:txBody>
-                  <a:tcPr marL="91440" marR="91440" marT="45720" marB="45720" anchor="ctr">
-                    <a:solidFill>
-                      <a:srgbClr val="203D35"/>
-                    </a:solidFill>
-                  </a:tcPr>
-                </a:tc>
-                <a:tc>
-                  <a:txBody>
-                    <a:bodyPr lIns="152400" tIns="76200" rIns="114300" bIns="76200">
-                      <a:noAutofit/>
-                    </a:bodyPr>
-                    <a:lstStyle/>
-                    <a:p>
-                      <a:r>
-                        <a:rPr sz="2025" b="1">
-                          <a:solidFill>
-                            <a:srgbClr val="FFFFFF"/>
-                          </a:solidFill>
-                          <a:latin typeface="Microsoft JhengHei"/>
-                          <a:ea typeface="Microsoft JhengHei"/>
-                          <a:cs typeface="Microsoft JhengHei"/>
-                        </a:rPr>
-                        <a:t>v24</a:t>
-                      </a:r>
-                    </a:p>
-                  </a:txBody>
-                  <a:tcPr marL="91440" marR="91440" marT="45720" marB="45720" anchor="ctr">
-                    <a:solidFill>
-                      <a:srgbClr val="203D35"/>
-                    </a:solidFill>
-                  </a:tcPr>
-                </a:tc>
-              </a:tr>
-              <a:tr h="666750">
-                <a:tc>
-                  <a:txBody>
-                    <a:bodyPr lIns="152400" tIns="76200" rIns="114300" bIns="76200">
-                      <a:noAutofit/>
-                    </a:bodyPr>
-                    <a:lstStyle/>
-                    <a:p>
-                      <a:r>
-                        <a:rPr sz="2025" b="0">
-                          <a:solidFill>
-                            <a:srgbClr val="34483F"/>
-                          </a:solidFill>
-                          <a:latin typeface="Microsoft JhengHei"/>
-                          <a:ea typeface="Microsoft JhengHei"/>
-                          <a:cs typeface="Microsoft JhengHei"/>
-                        </a:rPr>
-                        <a:t>2021–2022</a:t>
-                      </a:r>
-                    </a:p>
-                  </a:txBody>
-                  <a:tcPr marL="91440" marR="91440" marT="45720" marB="45720" anchor="ctr">
-                    <a:solidFill>
-                      <a:srgbClr val="FFFFFF"/>
-                    </a:solidFill>
-                  </a:tcPr>
-                </a:tc>
-                <a:tc>
-                  <a:txBody>
-                    <a:bodyPr lIns="152400" tIns="76200" rIns="114300" bIns="76200">
-                      <a:noAutofit/>
-                    </a:bodyPr>
-                    <a:lstStyle/>
-                    <a:p>
-                      <a:r>
-                        <a:rPr sz="2025" b="0">
-                          <a:solidFill>
-                            <a:srgbClr val="34483F"/>
-                          </a:solidFill>
-                          <a:latin typeface="Microsoft JhengHei"/>
-                          <a:ea typeface="Microsoft JhengHei"/>
-                          <a:cs typeface="Microsoft JhengHei"/>
-                        </a:rPr>
-                        <a:t>230.94</a:t>
-                      </a:r>
-                    </a:p>
-                  </a:txBody>
-                  <a:tcPr marL="91440" marR="91440" marT="45720" marB="45720" anchor="ctr">
-                    <a:solidFill>
-                      <a:srgbClr val="FFFFFF"/>
-                    </a:solidFill>
-                  </a:tcPr>
-                </a:tc>
-                <a:tc>
-                  <a:txBody>
-                    <a:bodyPr lIns="152400" tIns="76200" rIns="114300" bIns="76200">
-                      <a:noAutofit/>
-                    </a:bodyPr>
-                    <a:lstStyle/>
-                    <a:p>
-                      <a:r>
-                        <a:rPr sz="2025" b="0">
-                          <a:solidFill>
-                            <a:srgbClr val="34483F"/>
-                          </a:solidFill>
-                          <a:latin typeface="Microsoft JhengHei"/>
-                          <a:ea typeface="Microsoft JhengHei"/>
-                          <a:cs typeface="Microsoft JhengHei"/>
-                        </a:rPr>
-                        <a:t>227.54</a:t>
-                      </a:r>
-                    </a:p>
-                  </a:txBody>
-                  <a:tcPr marL="91440" marR="91440" marT="45720" marB="45720" anchor="ctr">
-                    <a:solidFill>
-                      <a:srgbClr val="FFFFFF"/>
-                    </a:solidFill>
-                  </a:tcPr>
-                </a:tc>
-              </a:tr>
-              <a:tr h="666750">
-                <a:tc>
-                  <a:txBody>
-                    <a:bodyPr lIns="152400" tIns="76200" rIns="114300" bIns="76200">
-                      <a:noAutofit/>
-                    </a:bodyPr>
-                    <a:lstStyle/>
-                    <a:p>
-                      <a:r>
-                        <a:rPr sz="2025" b="0">
-                          <a:solidFill>
-                            <a:srgbClr val="34483F"/>
-                          </a:solidFill>
-                          <a:latin typeface="Microsoft JhengHei"/>
-                          <a:ea typeface="Microsoft JhengHei"/>
-                          <a:cs typeface="Microsoft JhengHei"/>
-                        </a:rPr>
-                        <a:t>2022–2023</a:t>
-                      </a:r>
-                    </a:p>
-                  </a:txBody>
-                  <a:tcPr marL="91440" marR="91440" marT="45720" marB="45720" anchor="ctr">
-                    <a:solidFill>
-                      <a:srgbClr val="EDEFE6"/>
-                    </a:solidFill>
-                  </a:tcPr>
-                </a:tc>
-                <a:tc>
-                  <a:txBody>
-                    <a:bodyPr lIns="152400" tIns="76200" rIns="114300" bIns="76200">
-                      <a:noAutofit/>
-                    </a:bodyPr>
-                    <a:lstStyle/>
-                    <a:p>
-                      <a:r>
-                        <a:rPr sz="2025" b="0">
-                          <a:solidFill>
-                            <a:srgbClr val="34483F"/>
-                          </a:solidFill>
-                          <a:latin typeface="Microsoft JhengHei"/>
-                          <a:ea typeface="Microsoft JhengHei"/>
-                          <a:cs typeface="Microsoft JhengHei"/>
-                        </a:rPr>
-                        <a:t>140.74</a:t>
-                      </a:r>
-                    </a:p>
-                  </a:txBody>
-                  <a:tcPr marL="91440" marR="91440" marT="45720" marB="45720" anchor="ctr">
-                    <a:solidFill>
-                      <a:srgbClr val="EDEFE6"/>
-                    </a:solidFill>
-                  </a:tcPr>
-                </a:tc>
-                <a:tc>
-                  <a:txBody>
-                    <a:bodyPr lIns="152400" tIns="76200" rIns="114300" bIns="76200">
-                      <a:noAutofit/>
-                    </a:bodyPr>
-                    <a:lstStyle/>
-                    <a:p>
-                      <a:r>
-                        <a:rPr sz="2025" b="0">
-                          <a:solidFill>
-                            <a:srgbClr val="34483F"/>
-                          </a:solidFill>
-                          <a:latin typeface="Microsoft JhengHei"/>
-                          <a:ea typeface="Microsoft JhengHei"/>
-                          <a:cs typeface="Microsoft JhengHei"/>
-                        </a:rPr>
-                        <a:t>140.73</a:t>
-                      </a:r>
-                    </a:p>
-                  </a:txBody>
-                  <a:tcPr marL="91440" marR="91440" marT="45720" marB="45720" anchor="ctr">
-                    <a:solidFill>
-                      <a:srgbClr val="EDEFE6"/>
-                    </a:solidFill>
-                  </a:tcPr>
-                </a:tc>
-              </a:tr>
-              <a:tr h="666750">
-                <a:tc>
-                  <a:txBody>
-                    <a:bodyPr lIns="152400" tIns="76200" rIns="114300" bIns="76200">
-                      <a:noAutofit/>
-                    </a:bodyPr>
-                    <a:lstStyle/>
-                    <a:p>
-                      <a:r>
-                        <a:rPr sz="2025" b="0">
-                          <a:solidFill>
-                            <a:srgbClr val="34483F"/>
-                          </a:solidFill>
-                          <a:latin typeface="Microsoft JhengHei"/>
-                          <a:ea typeface="Microsoft JhengHei"/>
-                          <a:cs typeface="Microsoft JhengHei"/>
-                        </a:rPr>
-                        <a:t>2023–2024</a:t>
-                      </a:r>
-                    </a:p>
-                  </a:txBody>
-                  <a:tcPr marL="91440" marR="91440" marT="45720" marB="45720" anchor="ctr">
-                    <a:solidFill>
-                      <a:srgbClr val="FFFFFF"/>
-                    </a:solidFill>
-                  </a:tcPr>
-                </a:tc>
-                <a:tc>
-                  <a:txBody>
-                    <a:bodyPr lIns="152400" tIns="76200" rIns="114300" bIns="76200">
-                      <a:noAutofit/>
-                    </a:bodyPr>
-                    <a:lstStyle/>
-                    <a:p>
-                      <a:r>
-                        <a:rPr sz="2025" b="0">
-                          <a:solidFill>
-                            <a:srgbClr val="34483F"/>
-                          </a:solidFill>
-                          <a:latin typeface="Microsoft JhengHei"/>
-                          <a:ea typeface="Microsoft JhengHei"/>
-                          <a:cs typeface="Microsoft JhengHei"/>
-                        </a:rPr>
-                        <a:t>138.32</a:t>
-                      </a:r>
-                    </a:p>
-                  </a:txBody>
-                  <a:tcPr marL="91440" marR="91440" marT="45720" marB="45720" anchor="ctr">
-                    <a:solidFill>
-                      <a:srgbClr val="FFFFFF"/>
-                    </a:solidFill>
-                  </a:tcPr>
-                </a:tc>
-                <a:tc>
-                  <a:txBody>
-                    <a:bodyPr lIns="152400" tIns="76200" rIns="114300" bIns="76200">
-                      <a:noAutofit/>
-                    </a:bodyPr>
-                    <a:lstStyle/>
-                    <a:p>
-                      <a:r>
-                        <a:rPr sz="2025" b="0">
-                          <a:solidFill>
-                            <a:srgbClr val="34483F"/>
-                          </a:solidFill>
-                          <a:latin typeface="Microsoft JhengHei"/>
-                          <a:ea typeface="Microsoft JhengHei"/>
-                          <a:cs typeface="Microsoft JhengHei"/>
-                        </a:rPr>
-                        <a:t>137.32</a:t>
-                      </a:r>
-                    </a:p>
-                  </a:txBody>
-                  <a:tcPr marL="91440" marR="91440" marT="45720" marB="45720" anchor="ctr">
-                    <a:solidFill>
-                      <a:srgbClr val="FFFFFF"/>
-                    </a:solidFill>
-                  </a:tcPr>
-                </a:tc>
-              </a:tr>
-            </a:tbl>
-          </a:graphicData>
-        </a:graphic>
-      </p:graphicFrame>
-      <p:sp>
-        <p:nvSpPr>
-          <p:cNvPr id="6" name="text">
+              <a:defRPr sz="6225" b="1">
+                <a:solidFill>
+                  <a:srgbClr val="31644F"/>
+                </a:solidFill>
+                <a:latin typeface="Microsoft JhengHei"/>
+                <a:ea typeface="Microsoft JhengHei"/>
+                <a:cs typeface="Microsoft JhengHei"/>
+              </a:defRPr>
+            </a:pPr>
+            <a:r>
+              <a:rPr sz="6225" b="1">
+                <a:solidFill>
+                  <a:srgbClr val="31644F"/>
+                </a:solidFill>
+                <a:latin typeface="Microsoft JhengHei"/>
+                <a:ea typeface="Microsoft JhengHei"/>
+                <a:cs typeface="Microsoft JhengHei"/>
+              </a:rPr>
+              <a:t>199.86 萬元</a:t>
+            </a:r>
+          </a:p>
+        </p:txBody>
+      </p:sp>
+      <p:sp>
+        <p:nvSpPr>
+          <p:cNvPr id="5" name="text">
             <a:extLst xmlns:a="http://schemas.openxmlformats.org/drawingml/2006/main">
               <a:ext uri="{FF2B5EF4-FFF2-40B4-BE49-F238E27FC236}">
-                <a16:creationId xmlns:a16="http://schemas.microsoft.com/office/drawing/2014/main" id="{71CB8A5B-3E38-4E5D-805D-02DE2A2A8E8E}"/>
+                <a16:creationId xmlns:a16="http://schemas.microsoft.com/office/drawing/2014/main" id="{D53C2C7E-D4ED-4002-BA7D-992784E6B895}"/>
               </a:ext>
             </a:extLst>
           </p:cNvPr>
@@ -4618,8 +3847,8 @@
         </p:nvSpPr>
         <p:spPr>
           <a:xfrm xmlns:a="http://schemas.openxmlformats.org/drawingml/2006/main">
-            <a:off x="685800" y="4953000"/>
-            <a:ext cx="4095750" cy="428625"/>
+            <a:off x="723900" y="3429000"/>
+            <a:ext cx="10572750" cy="466725"/>
           </a:xfrm>
           <a:prstGeom xmlns:a="http://schemas.openxmlformats.org/drawingml/2006/main" prst="rect">
             <a:avLst/>
@@ -4636,35 +3865,35 @@
           <a:lstStyle xmlns:a="http://schemas.openxmlformats.org/drawingml/2006/main"/>
           <a:p xmlns:a="http://schemas.openxmlformats.org/drawingml/2006/main">
             <a:pPr algn="l">
-              <a:defRPr sz="2175" b="1">
-                <a:solidFill>
-                  <a:srgbClr val="AF553C"/>
-                </a:solidFill>
-                <a:latin typeface="Microsoft JhengHei"/>
-                <a:ea typeface="Microsoft JhengHei"/>
-                <a:cs typeface="Microsoft JhengHei"/>
-              </a:defRPr>
-            </a:pPr>
-            <a:r>
-              <a:rPr sz="2175" b="1">
-                <a:solidFill>
-                  <a:srgbClr val="AF553C"/>
-                </a:solidFill>
-                <a:latin typeface="Microsoft JhengHei"/>
-                <a:ea typeface="Microsoft JhengHei"/>
-                <a:cs typeface="Microsoft JhengHei"/>
-              </a:rPr>
-              <a:t>v24 仍有代價</a:t>
-            </a:r>
-          </a:p>
-        </p:txBody>
-      </p:sp>
-      <p:sp>
-        <p:nvSpPr>
-          <p:cNvPr id="7" name="text">
+              <a:defRPr sz="2400" b="0">
+                <a:solidFill>
+                  <a:srgbClr val="34483F"/>
+                </a:solidFill>
+                <a:latin typeface="Microsoft JhengHei"/>
+                <a:ea typeface="Microsoft JhengHei"/>
+                <a:cs typeface="Microsoft JhengHei"/>
+              </a:defRPr>
+            </a:pPr>
+            <a:r>
+              <a:rPr sz="2400" b="0">
+                <a:solidFill>
+                  <a:srgbClr val="34483F"/>
+                </a:solidFill>
+                <a:latin typeface="Microsoft JhengHei"/>
+                <a:ea typeface="Microsoft JhengHei"/>
+                <a:cs typeface="Microsoft JhengHei"/>
+              </a:rPr>
+              <a:t>Public MAE = 1,998,568.5706 元</a:t>
+            </a:r>
+          </a:p>
+        </p:txBody>
+      </p:sp>
+      <p:sp>
+        <p:nvSpPr>
+          <p:cNvPr id="6" name="text">
             <a:extLst xmlns:a="http://schemas.openxmlformats.org/drawingml/2006/main">
               <a:ext uri="{FF2B5EF4-FFF2-40B4-BE49-F238E27FC236}">
-                <a16:creationId xmlns:a16="http://schemas.microsoft.com/office/drawing/2014/main" id="{8D207703-3C29-428C-9A3B-542262D06613}"/>
+                <a16:creationId xmlns:a16="http://schemas.microsoft.com/office/drawing/2014/main" id="{62E7ADE8-5119-4B1A-9C54-0D990EE61BA0}"/>
               </a:ext>
             </a:extLst>
           </p:cNvPr>
@@ -4675,8 +3904,8 @@
         </p:nvSpPr>
         <p:spPr>
           <a:xfrm xmlns:a="http://schemas.openxmlformats.org/drawingml/2006/main">
-            <a:off x="4762500" y="4876800"/>
-            <a:ext cx="6667500" cy="876300"/>
+            <a:off x="685800" y="4305300"/>
+            <a:ext cx="10572750" cy="504825"/>
           </a:xfrm>
           <a:prstGeom xmlns:a="http://schemas.openxmlformats.org/drawingml/2006/main" prst="rect">
             <a:avLst/>
@@ -4693,7 +3922,7 @@
           <a:lstStyle xmlns:a="http://schemas.openxmlformats.org/drawingml/2006/main"/>
           <a:p xmlns:a="http://schemas.openxmlformats.org/drawingml/2006/main">
             <a:pPr algn="l">
-              <a:defRPr sz="2025" b="0">
+              <a:defRPr sz="2325" b="0">
                 <a:solidFill>
                   <a:srgbClr val="34483F"/>
                 </a:solidFill>
@@ -4703,7 +3932,7 @@
               </a:defRPr>
             </a:pPr>
             <a:r>
-              <a:rPr sz="2025" b="0">
+              <a:rPr sz="2325" b="0">
                 <a:solidFill>
                   <a:srgbClr val="34483F"/>
                 </a:solidFill>
@@ -4711,40 +3940,17 @@
                 <a:ea typeface="Microsoft JhengHei"/>
                 <a:cs typeface="Microsoft JhengHei"/>
               </a:rPr>
-              <a:t>最新年度的億元以上群共 319 筆</a:t>
-            </a:r>
-          </a:p>
-          <a:p xmlns:a="http://schemas.openxmlformats.org/drawingml/2006/main">
-            <a:pPr algn="l">
-              <a:defRPr sz="2025" b="0">
-                <a:solidFill>
-                  <a:srgbClr val="34483F"/>
-                </a:solidFill>
-                <a:latin typeface="Microsoft JhengHei"/>
-                <a:ea typeface="Microsoft JhengHei"/>
-                <a:cs typeface="Microsoft JhengHei"/>
-              </a:defRPr>
-            </a:pPr>
-            <a:r>
-              <a:rPr sz="2025" b="0">
-                <a:solidFill>
-                  <a:srgbClr val="34483F"/>
-                </a:solidFill>
-                <a:latin typeface="Microsoft JhengHei"/>
-                <a:ea typeface="Microsoft JhengHei"/>
-                <a:cs typeface="Microsoft JhengHei"/>
-              </a:rPr>
-              <a:t>群內 MAE 相對 v22 增加約 90.97 萬元</a:t>
-            </a:r>
-          </a:p>
-        </p:txBody>
-      </p:sp>
-      <p:sp>
-        <p:nvSpPr>
-          <p:cNvPr id="8" name="text">
+              <a:t>約 30% test 交易的平均絕對總價誤差</a:t>
+            </a:r>
+          </a:p>
+        </p:txBody>
+      </p:sp>
+      <p:sp>
+        <p:nvSpPr>
+          <p:cNvPr id="7" name="text">
             <a:extLst xmlns:a="http://schemas.openxmlformats.org/drawingml/2006/main">
               <a:ext uri="{FF2B5EF4-FFF2-40B4-BE49-F238E27FC236}">
-                <a16:creationId xmlns:a16="http://schemas.microsoft.com/office/drawing/2014/main" id="{E9F53C5A-60E2-4400-B01B-C0D1AE93F1CD}"/>
+                <a16:creationId xmlns:a16="http://schemas.microsoft.com/office/drawing/2014/main" id="{AD50D446-87A1-48BC-BAB4-6C9932CDEF8E}"/>
               </a:ext>
             </a:extLst>
           </p:cNvPr>
@@ -4755,8 +3961,8 @@
         </p:nvSpPr>
         <p:spPr>
           <a:xfrm xmlns:a="http://schemas.openxmlformats.org/drawingml/2006/main">
-            <a:off x="685800" y="5934075"/>
-            <a:ext cx="10820400" cy="333375"/>
+            <a:off x="685800" y="5276850"/>
+            <a:ext cx="10820400" cy="542925"/>
           </a:xfrm>
           <a:prstGeom xmlns:a="http://schemas.openxmlformats.org/drawingml/2006/main" prst="rect">
             <a:avLst/>
@@ -4773,7 +3979,64 @@
           <a:lstStyle xmlns:a="http://schemas.openxmlformats.org/drawingml/2006/main"/>
           <a:p xmlns:a="http://schemas.openxmlformats.org/drawingml/2006/main">
             <a:pPr algn="l">
-              <a:defRPr sz="1800" b="0">
+              <a:defRPr sz="2400" b="1">
+                <a:solidFill>
+                  <a:srgbClr val="34483F"/>
+                </a:solidFill>
+                <a:latin typeface="Microsoft JhengHei"/>
+                <a:ea typeface="Microsoft JhengHei"/>
+                <a:cs typeface="Microsoft JhengHei"/>
+              </a:defRPr>
+            </a:pPr>
+            <a:r>
+              <a:rPr sz="2400" b="1">
+                <a:solidFill>
+                  <a:srgbClr val="34483F"/>
+                </a:solidFill>
+                <a:latin typeface="Microsoft JhengHei"/>
+                <a:ea typeface="Microsoft JhengHei"/>
+                <a:cs typeface="Microsoft JhengHei"/>
+              </a:rPr>
+              <a:t>Private 約占其餘 70%，目前成績未知</a:t>
+            </a:r>
+          </a:p>
+        </p:txBody>
+      </p:sp>
+      <p:sp>
+        <p:nvSpPr>
+          <p:cNvPr id="8" name="text">
+            <a:extLst xmlns:a="http://schemas.openxmlformats.org/drawingml/2006/main">
+              <a:ext uri="{FF2B5EF4-FFF2-40B4-BE49-F238E27FC236}">
+                <a16:creationId xmlns:a16="http://schemas.microsoft.com/office/drawing/2014/main" id="{457AE78C-C52D-4944-830B-5DF45462D138}"/>
+              </a:ext>
+            </a:extLst>
+          </p:cNvPr>
+          <p:cNvSpPr>
+            <a:spLocks xmlns:a="http://schemas.openxmlformats.org/drawingml/2006/main" noGrp="1"/>
+          </p:cNvSpPr>
+          <p:nvPr/>
+        </p:nvSpPr>
+        <p:spPr>
+          <a:xfrm xmlns:a="http://schemas.openxmlformats.org/drawingml/2006/main">
+            <a:off x="685800" y="6019800"/>
+            <a:ext cx="10820400" cy="295275"/>
+          </a:xfrm>
+          <a:prstGeom xmlns:a="http://schemas.openxmlformats.org/drawingml/2006/main" prst="rect">
+            <a:avLst/>
+          </a:prstGeom>
+          <a:noFill xmlns:a="http://schemas.openxmlformats.org/drawingml/2006/main"/>
+          <a:ln xmlns:a="http://schemas.openxmlformats.org/drawingml/2006/main" w="0">
+            <a:noFill/>
+          </a:ln>
+        </p:spPr>
+        <p:txBody>
+          <a:bodyPr xmlns:a="http://schemas.openxmlformats.org/drawingml/2006/main" wrap="square" lIns="0" tIns="0" rIns="0" bIns="0" anchor="t">
+            <a:noAutofit/>
+          </a:bodyPr>
+          <a:lstStyle xmlns:a="http://schemas.openxmlformats.org/drawingml/2006/main"/>
+          <a:p xmlns:a="http://schemas.openxmlformats.org/drawingml/2006/main">
+            <a:pPr algn="l">
+              <a:defRPr sz="1725" b="0">
                 <a:solidFill>
                   <a:srgbClr val="69776D"/>
                 </a:solidFill>
@@ -4783,7 +4046,7 @@
               </a:defRPr>
             </a:pPr>
             <a:r>
-              <a:rPr sz="1800" b="0">
+              <a:rPr sz="1725" b="0">
                 <a:solidFill>
                   <a:srgbClr val="69776D"/>
                 </a:solidFill>
@@ -4791,7 +4054,7 @@
                 <a:ea typeface="Microsoft JhengHei"/>
                 <a:cs typeface="Microsoft JhengHei"/>
               </a:rPr>
-              <a:t>本機優勢與 Public 排序不同，Private 仍需保留不確定性</a:t>
+              <a:t>來源為 Kaggle 提交成績截圖，不與不同評分集的歷史 MAE 混算</a:t>
             </a:r>
           </a:p>
         </p:txBody>
@@ -4799,7 +4062,7 @@
     </p:spTree>
     <p:extLst>
       <p:ext uri="{BB962C8B-B14F-4D97-AF65-F5344CB8AC3E}">
-        <p14:creationId xmlns:p14="http://schemas.microsoft.com/office/powerpoint/2010/main" val="306456640"/>
+        <p14:creationId xmlns:p14="http://schemas.microsoft.com/office/powerpoint/2010/main" val="680599067"/>
       </p:ext>
     </p:extLst>
   </p:cSld>
@@ -4827,10 +4090,10 @@
       </p:grpSpPr>
       <p:sp>
         <p:nvSpPr>
-          <p:cNvPr id="11" name="slide-title">
+          <p:cNvPr id="10" name="slide-title">
             <a:extLst xmlns:a="http://schemas.openxmlformats.org/drawingml/2006/main">
               <a:ext uri="{FF2B5EF4-FFF2-40B4-BE49-F238E27FC236}">
-                <a16:creationId xmlns:a16="http://schemas.microsoft.com/office/drawing/2014/main" id="{E7288ADD-08C7-4014-85A4-9E511ACF2F4E}"/>
+                <a16:creationId xmlns:a16="http://schemas.microsoft.com/office/drawing/2014/main" id="{C7F67899-5FC3-475C-819A-80A77094E8D2}"/>
               </a:ext>
             </a:extLst>
           </p:cNvPr>
@@ -4877,7 +4140,7 @@
                 <a:ea typeface="Microsoft JhengHei"/>
                 <a:cs typeface="Microsoft JhengHei"/>
               </a:rPr>
-              <a:t>平均改善仍伴隨高價物件風險</a:t>
+              <a:t>高價尾部與驗證資料重用仍是限制</a:t>
             </a:r>
           </a:p>
         </p:txBody>
@@ -4887,7 +4150,7 @@
           <p:cNvPr id="2" name="text">
             <a:extLst xmlns:a="http://schemas.openxmlformats.org/drawingml/2006/main">
               <a:ext uri="{FF2B5EF4-FFF2-40B4-BE49-F238E27FC236}">
-                <a16:creationId xmlns:a16="http://schemas.microsoft.com/office/drawing/2014/main" id="{5624E387-742E-48E2-BC7B-AACB6145434A}"/>
+                <a16:creationId xmlns:a16="http://schemas.microsoft.com/office/drawing/2014/main" id="{D8A9C3E6-0338-43E8-88AC-1CA21B35E82C}"/>
               </a:ext>
             </a:extLst>
           </p:cNvPr>
@@ -4934,7 +4197,7 @@
                 <a:ea typeface="Microsoft JhengHei"/>
                 <a:cs typeface="Microsoft JhengHei"/>
               </a:rPr>
-              <a:t>臺灣房屋總價預測／v22</a:t>
+              <a:t>臺灣房屋總價預測</a:t>
             </a:r>
           </a:p>
         </p:txBody>
@@ -4944,7 +4207,7 @@
           <p:cNvPr id="3" name="text">
             <a:extLst xmlns:a="http://schemas.openxmlformats.org/drawingml/2006/main">
               <a:ext uri="{FF2B5EF4-FFF2-40B4-BE49-F238E27FC236}">
-                <a16:creationId xmlns:a16="http://schemas.microsoft.com/office/drawing/2014/main" id="{6984BD9C-7518-48E1-B656-80F2387CE671}"/>
+                <a16:creationId xmlns:a16="http://schemas.microsoft.com/office/drawing/2014/main" id="{5179724F-D76E-4FFF-A3D3-C7202570CA50}"/>
               </a:ext>
             </a:extLst>
           </p:cNvPr>
@@ -5001,7 +4264,7 @@
           <p:cNvPr id="4" name="text">
             <a:extLst xmlns:a="http://schemas.openxmlformats.org/drawingml/2006/main">
               <a:ext uri="{FF2B5EF4-FFF2-40B4-BE49-F238E27FC236}">
-                <a16:creationId xmlns:a16="http://schemas.microsoft.com/office/drawing/2014/main" id="{8278698B-6B78-43AC-A22C-F71E2D84B79B}"/>
+                <a16:creationId xmlns:a16="http://schemas.microsoft.com/office/drawing/2014/main" id="{F4BDB59A-0492-432F-AB24-9F7983334284}"/>
               </a:ext>
             </a:extLst>
           </p:cNvPr>
@@ -5012,8 +4275,8 @@
         </p:nvSpPr>
         <p:spPr>
           <a:xfrm xmlns:a="http://schemas.openxmlformats.org/drawingml/2006/main">
-            <a:off x="685800" y="1628775"/>
-            <a:ext cx="6858000" cy="419100"/>
+            <a:off x="685800" y="1704975"/>
+            <a:ext cx="10820400" cy="428625"/>
           </a:xfrm>
           <a:prstGeom xmlns:a="http://schemas.openxmlformats.org/drawingml/2006/main" prst="rect">
             <a:avLst/>
@@ -5030,7 +4293,7 @@
           <a:lstStyle xmlns:a="http://schemas.openxmlformats.org/drawingml/2006/main"/>
           <a:p xmlns:a="http://schemas.openxmlformats.org/drawingml/2006/main">
             <a:pPr algn="l">
-              <a:defRPr sz="2250" b="1">
+              <a:defRPr sz="2325" b="1">
                 <a:solidFill>
                   <a:srgbClr val="AF553C"/>
                 </a:solidFill>
@@ -5040,7 +4303,7 @@
               </a:defRPr>
             </a:pPr>
             <a:r>
-              <a:rPr sz="2250" b="1">
+              <a:rPr sz="2325" b="1">
                 <a:solidFill>
                   <a:srgbClr val="AF553C"/>
                 </a:solidFill>
@@ -5048,7 +4311,7 @@
                 <a:ea typeface="Microsoft JhengHei"/>
                 <a:cs typeface="Microsoft JhengHei"/>
               </a:rPr>
-              <a:t>實際退步的群組</a:t>
+              <a:t>高價與大面積交易</a:t>
             </a:r>
           </a:p>
         </p:txBody>
@@ -5058,7 +4321,7 @@
           <p:cNvPr id="5" name="text">
             <a:extLst xmlns:a="http://schemas.openxmlformats.org/drawingml/2006/main">
               <a:ext uri="{FF2B5EF4-FFF2-40B4-BE49-F238E27FC236}">
-                <a16:creationId xmlns:a16="http://schemas.microsoft.com/office/drawing/2014/main" id="{1903412C-8962-401B-A1BF-4C913D50AE8C}"/>
+                <a16:creationId xmlns:a16="http://schemas.microsoft.com/office/drawing/2014/main" id="{EFDE5CD8-5734-4BB2-AA2E-2C0399AEE661}"/>
               </a:ext>
             </a:extLst>
           </p:cNvPr>
@@ -5069,8 +4332,8 @@
         </p:nvSpPr>
         <p:spPr>
           <a:xfrm xmlns:a="http://schemas.openxmlformats.org/drawingml/2006/main">
-            <a:off x="685800" y="2352675"/>
-            <a:ext cx="6667500" cy="1057275"/>
+            <a:off x="685800" y="2305050"/>
+            <a:ext cx="10820400" cy="781050"/>
           </a:xfrm>
           <a:prstGeom xmlns:a="http://schemas.openxmlformats.org/drawingml/2006/main" prst="rect">
             <a:avLst/>
@@ -5087,7 +4350,7 @@
           <a:lstStyle xmlns:a="http://schemas.openxmlformats.org/drawingml/2006/main"/>
           <a:p xmlns:a="http://schemas.openxmlformats.org/drawingml/2006/main">
             <a:pPr algn="l">
-              <a:defRPr sz="2625" b="1">
+              <a:defRPr sz="2100" b="0">
                 <a:solidFill>
                   <a:srgbClr val="34483F"/>
                 </a:solidFill>
@@ -5097,7 +4360,7 @@
               </a:defRPr>
             </a:pPr>
             <a:r>
-              <a:rPr sz="2625" b="1">
+              <a:rPr sz="2100" b="0">
                 <a:solidFill>
                   <a:srgbClr val="34483F"/>
                 </a:solidFill>
@@ -5105,30 +4368,7 @@
                 <a:ea typeface="Microsoft JhengHei"/>
                 <a:cs typeface="Microsoft JhengHei"/>
               </a:rPr>
-              <a:t>最新回測年度</a:t>
-            </a:r>
-          </a:p>
-          <a:p xmlns:a="http://schemas.openxmlformats.org/drawingml/2006/main">
-            <a:pPr algn="l">
-              <a:defRPr sz="2625" b="1">
-                <a:solidFill>
-                  <a:srgbClr val="34483F"/>
-                </a:solidFill>
-                <a:latin typeface="Microsoft JhengHei"/>
-                <a:ea typeface="Microsoft JhengHei"/>
-                <a:cs typeface="Microsoft JhengHei"/>
-              </a:defRPr>
-            </a:pPr>
-            <a:r>
-              <a:rPr sz="2625" b="1">
-                <a:solidFill>
-                  <a:srgbClr val="34483F"/>
-                </a:solidFill>
-                <a:latin typeface="Microsoft JhengHei"/>
-                <a:ea typeface="Microsoft JhengHei"/>
-                <a:cs typeface="Microsoft JhengHei"/>
-              </a:rPr>
-              <a:t>總價 5,000 萬至 1 億</a:t>
+              <a:t>少量大額誤差可能拉高總價 MAE，平均值會掩蓋群組差異</a:t>
             </a:r>
           </a:p>
         </p:txBody>
@@ -5138,7 +4378,7 @@
           <p:cNvPr id="6" name="text">
             <a:extLst xmlns:a="http://schemas.openxmlformats.org/drawingml/2006/main">
               <a:ext uri="{FF2B5EF4-FFF2-40B4-BE49-F238E27FC236}">
-                <a16:creationId xmlns:a16="http://schemas.microsoft.com/office/drawing/2014/main" id="{41F5EB00-CEA5-4FAC-B4F4-D2CF651485E3}"/>
+                <a16:creationId xmlns:a16="http://schemas.microsoft.com/office/drawing/2014/main" id="{13B89EF9-82D4-43D8-A09D-8A855FF3F574}"/>
               </a:ext>
             </a:extLst>
           </p:cNvPr>
@@ -5149,8 +4389,8 @@
         </p:nvSpPr>
         <p:spPr>
           <a:xfrm xmlns:a="http://schemas.openxmlformats.org/drawingml/2006/main">
-            <a:off x="685800" y="3752850"/>
-            <a:ext cx="6381750" cy="457200"/>
+            <a:off x="685800" y="3438525"/>
+            <a:ext cx="10820400" cy="428625"/>
           </a:xfrm>
           <a:prstGeom xmlns:a="http://schemas.openxmlformats.org/drawingml/2006/main" prst="rect">
             <a:avLst/>
@@ -5167,25 +4407,25 @@
           <a:lstStyle xmlns:a="http://schemas.openxmlformats.org/drawingml/2006/main"/>
           <a:p xmlns:a="http://schemas.openxmlformats.org/drawingml/2006/main">
             <a:pPr algn="l">
-              <a:defRPr sz="2100" b="0">
-                <a:solidFill>
-                  <a:srgbClr val="34483F"/>
-                </a:solidFill>
-                <a:latin typeface="Microsoft JhengHei"/>
-                <a:ea typeface="Microsoft JhengHei"/>
-                <a:cs typeface="Microsoft JhengHei"/>
-              </a:defRPr>
-            </a:pPr>
-            <a:r>
-              <a:rPr sz="2100" b="0">
-                <a:solidFill>
-                  <a:srgbClr val="34483F"/>
-                </a:solidFill>
-                <a:latin typeface="Microsoft JhengHei"/>
-                <a:ea typeface="Microsoft JhengHei"/>
-                <a:cs typeface="Microsoft JhengHei"/>
-              </a:rPr>
-              <a:t>此價格群共 1,725 筆交易</a:t>
+              <a:defRPr sz="2325" b="1">
+                <a:solidFill>
+                  <a:srgbClr val="31644F"/>
+                </a:solidFill>
+                <a:latin typeface="Microsoft JhengHei"/>
+                <a:ea typeface="Microsoft JhengHei"/>
+                <a:cs typeface="Microsoft JhengHei"/>
+              </a:defRPr>
+            </a:pPr>
+            <a:r>
+              <a:rPr sz="2325" b="1">
+                <a:solidFill>
+                  <a:srgbClr val="31644F"/>
+                </a:solidFill>
+                <a:latin typeface="Microsoft JhengHei"/>
+                <a:ea typeface="Microsoft JhengHei"/>
+                <a:cs typeface="Microsoft JhengHei"/>
+              </a:rPr>
+              <a:t>時間窗曾多次參與模型選擇</a:t>
             </a:r>
           </a:p>
         </p:txBody>
@@ -5195,7 +4435,7 @@
           <p:cNvPr id="7" name="text">
             <a:extLst xmlns:a="http://schemas.openxmlformats.org/drawingml/2006/main">
               <a:ext uri="{FF2B5EF4-FFF2-40B4-BE49-F238E27FC236}">
-                <a16:creationId xmlns:a16="http://schemas.microsoft.com/office/drawing/2014/main" id="{D13AC603-61F4-4565-A639-F8569584F2D8}"/>
+                <a16:creationId xmlns:a16="http://schemas.microsoft.com/office/drawing/2014/main" id="{07031431-EC98-434C-8637-A7CDB1664EC1}"/>
               </a:ext>
             </a:extLst>
           </p:cNvPr>
@@ -5206,8 +4446,8 @@
         </p:nvSpPr>
         <p:spPr>
           <a:xfrm xmlns:a="http://schemas.openxmlformats.org/drawingml/2006/main">
-            <a:off x="685800" y="4448175"/>
-            <a:ext cx="6334125" cy="781050"/>
+            <a:off x="685800" y="4038600"/>
+            <a:ext cx="10820400" cy="781050"/>
           </a:xfrm>
           <a:prstGeom xmlns:a="http://schemas.openxmlformats.org/drawingml/2006/main" prst="rect">
             <a:avLst/>
@@ -5224,25 +4464,25 @@
           <a:lstStyle xmlns:a="http://schemas.openxmlformats.org/drawingml/2006/main"/>
           <a:p xmlns:a="http://schemas.openxmlformats.org/drawingml/2006/main">
             <a:pPr algn="l">
-              <a:defRPr sz="1875" b="0">
-                <a:solidFill>
-                  <a:srgbClr val="69776D"/>
-                </a:solidFill>
-                <a:latin typeface="Microsoft JhengHei"/>
-                <a:ea typeface="Microsoft JhengHei"/>
-                <a:cs typeface="Microsoft JhengHei"/>
-              </a:defRPr>
-            </a:pPr>
-            <a:r>
-              <a:rPr sz="1875" b="0">
-                <a:solidFill>
-                  <a:srgbClr val="69776D"/>
-                </a:solidFill>
-                <a:latin typeface="Microsoft JhengHei"/>
-                <a:ea typeface="Microsoft JhengHei"/>
-                <a:cs typeface="Microsoft JhengHei"/>
-              </a:rPr>
-              <a:t>價格群用於事後分析，推論時不能按真價分流</a:t>
+              <a:defRPr sz="2100" b="0">
+                <a:solidFill>
+                  <a:srgbClr val="34483F"/>
+                </a:solidFill>
+                <a:latin typeface="Microsoft JhengHei"/>
+                <a:ea typeface="Microsoft JhengHei"/>
+                <a:cs typeface="Microsoft JhengHei"/>
+              </a:defRPr>
+            </a:pPr>
+            <a:r>
+              <a:rPr sz="2100" b="0">
+                <a:solidFill>
+                  <a:srgbClr val="34483F"/>
+                </a:solidFill>
+                <a:latin typeface="Microsoft JhengHei"/>
+                <a:ea typeface="Microsoft JhengHei"/>
+                <a:cs typeface="Microsoft JhengHei"/>
+              </a:rPr>
+              <a:t>歷史回測可能樂觀，重抽樣區間也不能保證 Private 表現</a:t>
             </a:r>
           </a:p>
         </p:txBody>
@@ -5252,7 +4492,7 @@
           <p:cNvPr id="8" name="text">
             <a:extLst xmlns:a="http://schemas.openxmlformats.org/drawingml/2006/main">
               <a:ext uri="{FF2B5EF4-FFF2-40B4-BE49-F238E27FC236}">
-                <a16:creationId xmlns:a16="http://schemas.microsoft.com/office/drawing/2014/main" id="{CF89A8D9-F488-4944-88DD-484EC22652DC}"/>
+                <a16:creationId xmlns:a16="http://schemas.microsoft.com/office/drawing/2014/main" id="{4FAD89F9-AC99-4E73-9C52-D6D1E072E321}"/>
               </a:ext>
             </a:extLst>
           </p:cNvPr>
@@ -5263,8 +4503,8 @@
         </p:nvSpPr>
         <p:spPr>
           <a:xfrm xmlns:a="http://schemas.openxmlformats.org/drawingml/2006/main">
-            <a:off x="7734300" y="2276475"/>
-            <a:ext cx="3886200" cy="1038225"/>
+            <a:off x="685800" y="5153025"/>
+            <a:ext cx="10820400" cy="428625"/>
           </a:xfrm>
           <a:prstGeom xmlns:a="http://schemas.openxmlformats.org/drawingml/2006/main" prst="rect">
             <a:avLst/>
@@ -5281,25 +4521,25 @@
           <a:lstStyle xmlns:a="http://schemas.openxmlformats.org/drawingml/2006/main"/>
           <a:p xmlns:a="http://schemas.openxmlformats.org/drawingml/2006/main">
             <a:pPr algn="l">
-              <a:defRPr sz="4500" b="1">
-                <a:solidFill>
-                  <a:srgbClr val="AF553C"/>
-                </a:solidFill>
-                <a:latin typeface="Microsoft JhengHei"/>
-                <a:ea typeface="Microsoft JhengHei"/>
-                <a:cs typeface="Microsoft JhengHei"/>
-              </a:defRPr>
-            </a:pPr>
-            <a:r>
-              <a:rPr sz="4500" b="1">
-                <a:solidFill>
-                  <a:srgbClr val="AF553C"/>
-                </a:solidFill>
-                <a:latin typeface="Microsoft JhengHei"/>
-                <a:ea typeface="Microsoft JhengHei"/>
-                <a:cs typeface="Microsoft JhengHei"/>
-              </a:rPr>
-              <a:t>+20.47 萬</a:t>
+              <a:defRPr sz="2325" b="1">
+                <a:solidFill>
+                  <a:srgbClr val="31644F"/>
+                </a:solidFill>
+                <a:latin typeface="Microsoft JhengHei"/>
+                <a:ea typeface="Microsoft JhengHei"/>
+                <a:cs typeface="Microsoft JhengHei"/>
+              </a:defRPr>
+            </a:pPr>
+            <a:r>
+              <a:rPr sz="2325" b="1">
+                <a:solidFill>
+                  <a:srgbClr val="31644F"/>
+                </a:solidFill>
+                <a:latin typeface="Microsoft JhengHei"/>
+                <a:ea typeface="Microsoft JhengHei"/>
+                <a:cs typeface="Microsoft JhengHei"/>
+              </a:rPr>
+              <a:t>成交參考與地理資訊仍有適用範圍</a:t>
             </a:r>
           </a:p>
         </p:txBody>
@@ -5309,7 +4549,7 @@
           <p:cNvPr id="9" name="text">
             <a:extLst xmlns:a="http://schemas.openxmlformats.org/drawingml/2006/main">
               <a:ext uri="{FF2B5EF4-FFF2-40B4-BE49-F238E27FC236}">
-                <a16:creationId xmlns:a16="http://schemas.microsoft.com/office/drawing/2014/main" id="{23BE0DFC-DFFE-4090-A1F4-3D3C9932D864}"/>
+                <a16:creationId xmlns:a16="http://schemas.microsoft.com/office/drawing/2014/main" id="{6DA53BAB-FB53-4FA6-82F9-4977707CC67B}"/>
               </a:ext>
             </a:extLst>
           </p:cNvPr>
@@ -5320,8 +4560,8 @@
         </p:nvSpPr>
         <p:spPr>
           <a:xfrm xmlns:a="http://schemas.openxmlformats.org/drawingml/2006/main">
-            <a:off x="7715250" y="3562350"/>
-            <a:ext cx="3762375" cy="762000"/>
+            <a:off x="685800" y="5753100"/>
+            <a:ext cx="10820400" cy="561975"/>
           </a:xfrm>
           <a:prstGeom xmlns:a="http://schemas.openxmlformats.org/drawingml/2006/main" prst="rect">
             <a:avLst/>
@@ -5338,7 +4578,7 @@
           <a:lstStyle xmlns:a="http://schemas.openxmlformats.org/drawingml/2006/main"/>
           <a:p xmlns:a="http://schemas.openxmlformats.org/drawingml/2006/main">
             <a:pPr algn="l">
-              <a:defRPr sz="2100" b="0">
+              <a:defRPr sz="2025" b="0">
                 <a:solidFill>
                   <a:srgbClr val="34483F"/>
                 </a:solidFill>
@@ -5348,7 +4588,7 @@
               </a:defRPr>
             </a:pPr>
             <a:r>
-              <a:rPr sz="2100" b="0">
+              <a:rPr sz="2025" b="0">
                 <a:solidFill>
                   <a:srgbClr val="34483F"/>
                 </a:solidFill>
@@ -5356,64 +4596,7 @@
                 <a:ea typeface="Microsoft JhengHei"/>
                 <a:cs typeface="Microsoft JhengHei"/>
               </a:rPr>
-              <a:t>此群 MAE 相對 v20 增加</a:t>
-            </a:r>
-          </a:p>
-        </p:txBody>
-      </p:sp>
-      <p:sp>
-        <p:nvSpPr>
-          <p:cNvPr id="10" name="text">
-            <a:extLst xmlns:a="http://schemas.openxmlformats.org/drawingml/2006/main">
-              <a:ext uri="{FF2B5EF4-FFF2-40B4-BE49-F238E27FC236}">
-                <a16:creationId xmlns:a16="http://schemas.microsoft.com/office/drawing/2014/main" id="{7A7F8441-8265-49D7-8180-2CF6608B390B}"/>
-              </a:ext>
-            </a:extLst>
-          </p:cNvPr>
-          <p:cNvSpPr>
-            <a:spLocks xmlns:a="http://schemas.openxmlformats.org/drawingml/2006/main" noGrp="1"/>
-          </p:cNvSpPr>
-          <p:nvPr/>
-        </p:nvSpPr>
-        <p:spPr>
-          <a:xfrm xmlns:a="http://schemas.openxmlformats.org/drawingml/2006/main">
-            <a:off x="685800" y="5591175"/>
-            <a:ext cx="10820400" cy="685800"/>
-          </a:xfrm>
-          <a:prstGeom xmlns:a="http://schemas.openxmlformats.org/drawingml/2006/main" prst="rect">
-            <a:avLst/>
-          </a:prstGeom>
-          <a:noFill xmlns:a="http://schemas.openxmlformats.org/drawingml/2006/main"/>
-          <a:ln xmlns:a="http://schemas.openxmlformats.org/drawingml/2006/main" w="0">
-            <a:noFill/>
-          </a:ln>
-        </p:spPr>
-        <p:txBody>
-          <a:bodyPr xmlns:a="http://schemas.openxmlformats.org/drawingml/2006/main" wrap="square" lIns="0" tIns="0" rIns="0" bIns="0" anchor="t">
-            <a:noAutofit/>
-          </a:bodyPr>
-          <a:lstStyle xmlns:a="http://schemas.openxmlformats.org/drawingml/2006/main"/>
-          <a:p xmlns:a="http://schemas.openxmlformats.org/drawingml/2006/main">
-            <a:pPr algn="l">
-              <a:defRPr sz="1950" b="1">
-                <a:solidFill>
-                  <a:srgbClr val="31644F"/>
-                </a:solidFill>
-                <a:latin typeface="Microsoft JhengHei"/>
-                <a:ea typeface="Microsoft JhengHei"/>
-                <a:cs typeface="Microsoft JhengHei"/>
-              </a:defRPr>
-            </a:pPr>
-            <a:r>
-              <a:rPr sz="1950" b="1">
-                <a:solidFill>
-                  <a:srgbClr val="31644F"/>
-                </a:solidFill>
-                <a:latin typeface="Microsoft JhengHei"/>
-                <a:ea typeface="Microsoft JhengHei"/>
-                <a:cs typeface="Microsoft JhengHei"/>
-              </a:rPr>
-              <a:t>反覆使用驗證資料會累積選型偏差，分群與多期檢查仍不能保證 Private 表現</a:t>
+              <a:t>新建案、缺失地址與粗略道路位置，可能降低可比交易的支持</a:t>
             </a:r>
           </a:p>
         </p:txBody>
@@ -5421,7 +4604,7 @@
     </p:spTree>
     <p:extLst>
       <p:ext uri="{BB962C8B-B14F-4D97-AF65-F5344CB8AC3E}">
-        <p14:creationId xmlns:p14="http://schemas.microsoft.com/office/powerpoint/2010/main" val="41862936"/>
+        <p14:creationId xmlns:p14="http://schemas.microsoft.com/office/powerpoint/2010/main" val="1985114961"/>
       </p:ext>
     </p:extLst>
   </p:cSld>
@@ -5452,7 +4635,7 @@
           <p:cNvPr id="11" name="slide-title">
             <a:extLst xmlns:a="http://schemas.openxmlformats.org/drawingml/2006/main">
               <a:ext uri="{FF2B5EF4-FFF2-40B4-BE49-F238E27FC236}">
-                <a16:creationId xmlns:a16="http://schemas.microsoft.com/office/drawing/2014/main" id="{8CDEAE59-043F-49CE-BD82-0620D3C9400F}"/>
+                <a16:creationId xmlns:a16="http://schemas.microsoft.com/office/drawing/2014/main" id="{46202634-58FD-42AA-AB36-EB6F05A91F44}"/>
               </a:ext>
             </a:extLst>
           </p:cNvPr>
@@ -5499,7 +4682,7 @@
                 <a:ea typeface="Microsoft JhengHei"/>
                 <a:cs typeface="Microsoft JhengHei"/>
               </a:rPr>
-              <a:t>原始 test 重新推論可重現 v22</a:t>
+              <a:t>原始 test 重新推論可重現提交檔</a:t>
             </a:r>
           </a:p>
         </p:txBody>
@@ -5509,7 +4692,7 @@
           <p:cNvPr id="2" name="text">
             <a:extLst xmlns:a="http://schemas.openxmlformats.org/drawingml/2006/main">
               <a:ext uri="{FF2B5EF4-FFF2-40B4-BE49-F238E27FC236}">
-                <a16:creationId xmlns:a16="http://schemas.microsoft.com/office/drawing/2014/main" id="{07277973-E56D-4B28-89A0-1418FAFCCC17}"/>
+                <a16:creationId xmlns:a16="http://schemas.microsoft.com/office/drawing/2014/main" id="{25FBB42C-AEFB-4F96-9513-F103FF3A2FED}"/>
               </a:ext>
             </a:extLst>
           </p:cNvPr>
@@ -5556,7 +4739,7 @@
                 <a:ea typeface="Microsoft JhengHei"/>
                 <a:cs typeface="Microsoft JhengHei"/>
               </a:rPr>
-              <a:t>臺灣房屋總價預測／v22</a:t>
+              <a:t>臺灣房屋總價預測</a:t>
             </a:r>
           </a:p>
         </p:txBody>
@@ -5566,7 +4749,7 @@
           <p:cNvPr id="3" name="text">
             <a:extLst xmlns:a="http://schemas.openxmlformats.org/drawingml/2006/main">
               <a:ext uri="{FF2B5EF4-FFF2-40B4-BE49-F238E27FC236}">
-                <a16:creationId xmlns:a16="http://schemas.microsoft.com/office/drawing/2014/main" id="{8C0D01CB-D32E-4A93-9F40-D0C46F095D79}"/>
+                <a16:creationId xmlns:a16="http://schemas.microsoft.com/office/drawing/2014/main" id="{CB640FC0-B0AC-43B1-A5F1-864CDF70C72B}"/>
               </a:ext>
             </a:extLst>
           </p:cNvPr>
@@ -5623,7 +4806,7 @@
           <p:cNvPr id="4" name="text">
             <a:extLst xmlns:a="http://schemas.openxmlformats.org/drawingml/2006/main">
               <a:ext uri="{FF2B5EF4-FFF2-40B4-BE49-F238E27FC236}">
-                <a16:creationId xmlns:a16="http://schemas.microsoft.com/office/drawing/2014/main" id="{DF6B93D7-4615-43AE-A127-B990C77ECD92}"/>
+                <a16:creationId xmlns:a16="http://schemas.microsoft.com/office/drawing/2014/main" id="{B0E9B4C6-41DF-4D9C-814C-CFF14537BB68}"/>
               </a:ext>
             </a:extLst>
           </p:cNvPr>
@@ -5680,7 +4863,7 @@
           <p:cNvPr id="5" name="text">
             <a:extLst xmlns:a="http://schemas.openxmlformats.org/drawingml/2006/main">
               <a:ext uri="{FF2B5EF4-FFF2-40B4-BE49-F238E27FC236}">
-                <a16:creationId xmlns:a16="http://schemas.microsoft.com/office/drawing/2014/main" id="{60DD6697-C0F9-402E-A6EC-C34C917C0868}"/>
+                <a16:creationId xmlns:a16="http://schemas.microsoft.com/office/drawing/2014/main" id="{2DC5995D-C2EE-4DA5-9FCF-FC0E17DF1C01}"/>
               </a:ext>
             </a:extLst>
           </p:cNvPr>
@@ -5737,7 +4920,7 @@
           <p:cNvPr id="6" name="text">
             <a:extLst xmlns:a="http://schemas.openxmlformats.org/drawingml/2006/main">
               <a:ext uri="{FF2B5EF4-FFF2-40B4-BE49-F238E27FC236}">
-                <a16:creationId xmlns:a16="http://schemas.microsoft.com/office/drawing/2014/main" id="{F3566582-B8A3-40E8-90E6-0E928F0BFB5E}"/>
+                <a16:creationId xmlns:a16="http://schemas.microsoft.com/office/drawing/2014/main" id="{181F2E39-75AC-4A37-8C44-A2E450FE203B}"/>
               </a:ext>
             </a:extLst>
           </p:cNvPr>
@@ -5794,7 +4977,7 @@
           <p:cNvPr id="7" name="text">
             <a:extLst xmlns:a="http://schemas.openxmlformats.org/drawingml/2006/main">
               <a:ext uri="{FF2B5EF4-FFF2-40B4-BE49-F238E27FC236}">
-                <a16:creationId xmlns:a16="http://schemas.microsoft.com/office/drawing/2014/main" id="{E808CC28-0319-4A98-9DF0-B2433CCBD549}"/>
+                <a16:creationId xmlns:a16="http://schemas.microsoft.com/office/drawing/2014/main" id="{F62F22A7-0B6A-487A-B37E-33D83948F049}"/>
               </a:ext>
             </a:extLst>
           </p:cNvPr>
@@ -5851,7 +5034,7 @@
           <p:cNvPr id="8" name="text">
             <a:extLst xmlns:a="http://schemas.openxmlformats.org/drawingml/2006/main">
               <a:ext uri="{FF2B5EF4-FFF2-40B4-BE49-F238E27FC236}">
-                <a16:creationId xmlns:a16="http://schemas.microsoft.com/office/drawing/2014/main" id="{FD40EA3F-FEF1-4C67-BA73-5B046C00AED7}"/>
+                <a16:creationId xmlns:a16="http://schemas.microsoft.com/office/drawing/2014/main" id="{53FE5651-0683-452D-9044-3C555EFF819F}"/>
               </a:ext>
             </a:extLst>
           </p:cNvPr>
@@ -5908,7 +5091,7 @@
           <p:cNvPr id="9" name="text">
             <a:extLst xmlns:a="http://schemas.openxmlformats.org/drawingml/2006/main">
               <a:ext uri="{FF2B5EF4-FFF2-40B4-BE49-F238E27FC236}">
-                <a16:creationId xmlns:a16="http://schemas.microsoft.com/office/drawing/2014/main" id="{ECF19FDB-52BF-4498-92A5-33DC5D913FB1}"/>
+                <a16:creationId xmlns:a16="http://schemas.microsoft.com/office/drawing/2014/main" id="{F51FF0C3-AC97-4A81-807B-1D42D5A990A0}"/>
               </a:ext>
             </a:extLst>
           </p:cNvPr>
@@ -5965,7 +5148,7 @@
           <p:cNvPr id="10" name="text">
             <a:extLst xmlns:a="http://schemas.openxmlformats.org/drawingml/2006/main">
               <a:ext uri="{FF2B5EF4-FFF2-40B4-BE49-F238E27FC236}">
-                <a16:creationId xmlns:a16="http://schemas.microsoft.com/office/drawing/2014/main" id="{14D38C02-990E-4B50-BCF7-614EBA0CB01E}"/>
+                <a16:creationId xmlns:a16="http://schemas.microsoft.com/office/drawing/2014/main" id="{31678AC3-53AE-416A-8C0C-FD71E9134905}"/>
               </a:ext>
             </a:extLst>
           </p:cNvPr>
@@ -6020,7 +5203,7 @@
     </p:spTree>
     <p:extLst>
       <p:ext uri="{BB962C8B-B14F-4D97-AF65-F5344CB8AC3E}">
-        <p14:creationId xmlns:p14="http://schemas.microsoft.com/office/powerpoint/2010/main" val="1415862664"/>
+        <p14:creationId xmlns:p14="http://schemas.microsoft.com/office/powerpoint/2010/main" val="792953314"/>
       </p:ext>
     </p:extLst>
   </p:cSld>
@@ -6051,7 +5234,7 @@
           <p:cNvPr id="10" name="slide-title">
             <a:extLst xmlns:a="http://schemas.openxmlformats.org/drawingml/2006/main">
               <a:ext uri="{FF2B5EF4-FFF2-40B4-BE49-F238E27FC236}">
-                <a16:creationId xmlns:a16="http://schemas.microsoft.com/office/drawing/2014/main" id="{F4FD2FBD-E043-4AC0-910B-64C6040FE5B3}"/>
+                <a16:creationId xmlns:a16="http://schemas.microsoft.com/office/drawing/2014/main" id="{E2EDFB4C-D8D0-4E21-9D54-AE464E749049}"/>
               </a:ext>
             </a:extLst>
           </p:cNvPr>
@@ -6108,7 +5291,7 @@
           <p:cNvPr id="2" name="text">
             <a:extLst xmlns:a="http://schemas.openxmlformats.org/drawingml/2006/main">
               <a:ext uri="{FF2B5EF4-FFF2-40B4-BE49-F238E27FC236}">
-                <a16:creationId xmlns:a16="http://schemas.microsoft.com/office/drawing/2014/main" id="{E0087825-D02D-47AC-88E4-380B40B5633A}"/>
+                <a16:creationId xmlns:a16="http://schemas.microsoft.com/office/drawing/2014/main" id="{8BE3DE0A-47DE-460F-A3DF-CA7589353722}"/>
               </a:ext>
             </a:extLst>
           </p:cNvPr>
@@ -6155,7 +5338,7 @@
                 <a:ea typeface="Microsoft JhengHei"/>
                 <a:cs typeface="Microsoft JhengHei"/>
               </a:rPr>
-              <a:t>臺灣房屋總價預測／v22</a:t>
+              <a:t>臺灣房屋總價預測</a:t>
             </a:r>
           </a:p>
         </p:txBody>
@@ -6165,7 +5348,7 @@
           <p:cNvPr id="3" name="text">
             <a:extLst xmlns:a="http://schemas.openxmlformats.org/drawingml/2006/main">
               <a:ext uri="{FF2B5EF4-FFF2-40B4-BE49-F238E27FC236}">
-                <a16:creationId xmlns:a16="http://schemas.microsoft.com/office/drawing/2014/main" id="{2CCE8DE5-9282-41DF-B540-E0A44430B6DF}"/>
+                <a16:creationId xmlns:a16="http://schemas.microsoft.com/office/drawing/2014/main" id="{450A0C1E-F87C-4F34-AD9E-9819BAEBD213}"/>
               </a:ext>
             </a:extLst>
           </p:cNvPr>
@@ -6222,7 +5405,7 @@
           <p:cNvPr id="4" name="text">
             <a:extLst xmlns:a="http://schemas.openxmlformats.org/drawingml/2006/main">
               <a:ext uri="{FF2B5EF4-FFF2-40B4-BE49-F238E27FC236}">
-                <a16:creationId xmlns:a16="http://schemas.microsoft.com/office/drawing/2014/main" id="{8E352E58-CC18-4E46-A475-06FD2C71DED2}"/>
+                <a16:creationId xmlns:a16="http://schemas.microsoft.com/office/drawing/2014/main" id="{3165F1F4-6A38-49AD-8CB1-2DB88B43B330}"/>
               </a:ext>
             </a:extLst>
           </p:cNvPr>
@@ -6233,8 +5416,8 @@
         </p:nvSpPr>
         <p:spPr>
           <a:xfrm xmlns:a="http://schemas.openxmlformats.org/drawingml/2006/main">
-            <a:off x="685800" y="1638300"/>
-            <a:ext cx="10668000" cy="542925"/>
+            <a:off x="685800" y="1724025"/>
+            <a:ext cx="10572750" cy="552450"/>
           </a:xfrm>
           <a:prstGeom xmlns:a="http://schemas.openxmlformats.org/drawingml/2006/main" prst="rect">
             <a:avLst/>
@@ -6269,7 +5452,7 @@
                 <a:ea typeface="Microsoft JhengHei"/>
                 <a:cs typeface="Microsoft JhengHei"/>
               </a:rPr>
-              <a:t>v22 Public MAE 約 199.86 萬元</a:t>
+              <a:t>以房屋屬性與歷史成交預測總價</a:t>
             </a:r>
           </a:p>
         </p:txBody>
@@ -6279,7 +5462,7 @@
           <p:cNvPr id="5" name="text">
             <a:extLst xmlns:a="http://schemas.openxmlformats.org/drawingml/2006/main">
               <a:ext uri="{FF2B5EF4-FFF2-40B4-BE49-F238E27FC236}">
-                <a16:creationId xmlns:a16="http://schemas.microsoft.com/office/drawing/2014/main" id="{16922121-A8AB-4D95-AFDE-EB6A38C30ECA}"/>
+                <a16:creationId xmlns:a16="http://schemas.microsoft.com/office/drawing/2014/main" id="{A79C3775-BB72-49BD-8205-77A6ADBC6778}"/>
               </a:ext>
             </a:extLst>
           </p:cNvPr>
@@ -6290,8 +5473,8 @@
         </p:nvSpPr>
         <p:spPr>
           <a:xfrm xmlns:a="http://schemas.openxmlformats.org/drawingml/2006/main">
-            <a:off x="685800" y="2419350"/>
-            <a:ext cx="10820400" cy="485775"/>
+            <a:off x="685800" y="2600325"/>
+            <a:ext cx="10820400" cy="600075"/>
           </a:xfrm>
           <a:prstGeom xmlns:a="http://schemas.openxmlformats.org/drawingml/2006/main" prst="rect">
             <a:avLst/>
@@ -6326,7 +5509,7 @@
                 <a:ea typeface="Microsoft JhengHei"/>
                 <a:cs typeface="Microsoft JhengHei"/>
               </a:rPr>
-              <a:t>相對 v20 降低 3.44%，三期回測也有整體改善</a:t>
+              <a:t>近期加權的單價學習，搭配三分支中位數組合</a:t>
             </a:r>
           </a:p>
         </p:txBody>
@@ -6336,7 +5519,7 @@
           <p:cNvPr id="6" name="text">
             <a:extLst xmlns:a="http://schemas.openxmlformats.org/drawingml/2006/main">
               <a:ext uri="{FF2B5EF4-FFF2-40B4-BE49-F238E27FC236}">
-                <a16:creationId xmlns:a16="http://schemas.microsoft.com/office/drawing/2014/main" id="{8C33729F-15C5-40B9-818C-E394F76B73BE}"/>
+                <a16:creationId xmlns:a16="http://schemas.microsoft.com/office/drawing/2014/main" id="{B662B8CC-75C2-4BCE-BA8D-E3CB119D90D1}"/>
               </a:ext>
             </a:extLst>
           </p:cNvPr>
@@ -6347,8 +5530,8 @@
         </p:nvSpPr>
         <p:spPr>
           <a:xfrm xmlns:a="http://schemas.openxmlformats.org/drawingml/2006/main">
-            <a:off x="685800" y="3295650"/>
-            <a:ext cx="10820400" cy="628650"/>
+            <a:off x="685800" y="3533775"/>
+            <a:ext cx="10820400" cy="552450"/>
           </a:xfrm>
           <a:prstGeom xmlns:a="http://schemas.openxmlformats.org/drawingml/2006/main" prst="rect">
             <a:avLst/>
@@ -6365,7 +5548,7 @@
           <a:lstStyle xmlns:a="http://schemas.openxmlformats.org/drawingml/2006/main"/>
           <a:p xmlns:a="http://schemas.openxmlformats.org/drawingml/2006/main">
             <a:pPr algn="l">
-              <a:defRPr sz="2175" b="0">
+              <a:defRPr sz="2325" b="0">
                 <a:solidFill>
                   <a:srgbClr val="FFFFFF"/>
                 </a:solidFill>
@@ -6375,7 +5558,7 @@
               </a:defRPr>
             </a:pPr>
             <a:r>
-              <a:rPr sz="2175" b="0">
+              <a:rPr sz="2325" b="0">
                 <a:solidFill>
                   <a:srgbClr val="FFFFFF"/>
                 </a:solidFill>
@@ -6383,7 +5566,7 @@
                 <a:ea typeface="Microsoft JhengHei"/>
                 <a:cs typeface="Microsoft JhengHei"/>
               </a:rPr>
-              <a:t>v24 本機優勢與高價群退步，是保留候選的理由</a:t>
+              <a:t>Public MAE 約 199.86 萬元，Private 尚未知</a:t>
             </a:r>
           </a:p>
         </p:txBody>
@@ -6393,7 +5576,7 @@
           <p:cNvPr id="7" name="text">
             <a:extLst xmlns:a="http://schemas.openxmlformats.org/drawingml/2006/main">
               <a:ext uri="{FF2B5EF4-FFF2-40B4-BE49-F238E27FC236}">
-                <a16:creationId xmlns:a16="http://schemas.microsoft.com/office/drawing/2014/main" id="{917CC615-D3D0-4F64-BB18-140609F801DB}"/>
+                <a16:creationId xmlns:a16="http://schemas.microsoft.com/office/drawing/2014/main" id="{37CD3876-EC1D-4E0F-A502-DA7962CBAA9A}"/>
               </a:ext>
             </a:extLst>
           </p:cNvPr>
@@ -6404,8 +5587,8 @@
         </p:nvSpPr>
         <p:spPr>
           <a:xfrm xmlns:a="http://schemas.openxmlformats.org/drawingml/2006/main">
-            <a:off x="685800" y="4276725"/>
-            <a:ext cx="10820400" cy="409575"/>
+            <a:off x="685800" y="4505325"/>
+            <a:ext cx="10820400" cy="428625"/>
           </a:xfrm>
           <a:prstGeom xmlns:a="http://schemas.openxmlformats.org/drawingml/2006/main" prst="rect">
             <a:avLst/>
@@ -6450,7 +5633,7 @@
           <p:cNvPr id="8" name="text">
             <a:extLst xmlns:a="http://schemas.openxmlformats.org/drawingml/2006/main">
               <a:ext uri="{FF2B5EF4-FFF2-40B4-BE49-F238E27FC236}">
-                <a16:creationId xmlns:a16="http://schemas.microsoft.com/office/drawing/2014/main" id="{54E24466-4F89-4408-B696-9E479954EEED}"/>
+                <a16:creationId xmlns:a16="http://schemas.microsoft.com/office/drawing/2014/main" id="{82B2E445-B327-435F-95BB-6E97A7D05972}"/>
               </a:ext>
             </a:extLst>
           </p:cNvPr>
@@ -6461,7 +5644,7 @@
         </p:nvSpPr>
         <p:spPr>
           <a:xfrm xmlns:a="http://schemas.openxmlformats.org/drawingml/2006/main">
-            <a:off x="685800" y="4857750"/>
+            <a:off x="685800" y="5124450"/>
             <a:ext cx="10820400" cy="371475"/>
           </a:xfrm>
           <a:prstGeom xmlns:a="http://schemas.openxmlformats.org/drawingml/2006/main" prst="rect">
@@ -6507,7 +5690,7 @@
           <p:cNvPr id="9" name="text">
             <a:extLst xmlns:a="http://schemas.openxmlformats.org/drawingml/2006/main">
               <a:ext uri="{FF2B5EF4-FFF2-40B4-BE49-F238E27FC236}">
-                <a16:creationId xmlns:a16="http://schemas.microsoft.com/office/drawing/2014/main" id="{2160FE06-C380-42DA-ADC3-0F81624F86D0}"/>
+                <a16:creationId xmlns:a16="http://schemas.microsoft.com/office/drawing/2014/main" id="{05BF948D-DFB1-4CB4-9944-533A8139C16D}"/>
               </a:ext>
             </a:extLst>
           </p:cNvPr>
@@ -6518,7 +5701,7 @@
         </p:nvSpPr>
         <p:spPr>
           <a:xfrm xmlns:a="http://schemas.openxmlformats.org/drawingml/2006/main">
-            <a:off x="685800" y="5762625"/>
+            <a:off x="685800" y="5829300"/>
             <a:ext cx="10572750" cy="419100"/>
           </a:xfrm>
           <a:prstGeom xmlns:a="http://schemas.openxmlformats.org/drawingml/2006/main" prst="rect">
@@ -6536,7 +5719,7 @@
           <a:lstStyle xmlns:a="http://schemas.openxmlformats.org/drawingml/2006/main"/>
           <a:p xmlns:a="http://schemas.openxmlformats.org/drawingml/2006/main">
             <a:pPr algn="l">
-              <a:defRPr sz="2325" b="1">
+              <a:defRPr sz="2175" b="1">
                 <a:solidFill>
                   <a:srgbClr val="C8DC9E"/>
                 </a:solidFill>
@@ -6546,7 +5729,7 @@
               </a:defRPr>
             </a:pPr>
             <a:r>
-              <a:rPr sz="2325" b="1">
+              <a:rPr sz="2175" b="1">
                 <a:solidFill>
                   <a:srgbClr val="C8DC9E"/>
                 </a:solidFill>
@@ -6554,7 +5737,7 @@
                 <a:ea typeface="Microsoft JhengHei"/>
                 <a:cs typeface="Microsoft JhengHei"/>
               </a:rPr>
-              <a:t>Private 未知，最終提交版本仍未定</a:t>
+              <a:t>程式、正式報告與逐頁講稿均已保存</a:t>
             </a:r>
           </a:p>
         </p:txBody>
@@ -6562,7 +5745,7 @@
     </p:spTree>
     <p:extLst>
       <p:ext uri="{BB962C8B-B14F-4D97-AF65-F5344CB8AC3E}">
-        <p14:creationId xmlns:p14="http://schemas.microsoft.com/office/powerpoint/2010/main" val="1684378980"/>
+        <p14:creationId xmlns:p14="http://schemas.microsoft.com/office/powerpoint/2010/main" val="153635232"/>
       </p:ext>
     </p:extLst>
   </p:cSld>
@@ -6593,7 +5776,7 @@
           <p:cNvPr id="8" name="slide-title">
             <a:extLst xmlns:a="http://schemas.openxmlformats.org/drawingml/2006/main">
               <a:ext uri="{FF2B5EF4-FFF2-40B4-BE49-F238E27FC236}">
-                <a16:creationId xmlns:a16="http://schemas.microsoft.com/office/drawing/2014/main" id="{F920E07B-3A55-4009-B3CE-192D95480329}"/>
+                <a16:creationId xmlns:a16="http://schemas.microsoft.com/office/drawing/2014/main" id="{4717D9D5-7F78-49EE-BC3B-E67AF1E25A8A}"/>
               </a:ext>
             </a:extLst>
           </p:cNvPr>
@@ -6650,7 +5833,7 @@
           <p:cNvPr id="2" name="text">
             <a:extLst xmlns:a="http://schemas.openxmlformats.org/drawingml/2006/main">
               <a:ext uri="{FF2B5EF4-FFF2-40B4-BE49-F238E27FC236}">
-                <a16:creationId xmlns:a16="http://schemas.microsoft.com/office/drawing/2014/main" id="{32B60247-B72E-4CE6-B212-01AE9226A1D9}"/>
+                <a16:creationId xmlns:a16="http://schemas.microsoft.com/office/drawing/2014/main" id="{A446E4CE-605E-42AD-9487-814D99F29296}"/>
               </a:ext>
             </a:extLst>
           </p:cNvPr>
@@ -6697,7 +5880,7 @@
                 <a:ea typeface="Microsoft JhengHei"/>
                 <a:cs typeface="Microsoft JhengHei"/>
               </a:rPr>
-              <a:t>附錄／v22</a:t>
+              <a:t>技術附錄</a:t>
             </a:r>
           </a:p>
         </p:txBody>
@@ -6707,7 +5890,7 @@
           <p:cNvPr id="3" name="text">
             <a:extLst xmlns:a="http://schemas.openxmlformats.org/drawingml/2006/main">
               <a:ext uri="{FF2B5EF4-FFF2-40B4-BE49-F238E27FC236}">
-                <a16:creationId xmlns:a16="http://schemas.microsoft.com/office/drawing/2014/main" id="{B895A837-4A45-4537-A369-7A689D4F8ADC}"/>
+                <a16:creationId xmlns:a16="http://schemas.microsoft.com/office/drawing/2014/main" id="{4E96BDA5-C2F4-45BB-A01D-A4585051E118}"/>
               </a:ext>
             </a:extLst>
           </p:cNvPr>
@@ -6764,7 +5947,7 @@
           <p:cNvPr id="4" name="text">
             <a:extLst xmlns:a="http://schemas.openxmlformats.org/drawingml/2006/main">
               <a:ext uri="{FF2B5EF4-FFF2-40B4-BE49-F238E27FC236}">
-                <a16:creationId xmlns:a16="http://schemas.microsoft.com/office/drawing/2014/main" id="{96DE58A1-D461-4315-80BE-DDA6A3BD87C7}"/>
+                <a16:creationId xmlns:a16="http://schemas.microsoft.com/office/drawing/2014/main" id="{411FAE2F-6785-46DE-A281-25D38EA7D5C1}"/>
               </a:ext>
             </a:extLst>
           </p:cNvPr>
@@ -6821,7 +6004,7 @@
           <p:cNvPr id="5" name="text">
             <a:extLst xmlns:a="http://schemas.openxmlformats.org/drawingml/2006/main">
               <a:ext uri="{FF2B5EF4-FFF2-40B4-BE49-F238E27FC236}">
-                <a16:creationId xmlns:a16="http://schemas.microsoft.com/office/drawing/2014/main" id="{B2F0DB62-6621-4007-8805-9E5F5B369C66}"/>
+                <a16:creationId xmlns:a16="http://schemas.microsoft.com/office/drawing/2014/main" id="{47DB5CF1-F3A3-42C6-A96A-A380E4B164B9}"/>
               </a:ext>
             </a:extLst>
           </p:cNvPr>
@@ -7026,7 +6209,7 @@
           <p:cNvPr id="6" name="text">
             <a:extLst xmlns:a="http://schemas.openxmlformats.org/drawingml/2006/main">
               <a:ext uri="{FF2B5EF4-FFF2-40B4-BE49-F238E27FC236}">
-                <a16:creationId xmlns:a16="http://schemas.microsoft.com/office/drawing/2014/main" id="{5ABBEED3-95CB-4E61-A78B-27F2FE65B6B4}"/>
+                <a16:creationId xmlns:a16="http://schemas.microsoft.com/office/drawing/2014/main" id="{8B529D9D-8680-49FC-B231-36AA4D42BE37}"/>
               </a:ext>
             </a:extLst>
           </p:cNvPr>
@@ -7083,7 +6266,7 @@
           <p:cNvPr id="7" name="text">
             <a:extLst xmlns:a="http://schemas.openxmlformats.org/drawingml/2006/main">
               <a:ext uri="{FF2B5EF4-FFF2-40B4-BE49-F238E27FC236}">
-                <a16:creationId xmlns:a16="http://schemas.microsoft.com/office/drawing/2014/main" id="{65982AF8-6C25-4FA8-84C0-7D180F237890}"/>
+                <a16:creationId xmlns:a16="http://schemas.microsoft.com/office/drawing/2014/main" id="{0103B853-3E41-49B8-A170-D4DD42028389}"/>
               </a:ext>
             </a:extLst>
           </p:cNvPr>
@@ -7138,7 +6321,7 @@
     </p:spTree>
     <p:extLst>
       <p:ext uri="{BB962C8B-B14F-4D97-AF65-F5344CB8AC3E}">
-        <p14:creationId xmlns:p14="http://schemas.microsoft.com/office/powerpoint/2010/main" val="978535700"/>
+        <p14:creationId xmlns:p14="http://schemas.microsoft.com/office/powerpoint/2010/main" val="1024858934"/>
       </p:ext>
     </p:extLst>
   </p:cSld>
@@ -7169,7 +6352,7 @@
           <p:cNvPr id="9" name="slide-title">
             <a:extLst xmlns:a="http://schemas.openxmlformats.org/drawingml/2006/main">
               <a:ext uri="{FF2B5EF4-FFF2-40B4-BE49-F238E27FC236}">
-                <a16:creationId xmlns:a16="http://schemas.microsoft.com/office/drawing/2014/main" id="{3D50576A-B020-480D-A472-AAAA1551BD88}"/>
+                <a16:creationId xmlns:a16="http://schemas.microsoft.com/office/drawing/2014/main" id="{FF6805F0-D27D-42BB-B611-D0CD4907A647}"/>
               </a:ext>
             </a:extLst>
           </p:cNvPr>
@@ -7216,7 +6399,7 @@
                 <a:ea typeface="Microsoft JhengHei"/>
                 <a:cs typeface="Microsoft JhengHei"/>
               </a:rPr>
-              <a:t>附錄 B　核心程式與單價模型設定</a:t>
+              <a:t>附錄 B　單價模型核心程式與設定</a:t>
             </a:r>
           </a:p>
         </p:txBody>
@@ -7226,7 +6409,7 @@
           <p:cNvPr id="2" name="text">
             <a:extLst xmlns:a="http://schemas.openxmlformats.org/drawingml/2006/main">
               <a:ext uri="{FF2B5EF4-FFF2-40B4-BE49-F238E27FC236}">
-                <a16:creationId xmlns:a16="http://schemas.microsoft.com/office/drawing/2014/main" id="{F6763DE5-8391-4C36-B7C5-74F4E1EEC5D8}"/>
+                <a16:creationId xmlns:a16="http://schemas.microsoft.com/office/drawing/2014/main" id="{6E2B00C2-FFAC-430E-86AE-F57D2CB76E06}"/>
               </a:ext>
             </a:extLst>
           </p:cNvPr>
@@ -7273,7 +6456,7 @@
                 <a:ea typeface="Microsoft JhengHei"/>
                 <a:cs typeface="Microsoft JhengHei"/>
               </a:rPr>
-              <a:t>附錄／v22</a:t>
+              <a:t>技術附錄</a:t>
             </a:r>
           </a:p>
         </p:txBody>
@@ -7283,7 +6466,7 @@
           <p:cNvPr id="3" name="text">
             <a:extLst xmlns:a="http://schemas.openxmlformats.org/drawingml/2006/main">
               <a:ext uri="{FF2B5EF4-FFF2-40B4-BE49-F238E27FC236}">
-                <a16:creationId xmlns:a16="http://schemas.microsoft.com/office/drawing/2014/main" id="{FD5201F3-7C5D-4FBA-95B4-30C0CB833A34}"/>
+                <a16:creationId xmlns:a16="http://schemas.microsoft.com/office/drawing/2014/main" id="{38DBD06E-F396-46F2-AE4D-7B65A0AD3396}"/>
               </a:ext>
             </a:extLst>
           </p:cNvPr>
@@ -7340,7 +6523,7 @@
           <p:cNvPr id="4" name="text">
             <a:extLst xmlns:a="http://schemas.openxmlformats.org/drawingml/2006/main">
               <a:ext uri="{FF2B5EF4-FFF2-40B4-BE49-F238E27FC236}">
-                <a16:creationId xmlns:a16="http://schemas.microsoft.com/office/drawing/2014/main" id="{E72728A9-05DB-4888-B5AA-F853C9F91581}"/>
+                <a16:creationId xmlns:a16="http://schemas.microsoft.com/office/drawing/2014/main" id="{E4458F4B-0B28-4CCD-857A-D55237DBB2F2}"/>
               </a:ext>
             </a:extLst>
           </p:cNvPr>
@@ -7397,7 +6580,7 @@
           <p:cNvPr id="5" name="text">
             <a:extLst xmlns:a="http://schemas.openxmlformats.org/drawingml/2006/main">
               <a:ext uri="{FF2B5EF4-FFF2-40B4-BE49-F238E27FC236}">
-                <a16:creationId xmlns:a16="http://schemas.microsoft.com/office/drawing/2014/main" id="{2B557974-FDFC-468E-AF16-B8B3CD378F6B}"/>
+                <a16:creationId xmlns:a16="http://schemas.microsoft.com/office/drawing/2014/main" id="{AE520D1E-A664-4A62-9790-9F874DD198BE}"/>
               </a:ext>
             </a:extLst>
           </p:cNvPr>
@@ -7966,7 +7149,7 @@
           <p:cNvPr id="7" name="text">
             <a:extLst xmlns:a="http://schemas.openxmlformats.org/drawingml/2006/main">
               <a:ext uri="{FF2B5EF4-FFF2-40B4-BE49-F238E27FC236}">
-                <a16:creationId xmlns:a16="http://schemas.microsoft.com/office/drawing/2014/main" id="{A9082A92-37A2-4C6A-9341-460651499FC7}"/>
+                <a16:creationId xmlns:a16="http://schemas.microsoft.com/office/drawing/2014/main" id="{A835E862-F280-46F6-BE3C-40C5F3F62A18}"/>
               </a:ext>
             </a:extLst>
           </p:cNvPr>
@@ -7977,8 +7160,8 @@
         </p:nvSpPr>
         <p:spPr>
           <a:xfrm xmlns:a="http://schemas.openxmlformats.org/drawingml/2006/main">
-            <a:off x="685800" y="5505450"/>
-            <a:ext cx="10820400" cy="400050"/>
+            <a:off x="685800" y="5562600"/>
+            <a:ext cx="10820400" cy="381000"/>
           </a:xfrm>
           <a:prstGeom xmlns:a="http://schemas.openxmlformats.org/drawingml/2006/main" prst="rect">
             <a:avLst/>
@@ -7995,25 +7178,25 @@
           <a:lstStyle xmlns:a="http://schemas.openxmlformats.org/drawingml/2006/main"/>
           <a:p xmlns:a="http://schemas.openxmlformats.org/drawingml/2006/main">
             <a:pPr algn="l">
-              <a:defRPr sz="1875" b="0">
+              <a:defRPr sz="1950" b="0">
                 <a:solidFill>
                   <a:srgbClr val="31644F"/>
                 </a:solidFill>
-                <a:latin typeface="Consolas"/>
-                <a:ea typeface="Consolas"/>
-                <a:cs typeface="Consolas"/>
-              </a:defRPr>
-            </a:pPr>
-            <a:r>
-              <a:rPr sz="1875" b="0">
+                <a:latin typeface="Microsoft JhengHei"/>
+                <a:ea typeface="Microsoft JhengHei"/>
+                <a:cs typeface="Microsoft JhengHei"/>
+              </a:defRPr>
+            </a:pPr>
+            <a:r>
+              <a:rPr sz="1950" b="0">
                 <a:solidFill>
                   <a:srgbClr val="31644F"/>
                 </a:solidFill>
-                <a:latin typeface="Consolas"/>
-                <a:ea typeface="Consolas"/>
-                <a:cs typeface="Consolas"/>
-              </a:rPr>
-              <a:t>round79_recency_unit.py   /   round79_final.py</a:t>
+                <a:latin typeface="Microsoft JhengHei"/>
+                <a:ea typeface="Microsoft JhengHei"/>
+                <a:cs typeface="Microsoft JhengHei"/>
+              </a:rPr>
+              <a:t>A：建物面積優先，其次車位面積，皆無效時取 1</a:t>
             </a:r>
           </a:p>
         </p:txBody>
@@ -8023,7 +7206,7 @@
           <p:cNvPr id="8" name="text">
             <a:extLst xmlns:a="http://schemas.openxmlformats.org/drawingml/2006/main">
               <a:ext uri="{FF2B5EF4-FFF2-40B4-BE49-F238E27FC236}">
-                <a16:creationId xmlns:a16="http://schemas.microsoft.com/office/drawing/2014/main" id="{AE189756-AD17-4762-B189-6B9DC461B1F8}"/>
+                <a16:creationId xmlns:a16="http://schemas.microsoft.com/office/drawing/2014/main" id="{6AEF4A68-FBD0-4E7C-9F88-7A374C4EF99F}"/>
               </a:ext>
             </a:extLst>
           </p:cNvPr>
@@ -8034,7 +7217,7 @@
         </p:nvSpPr>
         <p:spPr>
           <a:xfrm xmlns:a="http://schemas.openxmlformats.org/drawingml/2006/main">
-            <a:off x="685800" y="5981700"/>
+            <a:off x="685800" y="6019800"/>
             <a:ext cx="10820400" cy="295275"/>
           </a:xfrm>
           <a:prstGeom xmlns:a="http://schemas.openxmlformats.org/drawingml/2006/main" prst="rect">
@@ -8070,7 +7253,7 @@
                 <a:ea typeface="Microsoft JhengHei"/>
                 <a:cs typeface="Microsoft JhengHei"/>
               </a:rPr>
-              <a:t>推論入口：src/predict_v22.py，完整從零重訓尚未驗證</a:t>
+              <a:t>推論入口：src/predict_v22.py，從零重訓尚未驗證</a:t>
             </a:r>
           </a:p>
         </p:txBody>
@@ -8078,549 +7261,7 @@
     </p:spTree>
     <p:extLst>
       <p:ext uri="{BB962C8B-B14F-4D97-AF65-F5344CB8AC3E}">
-        <p14:creationId xmlns:p14="http://schemas.microsoft.com/office/powerpoint/2010/main" val="221593509"/>
-      </p:ext>
-    </p:extLst>
-  </p:cSld>
-</p:sld>
-</file>
-
-<file path=ppt/slides/slide16.xml><?xml version="1.0" encoding="utf-8"?>
-<p:sld xmlns:p="http://schemas.openxmlformats.org/presentationml/2006/main">
-  <p:cSld>
-    <p:bg>
-      <p:bgPr>
-        <a:solidFill xmlns:a="http://schemas.openxmlformats.org/drawingml/2006/main">
-          <a:srgbClr val="F5F3EC"/>
-        </a:solidFill>
-      </p:bgPr>
-    </p:bg>
-    <p:spTree>
-      <p:nvGrpSpPr>
-        <p:cNvPr id="1" name=""/>
-        <p:cNvGrpSpPr/>
-        <p:nvPr/>
-      </p:nvGrpSpPr>
-      <p:grpSpPr>
-        <a:xfrm xmlns:a="http://schemas.openxmlformats.org/drawingml/2006/main"/>
-      </p:grpSpPr>
-      <p:sp>
-        <p:nvSpPr>
-          <p:cNvPr id="10" name="slide-title">
-            <a:extLst xmlns:a="http://schemas.openxmlformats.org/drawingml/2006/main">
-              <a:ext uri="{FF2B5EF4-FFF2-40B4-BE49-F238E27FC236}">
-                <a16:creationId xmlns:a16="http://schemas.microsoft.com/office/drawing/2014/main" id="{7634C29D-AC1A-4082-ABBB-1206EC73E611}"/>
-              </a:ext>
-            </a:extLst>
-          </p:cNvPr>
-          <p:cNvSpPr>
-            <a:spLocks xmlns:a="http://schemas.openxmlformats.org/drawingml/2006/main" noGrp="1"/>
-          </p:cNvSpPr>
-          <p:nvPr/>
-        </p:nvSpPr>
-        <p:spPr>
-          <a:xfrm xmlns:a="http://schemas.openxmlformats.org/drawingml/2006/main">
-            <a:off x="685800" y="457200"/>
-            <a:ext cx="10820400" cy="685800"/>
-          </a:xfrm>
-          <a:prstGeom xmlns:a="http://schemas.openxmlformats.org/drawingml/2006/main" prst="rect">
-            <a:avLst/>
-          </a:prstGeom>
-          <a:noFill xmlns:a="http://schemas.openxmlformats.org/drawingml/2006/main"/>
-          <a:ln xmlns:a="http://schemas.openxmlformats.org/drawingml/2006/main" w="0">
-            <a:noFill/>
-          </a:ln>
-        </p:spPr>
-        <p:txBody>
-          <a:bodyPr xmlns:a="http://schemas.openxmlformats.org/drawingml/2006/main" wrap="square" lIns="0" tIns="0" rIns="0" bIns="0" anchor="t">
-            <a:noAutofit/>
-          </a:bodyPr>
-          <a:lstStyle xmlns:a="http://schemas.openxmlformats.org/drawingml/2006/main"/>
-          <a:p xmlns:a="http://schemas.openxmlformats.org/drawingml/2006/main">
-            <a:pPr algn="l">
-              <a:defRPr sz="3300" b="1">
-                <a:solidFill>
-                  <a:srgbClr val="203D35"/>
-                </a:solidFill>
-                <a:latin typeface="Microsoft JhengHei"/>
-                <a:ea typeface="Microsoft JhengHei"/>
-                <a:cs typeface="Microsoft JhengHei"/>
-              </a:defRPr>
-            </a:pPr>
-            <a:r>
-              <a:rPr sz="3300" b="1">
-                <a:solidFill>
-                  <a:srgbClr val="203D35"/>
-                </a:solidFill>
-                <a:latin typeface="Microsoft JhengHei"/>
-                <a:ea typeface="Microsoft JhengHei"/>
-                <a:cs typeface="Microsoft JhengHei"/>
-              </a:rPr>
-              <a:t>附錄 C　問答準備</a:t>
-            </a:r>
-          </a:p>
-        </p:txBody>
-      </p:sp>
-      <p:sp>
-        <p:nvSpPr>
-          <p:cNvPr id="2" name="text">
-            <a:extLst xmlns:a="http://schemas.openxmlformats.org/drawingml/2006/main">
-              <a:ext uri="{FF2B5EF4-FFF2-40B4-BE49-F238E27FC236}">
-                <a16:creationId xmlns:a16="http://schemas.microsoft.com/office/drawing/2014/main" id="{17FEDD7A-AEC9-4241-92C9-06AB9B9978E5}"/>
-              </a:ext>
-            </a:extLst>
-          </p:cNvPr>
-          <p:cNvSpPr>
-            <a:spLocks xmlns:a="http://schemas.openxmlformats.org/drawingml/2006/main" noGrp="1"/>
-          </p:cNvSpPr>
-          <p:nvPr/>
-        </p:nvSpPr>
-        <p:spPr>
-          <a:xfrm xmlns:a="http://schemas.openxmlformats.org/drawingml/2006/main">
-            <a:off x="685800" y="6438900"/>
-            <a:ext cx="6191250" cy="228600"/>
-          </a:xfrm>
-          <a:prstGeom xmlns:a="http://schemas.openxmlformats.org/drawingml/2006/main" prst="rect">
-            <a:avLst/>
-          </a:prstGeom>
-          <a:noFill xmlns:a="http://schemas.openxmlformats.org/drawingml/2006/main"/>
-          <a:ln xmlns:a="http://schemas.openxmlformats.org/drawingml/2006/main" w="0">
-            <a:noFill/>
-          </a:ln>
-        </p:spPr>
-        <p:txBody>
-          <a:bodyPr xmlns:a="http://schemas.openxmlformats.org/drawingml/2006/main" wrap="square" lIns="0" tIns="0" rIns="0" bIns="0" anchor="t">
-            <a:noAutofit/>
-          </a:bodyPr>
-          <a:lstStyle xmlns:a="http://schemas.openxmlformats.org/drawingml/2006/main"/>
-          <a:p xmlns:a="http://schemas.openxmlformats.org/drawingml/2006/main">
-            <a:pPr algn="l">
-              <a:defRPr sz="1275" b="0">
-                <a:solidFill>
-                  <a:srgbClr val="69776D"/>
-                </a:solidFill>
-                <a:latin typeface="Microsoft JhengHei"/>
-                <a:ea typeface="Microsoft JhengHei"/>
-                <a:cs typeface="Microsoft JhengHei"/>
-              </a:defRPr>
-            </a:pPr>
-            <a:r>
-              <a:rPr sz="1275" b="0">
-                <a:solidFill>
-                  <a:srgbClr val="69776D"/>
-                </a:solidFill>
-                <a:latin typeface="Microsoft JhengHei"/>
-                <a:ea typeface="Microsoft JhengHei"/>
-                <a:cs typeface="Microsoft JhengHei"/>
-              </a:rPr>
-              <a:t>附錄／v22</a:t>
-            </a:r>
-          </a:p>
-        </p:txBody>
-      </p:sp>
-      <p:sp>
-        <p:nvSpPr>
-          <p:cNvPr id="3" name="text">
-            <a:extLst xmlns:a="http://schemas.openxmlformats.org/drawingml/2006/main">
-              <a:ext uri="{FF2B5EF4-FFF2-40B4-BE49-F238E27FC236}">
-                <a16:creationId xmlns:a16="http://schemas.microsoft.com/office/drawing/2014/main" id="{EA8455D1-B8D0-4CEB-946A-64FB6BD2A1EC}"/>
-              </a:ext>
-            </a:extLst>
-          </p:cNvPr>
-          <p:cNvSpPr>
-            <a:spLocks xmlns:a="http://schemas.openxmlformats.org/drawingml/2006/main" noGrp="1"/>
-          </p:cNvSpPr>
-          <p:nvPr/>
-        </p:nvSpPr>
-        <p:spPr>
-          <a:xfrm xmlns:a="http://schemas.openxmlformats.org/drawingml/2006/main">
-            <a:off x="10953750" y="6410325"/>
-            <a:ext cx="552450" cy="266700"/>
-          </a:xfrm>
-          <a:prstGeom xmlns:a="http://schemas.openxmlformats.org/drawingml/2006/main" prst="rect">
-            <a:avLst/>
-          </a:prstGeom>
-          <a:noFill xmlns:a="http://schemas.openxmlformats.org/drawingml/2006/main"/>
-          <a:ln xmlns:a="http://schemas.openxmlformats.org/drawingml/2006/main" w="0">
-            <a:noFill/>
-          </a:ln>
-        </p:spPr>
-        <p:txBody>
-          <a:bodyPr xmlns:a="http://schemas.openxmlformats.org/drawingml/2006/main" wrap="square" lIns="0" tIns="0" rIns="0" bIns="0" anchor="t">
-            <a:noAutofit/>
-          </a:bodyPr>
-          <a:lstStyle xmlns:a="http://schemas.openxmlformats.org/drawingml/2006/main"/>
-          <a:p xmlns:a="http://schemas.openxmlformats.org/drawingml/2006/main">
-            <a:pPr algn="r">
-              <a:defRPr sz="1425" b="0">
-                <a:solidFill>
-                  <a:srgbClr val="69776D"/>
-                </a:solidFill>
-                <a:latin typeface="Microsoft JhengHei"/>
-                <a:ea typeface="Microsoft JhengHei"/>
-                <a:cs typeface="Microsoft JhengHei"/>
-              </a:defRPr>
-            </a:pPr>
-            <a:r>
-              <a:rPr sz="1425" b="0">
-                <a:solidFill>
-                  <a:srgbClr val="69776D"/>
-                </a:solidFill>
-                <a:latin typeface="Microsoft JhengHei"/>
-                <a:ea typeface="Microsoft JhengHei"/>
-                <a:cs typeface="Microsoft JhengHei"/>
-              </a:rPr>
-              <a:t>16</a:t>
-            </a:r>
-          </a:p>
-        </p:txBody>
-      </p:sp>
-      <p:sp>
-        <p:nvSpPr>
-          <p:cNvPr id="4" name="text">
-            <a:extLst xmlns:a="http://schemas.openxmlformats.org/drawingml/2006/main">
-              <a:ext uri="{FF2B5EF4-FFF2-40B4-BE49-F238E27FC236}">
-                <a16:creationId xmlns:a16="http://schemas.microsoft.com/office/drawing/2014/main" id="{6A14070A-7977-46BA-A75C-5124B7B9F1BC}"/>
-              </a:ext>
-            </a:extLst>
-          </p:cNvPr>
-          <p:cNvSpPr>
-            <a:spLocks xmlns:a="http://schemas.openxmlformats.org/drawingml/2006/main" noGrp="1"/>
-          </p:cNvSpPr>
-          <p:nvPr/>
-        </p:nvSpPr>
-        <p:spPr>
-          <a:xfrm xmlns:a="http://schemas.openxmlformats.org/drawingml/2006/main">
-            <a:off x="685800" y="1533525"/>
-            <a:ext cx="10820400" cy="428625"/>
-          </a:xfrm>
-          <a:prstGeom xmlns:a="http://schemas.openxmlformats.org/drawingml/2006/main" prst="rect">
-            <a:avLst/>
-          </a:prstGeom>
-          <a:noFill xmlns:a="http://schemas.openxmlformats.org/drawingml/2006/main"/>
-          <a:ln xmlns:a="http://schemas.openxmlformats.org/drawingml/2006/main" w="0">
-            <a:noFill/>
-          </a:ln>
-        </p:spPr>
-        <p:txBody>
-          <a:bodyPr xmlns:a="http://schemas.openxmlformats.org/drawingml/2006/main" wrap="square" lIns="0" tIns="0" rIns="0" bIns="0" anchor="t">
-            <a:noAutofit/>
-          </a:bodyPr>
-          <a:lstStyle xmlns:a="http://schemas.openxmlformats.org/drawingml/2006/main"/>
-          <a:p xmlns:a="http://schemas.openxmlformats.org/drawingml/2006/main">
-            <a:pPr algn="l">
-              <a:defRPr sz="2325" b="1">
-                <a:solidFill>
-                  <a:srgbClr val="31644F"/>
-                </a:solidFill>
-                <a:latin typeface="Microsoft JhengHei"/>
-                <a:ea typeface="Microsoft JhengHei"/>
-                <a:cs typeface="Microsoft JhengHei"/>
-              </a:defRPr>
-            </a:pPr>
-            <a:r>
-              <a:rPr sz="2325" b="1">
-                <a:solidFill>
-                  <a:srgbClr val="31644F"/>
-                </a:solidFill>
-                <a:latin typeface="Microsoft JhengHei"/>
-                <a:ea typeface="Microsoft JhengHei"/>
-                <a:cs typeface="Microsoft JhengHei"/>
-              </a:rPr>
-              <a:t>為什麼不只用 Public 最低分決定？</a:t>
-            </a:r>
-          </a:p>
-        </p:txBody>
-      </p:sp>
-      <p:sp>
-        <p:nvSpPr>
-          <p:cNvPr id="5" name="text">
-            <a:extLst xmlns:a="http://schemas.openxmlformats.org/drawingml/2006/main">
-              <a:ext uri="{FF2B5EF4-FFF2-40B4-BE49-F238E27FC236}">
-                <a16:creationId xmlns:a16="http://schemas.microsoft.com/office/drawing/2014/main" id="{C0BA3178-0BE3-461F-A572-C3F1F6449021}"/>
-              </a:ext>
-            </a:extLst>
-          </p:cNvPr>
-          <p:cNvSpPr>
-            <a:spLocks xmlns:a="http://schemas.openxmlformats.org/drawingml/2006/main" noGrp="1"/>
-          </p:cNvSpPr>
-          <p:nvPr/>
-        </p:nvSpPr>
-        <p:spPr>
-          <a:xfrm xmlns:a="http://schemas.openxmlformats.org/drawingml/2006/main">
-            <a:off x="685800" y="2105025"/>
-            <a:ext cx="10820400" cy="609600"/>
-          </a:xfrm>
-          <a:prstGeom xmlns:a="http://schemas.openxmlformats.org/drawingml/2006/main" prst="rect">
-            <a:avLst/>
-          </a:prstGeom>
-          <a:noFill xmlns:a="http://schemas.openxmlformats.org/drawingml/2006/main"/>
-          <a:ln xmlns:a="http://schemas.openxmlformats.org/drawingml/2006/main" w="0">
-            <a:noFill/>
-          </a:ln>
-        </p:spPr>
-        <p:txBody>
-          <a:bodyPr xmlns:a="http://schemas.openxmlformats.org/drawingml/2006/main" wrap="square" lIns="0" tIns="0" rIns="0" bIns="0" anchor="t">
-            <a:noAutofit/>
-          </a:bodyPr>
-          <a:lstStyle xmlns:a="http://schemas.openxmlformats.org/drawingml/2006/main"/>
-          <a:p xmlns:a="http://schemas.openxmlformats.org/drawingml/2006/main">
-            <a:pPr algn="l">
-              <a:defRPr sz="2025" b="0">
-                <a:solidFill>
-                  <a:srgbClr val="34483F"/>
-                </a:solidFill>
-                <a:latin typeface="Microsoft JhengHei"/>
-                <a:ea typeface="Microsoft JhengHei"/>
-                <a:cs typeface="Microsoft JhengHei"/>
-              </a:defRPr>
-            </a:pPr>
-            <a:r>
-              <a:rPr sz="2025" b="0">
-                <a:solidFill>
-                  <a:srgbClr val="34483F"/>
-                </a:solidFill>
-                <a:latin typeface="Microsoft JhengHei"/>
-                <a:ea typeface="Microsoft JhengHei"/>
-                <a:cs typeface="Microsoft JhengHei"/>
-              </a:rPr>
-              <a:t>Public 約占 test 三成，其餘七成與未來市場差異仍未知</a:t>
-            </a:r>
-          </a:p>
-        </p:txBody>
-      </p:sp>
-      <p:sp>
-        <p:nvSpPr>
-          <p:cNvPr id="6" name="text">
-            <a:extLst xmlns:a="http://schemas.openxmlformats.org/drawingml/2006/main">
-              <a:ext uri="{FF2B5EF4-FFF2-40B4-BE49-F238E27FC236}">
-                <a16:creationId xmlns:a16="http://schemas.microsoft.com/office/drawing/2014/main" id="{E31810FC-65FB-4B5E-9DC2-13FC2ED6A844}"/>
-              </a:ext>
-            </a:extLst>
-          </p:cNvPr>
-          <p:cNvSpPr>
-            <a:spLocks xmlns:a="http://schemas.openxmlformats.org/drawingml/2006/main" noGrp="1"/>
-          </p:cNvSpPr>
-          <p:nvPr/>
-        </p:nvSpPr>
-        <p:spPr>
-          <a:xfrm xmlns:a="http://schemas.openxmlformats.org/drawingml/2006/main">
-            <a:off x="685800" y="3057525"/>
-            <a:ext cx="10820400" cy="428625"/>
-          </a:xfrm>
-          <a:prstGeom xmlns:a="http://schemas.openxmlformats.org/drawingml/2006/main" prst="rect">
-            <a:avLst/>
-          </a:prstGeom>
-          <a:noFill xmlns:a="http://schemas.openxmlformats.org/drawingml/2006/main"/>
-          <a:ln xmlns:a="http://schemas.openxmlformats.org/drawingml/2006/main" w="0">
-            <a:noFill/>
-          </a:ln>
-        </p:spPr>
-        <p:txBody>
-          <a:bodyPr xmlns:a="http://schemas.openxmlformats.org/drawingml/2006/main" wrap="square" lIns="0" tIns="0" rIns="0" bIns="0" anchor="t">
-            <a:noAutofit/>
-          </a:bodyPr>
-          <a:lstStyle xmlns:a="http://schemas.openxmlformats.org/drawingml/2006/main"/>
-          <a:p xmlns:a="http://schemas.openxmlformats.org/drawingml/2006/main">
-            <a:pPr algn="l">
-              <a:defRPr sz="2325" b="1">
-                <a:solidFill>
-                  <a:srgbClr val="31644F"/>
-                </a:solidFill>
-                <a:latin typeface="Microsoft JhengHei"/>
-                <a:ea typeface="Microsoft JhengHei"/>
-                <a:cs typeface="Microsoft JhengHei"/>
-              </a:defRPr>
-            </a:pPr>
-            <a:r>
-              <a:rPr sz="2325" b="1">
-                <a:solidFill>
-                  <a:srgbClr val="31644F"/>
-                </a:solidFill>
-                <a:latin typeface="Microsoft JhengHei"/>
-                <a:ea typeface="Microsoft JhengHei"/>
-                <a:cs typeface="Microsoft JhengHei"/>
-              </a:rPr>
-              <a:t>如何降低過擬合與資料洩漏風險？</a:t>
-            </a:r>
-          </a:p>
-        </p:txBody>
-      </p:sp>
-      <p:sp>
-        <p:nvSpPr>
-          <p:cNvPr id="7" name="text">
-            <a:extLst xmlns:a="http://schemas.openxmlformats.org/drawingml/2006/main">
-              <a:ext uri="{FF2B5EF4-FFF2-40B4-BE49-F238E27FC236}">
-                <a16:creationId xmlns:a16="http://schemas.microsoft.com/office/drawing/2014/main" id="{66B147DD-8FA6-4242-A3FF-6D21B081908B}"/>
-              </a:ext>
-            </a:extLst>
-          </p:cNvPr>
-          <p:cNvSpPr>
-            <a:spLocks xmlns:a="http://schemas.openxmlformats.org/drawingml/2006/main" noGrp="1"/>
-          </p:cNvSpPr>
-          <p:nvPr/>
-        </p:nvSpPr>
-        <p:spPr>
-          <a:xfrm xmlns:a="http://schemas.openxmlformats.org/drawingml/2006/main">
-            <a:off x="685800" y="3629025"/>
-            <a:ext cx="10820400" cy="638175"/>
-          </a:xfrm>
-          <a:prstGeom xmlns:a="http://schemas.openxmlformats.org/drawingml/2006/main" prst="rect">
-            <a:avLst/>
-          </a:prstGeom>
-          <a:noFill xmlns:a="http://schemas.openxmlformats.org/drawingml/2006/main"/>
-          <a:ln xmlns:a="http://schemas.openxmlformats.org/drawingml/2006/main" w="0">
-            <a:noFill/>
-          </a:ln>
-        </p:spPr>
-        <p:txBody>
-          <a:bodyPr xmlns:a="http://schemas.openxmlformats.org/drawingml/2006/main" wrap="square" lIns="0" tIns="0" rIns="0" bIns="0" anchor="t">
-            <a:noAutofit/>
-          </a:bodyPr>
-          <a:lstStyle xmlns:a="http://schemas.openxmlformats.org/drawingml/2006/main"/>
-          <a:p xmlns:a="http://schemas.openxmlformats.org/drawingml/2006/main">
-            <a:pPr algn="l">
-              <a:defRPr sz="2025" b="0">
-                <a:solidFill>
-                  <a:srgbClr val="34483F"/>
-                </a:solidFill>
-                <a:latin typeface="Microsoft JhengHei"/>
-                <a:ea typeface="Microsoft JhengHei"/>
-                <a:cs typeface="Microsoft JhengHei"/>
-              </a:defRPr>
-            </a:pPr>
-            <a:r>
-              <a:rPr sz="2025" b="0">
-                <a:solidFill>
-                  <a:srgbClr val="34483F"/>
-                </a:solidFill>
-                <a:latin typeface="Microsoft JhengHei"/>
-                <a:ea typeface="Microsoft JhengHei"/>
-                <a:cs typeface="Microsoft JhengHei"/>
-              </a:rPr>
-              <a:t>使用時間回測與 fit-only 狀態，保留分群退步與窗口重用限制</a:t>
-            </a:r>
-          </a:p>
-        </p:txBody>
-      </p:sp>
-      <p:sp>
-        <p:nvSpPr>
-          <p:cNvPr id="8" name="text">
-            <a:extLst xmlns:a="http://schemas.openxmlformats.org/drawingml/2006/main">
-              <a:ext uri="{FF2B5EF4-FFF2-40B4-BE49-F238E27FC236}">
-                <a16:creationId xmlns:a16="http://schemas.microsoft.com/office/drawing/2014/main" id="{006EF04B-5344-4EB4-BE2E-64BCF96F22CF}"/>
-              </a:ext>
-            </a:extLst>
-          </p:cNvPr>
-          <p:cNvSpPr>
-            <a:spLocks xmlns:a="http://schemas.openxmlformats.org/drawingml/2006/main" noGrp="1"/>
-          </p:cNvSpPr>
-          <p:nvPr/>
-        </p:nvSpPr>
-        <p:spPr>
-          <a:xfrm xmlns:a="http://schemas.openxmlformats.org/drawingml/2006/main">
-            <a:off x="685800" y="4638675"/>
-            <a:ext cx="10820400" cy="428625"/>
-          </a:xfrm>
-          <a:prstGeom xmlns:a="http://schemas.openxmlformats.org/drawingml/2006/main" prst="rect">
-            <a:avLst/>
-          </a:prstGeom>
-          <a:noFill xmlns:a="http://schemas.openxmlformats.org/drawingml/2006/main"/>
-          <a:ln xmlns:a="http://schemas.openxmlformats.org/drawingml/2006/main" w="0">
-            <a:noFill/>
-          </a:ln>
-        </p:spPr>
-        <p:txBody>
-          <a:bodyPr xmlns:a="http://schemas.openxmlformats.org/drawingml/2006/main" wrap="square" lIns="0" tIns="0" rIns="0" bIns="0" anchor="t">
-            <a:noAutofit/>
-          </a:bodyPr>
-          <a:lstStyle xmlns:a="http://schemas.openxmlformats.org/drawingml/2006/main"/>
-          <a:p xmlns:a="http://schemas.openxmlformats.org/drawingml/2006/main">
-            <a:pPr algn="l">
-              <a:defRPr sz="2325" b="1">
-                <a:solidFill>
-                  <a:srgbClr val="31644F"/>
-                </a:solidFill>
-                <a:latin typeface="Microsoft JhengHei"/>
-                <a:ea typeface="Microsoft JhengHei"/>
-                <a:cs typeface="Microsoft JhengHei"/>
-              </a:defRPr>
-            </a:pPr>
-            <a:r>
-              <a:rPr sz="2325" b="1">
-                <a:solidFill>
-                  <a:srgbClr val="31644F"/>
-                </a:solidFill>
-                <a:latin typeface="Microsoft JhengHei"/>
-                <a:ea typeface="Microsoft JhengHei"/>
-                <a:cs typeface="Microsoft JhengHei"/>
-              </a:rPr>
-              <a:t>程式可以完整重現嗎？</a:t>
-            </a:r>
-          </a:p>
-        </p:txBody>
-      </p:sp>
-      <p:sp>
-        <p:nvSpPr>
-          <p:cNvPr id="9" name="text">
-            <a:extLst xmlns:a="http://schemas.openxmlformats.org/drawingml/2006/main">
-              <a:ext uri="{FF2B5EF4-FFF2-40B4-BE49-F238E27FC236}">
-                <a16:creationId xmlns:a16="http://schemas.microsoft.com/office/drawing/2014/main" id="{86B88C07-08D6-40F6-A0E8-642AABF324EC}"/>
-              </a:ext>
-            </a:extLst>
-          </p:cNvPr>
-          <p:cNvSpPr>
-            <a:spLocks xmlns:a="http://schemas.openxmlformats.org/drawingml/2006/main" noGrp="1"/>
-          </p:cNvSpPr>
-          <p:nvPr/>
-        </p:nvSpPr>
-        <p:spPr>
-          <a:xfrm xmlns:a="http://schemas.openxmlformats.org/drawingml/2006/main">
-            <a:off x="685800" y="5238750"/>
-            <a:ext cx="10820400" cy="628650"/>
-          </a:xfrm>
-          <a:prstGeom xmlns:a="http://schemas.openxmlformats.org/drawingml/2006/main" prst="rect">
-            <a:avLst/>
-          </a:prstGeom>
-          <a:noFill xmlns:a="http://schemas.openxmlformats.org/drawingml/2006/main"/>
-          <a:ln xmlns:a="http://schemas.openxmlformats.org/drawingml/2006/main" w="0">
-            <a:noFill/>
-          </a:ln>
-        </p:spPr>
-        <p:txBody>
-          <a:bodyPr xmlns:a="http://schemas.openxmlformats.org/drawingml/2006/main" wrap="square" lIns="0" tIns="0" rIns="0" bIns="0" anchor="t">
-            <a:noAutofit/>
-          </a:bodyPr>
-          <a:lstStyle xmlns:a="http://schemas.openxmlformats.org/drawingml/2006/main"/>
-          <a:p xmlns:a="http://schemas.openxmlformats.org/drawingml/2006/main">
-            <a:pPr algn="l">
-              <a:defRPr sz="2025" b="0">
-                <a:solidFill>
-                  <a:srgbClr val="34483F"/>
-                </a:solidFill>
-                <a:latin typeface="Microsoft JhengHei"/>
-                <a:ea typeface="Microsoft JhengHei"/>
-                <a:cs typeface="Microsoft JhengHei"/>
-              </a:defRPr>
-            </a:pPr>
-            <a:r>
-              <a:rPr sz="2025" b="0">
-                <a:solidFill>
-                  <a:srgbClr val="34483F"/>
-                </a:solidFill>
-                <a:latin typeface="Microsoft JhengHei"/>
-                <a:ea typeface="Microsoft JhengHei"/>
-                <a:cs typeface="Microsoft JhengHei"/>
-              </a:rPr>
-              <a:t>原 test 加保存狀態的推論已重現，從零重訓尚未驗證</a:t>
-            </a:r>
-          </a:p>
-        </p:txBody>
-      </p:sp>
-    </p:spTree>
-    <p:extLst>
-      <p:ext uri="{BB962C8B-B14F-4D97-AF65-F5344CB8AC3E}">
-        <p14:creationId xmlns:p14="http://schemas.microsoft.com/office/powerpoint/2010/main" val="895474496"/>
+        <p14:creationId xmlns:p14="http://schemas.microsoft.com/office/powerpoint/2010/main" val="1901829513"/>
       </p:ext>
     </p:extLst>
   </p:cSld>
@@ -8651,7 +7292,7 @@
           <p:cNvPr id="12" name="slide-title">
             <a:extLst xmlns:a="http://schemas.openxmlformats.org/drawingml/2006/main">
               <a:ext uri="{FF2B5EF4-FFF2-40B4-BE49-F238E27FC236}">
-                <a16:creationId xmlns:a16="http://schemas.microsoft.com/office/drawing/2014/main" id="{C3ED0976-BC11-4D5C-B8AE-D5B9BF43E636}"/>
+                <a16:creationId xmlns:a16="http://schemas.microsoft.com/office/drawing/2014/main" id="{D1B6CD87-DCC0-49EE-A153-2A904EA9755F}"/>
               </a:ext>
             </a:extLst>
           </p:cNvPr>
@@ -8698,7 +7339,7 @@
                 <a:ea typeface="Microsoft JhengHei"/>
                 <a:cs typeface="Microsoft JhengHei"/>
               </a:rPr>
-              <a:t>評分看每筆總價的平均絕對誤差</a:t>
+              <a:t>評分看總價的平均絕對誤差</a:t>
             </a:r>
           </a:p>
         </p:txBody>
@@ -8708,7 +7349,7 @@
           <p:cNvPr id="2" name="text">
             <a:extLst xmlns:a="http://schemas.openxmlformats.org/drawingml/2006/main">
               <a:ext uri="{FF2B5EF4-FFF2-40B4-BE49-F238E27FC236}">
-                <a16:creationId xmlns:a16="http://schemas.microsoft.com/office/drawing/2014/main" id="{02887D7F-19DE-49A1-881F-B596EBB604E1}"/>
+                <a16:creationId xmlns:a16="http://schemas.microsoft.com/office/drawing/2014/main" id="{D0AE4FB4-CE32-416D-B10B-496C553E1FA7}"/>
               </a:ext>
             </a:extLst>
           </p:cNvPr>
@@ -8755,7 +7396,7 @@
                 <a:ea typeface="Microsoft JhengHei"/>
                 <a:cs typeface="Microsoft JhengHei"/>
               </a:rPr>
-              <a:t>臺灣房屋總價預測／v22</a:t>
+              <a:t>臺灣房屋總價預測</a:t>
             </a:r>
           </a:p>
         </p:txBody>
@@ -8765,7 +7406,7 @@
           <p:cNvPr id="3" name="text">
             <a:extLst xmlns:a="http://schemas.openxmlformats.org/drawingml/2006/main">
               <a:ext uri="{FF2B5EF4-FFF2-40B4-BE49-F238E27FC236}">
-                <a16:creationId xmlns:a16="http://schemas.microsoft.com/office/drawing/2014/main" id="{8427FE79-0835-4E35-8A0A-CC9A9D54950E}"/>
+                <a16:creationId xmlns:a16="http://schemas.microsoft.com/office/drawing/2014/main" id="{034931BA-26DB-4E0B-8F48-A13AA3DFC559}"/>
               </a:ext>
             </a:extLst>
           </p:cNvPr>
@@ -8822,7 +7463,7 @@
           <p:cNvPr id="4" name="text">
             <a:extLst xmlns:a="http://schemas.openxmlformats.org/drawingml/2006/main">
               <a:ext uri="{FF2B5EF4-FFF2-40B4-BE49-F238E27FC236}">
-                <a16:creationId xmlns:a16="http://schemas.microsoft.com/office/drawing/2014/main" id="{34C72970-CA45-41FF-A550-3202C20FBE14}"/>
+                <a16:creationId xmlns:a16="http://schemas.microsoft.com/office/drawing/2014/main" id="{2D941C29-048C-441A-BEB1-24A3CEA66C34}"/>
               </a:ext>
             </a:extLst>
           </p:cNvPr>
@@ -8879,7 +7520,7 @@
           <p:cNvPr id="5" name="text">
             <a:extLst xmlns:a="http://schemas.openxmlformats.org/drawingml/2006/main">
               <a:ext uri="{FF2B5EF4-FFF2-40B4-BE49-F238E27FC236}">
-                <a16:creationId xmlns:a16="http://schemas.microsoft.com/office/drawing/2014/main" id="{FA9EC698-C67F-42B2-8946-C5D8D6DC32E2}"/>
+                <a16:creationId xmlns:a16="http://schemas.microsoft.com/office/drawing/2014/main" id="{EF4A6EAF-1C75-4C14-B044-82539D808007}"/>
               </a:ext>
             </a:extLst>
           </p:cNvPr>
@@ -8926,7 +7567,7 @@
                 <a:ea typeface="Microsoft JhengHei"/>
                 <a:cs typeface="Microsoft JhengHei"/>
               </a:rPr>
-              <a:t>誤差越低，預測越接近真價</a:t>
+              <a:t>單位為新臺幣元，越低越好</a:t>
             </a:r>
           </a:p>
         </p:txBody>
@@ -8936,7 +7577,7 @@
           <p:cNvPr id="6" name="text">
             <a:extLst xmlns:a="http://schemas.openxmlformats.org/drawingml/2006/main">
               <a:ext uri="{FF2B5EF4-FFF2-40B4-BE49-F238E27FC236}">
-                <a16:creationId xmlns:a16="http://schemas.microsoft.com/office/drawing/2014/main" id="{019397AD-545D-4C87-804A-DD053E12BE35}"/>
+                <a16:creationId xmlns:a16="http://schemas.microsoft.com/office/drawing/2014/main" id="{A5BA91BA-4FB2-461E-A4A0-5E4654DF3C49}"/>
               </a:ext>
             </a:extLst>
           </p:cNvPr>
@@ -8983,7 +7624,7 @@
                 <a:ea typeface="Microsoft JhengHei"/>
                 <a:cs typeface="Microsoft JhengHei"/>
               </a:rPr>
-              <a:t>示意交易</a:t>
+              <a:t>假設例子</a:t>
             </a:r>
           </a:p>
         </p:txBody>
@@ -8993,7 +7634,7 @@
           <p:cNvPr id="7" name="text">
             <a:extLst xmlns:a="http://schemas.openxmlformats.org/drawingml/2006/main">
               <a:ext uri="{FF2B5EF4-FFF2-40B4-BE49-F238E27FC236}">
-                <a16:creationId xmlns:a16="http://schemas.microsoft.com/office/drawing/2014/main" id="{D9BF71FF-22E9-4925-845C-1C16D27FB0B8}"/>
+                <a16:creationId xmlns:a16="http://schemas.microsoft.com/office/drawing/2014/main" id="{ABA5500F-A671-4726-9534-E842DBFF3404}"/>
               </a:ext>
             </a:extLst>
           </p:cNvPr>
@@ -9050,7 +7691,7 @@
           <p:cNvPr id="8" name="text">
             <a:extLst xmlns:a="http://schemas.openxmlformats.org/drawingml/2006/main">
               <a:ext uri="{FF2B5EF4-FFF2-40B4-BE49-F238E27FC236}">
-                <a16:creationId xmlns:a16="http://schemas.microsoft.com/office/drawing/2014/main" id="{35955A32-8569-489A-8E03-3518C30F9451}"/>
+                <a16:creationId xmlns:a16="http://schemas.microsoft.com/office/drawing/2014/main" id="{BC0970BE-5232-489F-A06D-113C0251477D}"/>
               </a:ext>
             </a:extLst>
           </p:cNvPr>
@@ -9114,7 +7755,7 @@
         </p:xfrm>
         <a:graphic xmlns:a="http://schemas.openxmlformats.org/drawingml/2006/main">
           <a:graphicData uri="http://schemas.openxmlformats.org/drawingml/2006/chart">
-            <c:chart xmlns:r="http://schemas.openxmlformats.org/officeDocument/2006/relationships" xmlns:c="http://schemas.openxmlformats.org/drawingml/2006/chart" r:id="R7a4f936df8f549b7"/>
+            <c:chart xmlns:r="http://schemas.openxmlformats.org/officeDocument/2006/relationships" xmlns:c="http://schemas.openxmlformats.org/drawingml/2006/chart" r:id="R80103ba29cae4ef7"/>
           </a:graphicData>
         </a:graphic>
       </p:graphicFrame>
@@ -9123,7 +7764,7 @@
           <p:cNvPr id="10" name="text">
             <a:extLst xmlns:a="http://schemas.openxmlformats.org/drawingml/2006/main">
               <a:ext uri="{FF2B5EF4-FFF2-40B4-BE49-F238E27FC236}">
-                <a16:creationId xmlns:a16="http://schemas.microsoft.com/office/drawing/2014/main" id="{10165BD2-E85B-49F0-AD94-AC81443EA482}"/>
+                <a16:creationId xmlns:a16="http://schemas.microsoft.com/office/drawing/2014/main" id="{218CDC12-27C3-4981-BDFA-A5EF198E71AC}"/>
               </a:ext>
             </a:extLst>
           </p:cNvPr>
@@ -9180,7 +7821,7 @@
           <p:cNvPr id="11" name="text">
             <a:extLst xmlns:a="http://schemas.openxmlformats.org/drawingml/2006/main">
               <a:ext uri="{FF2B5EF4-FFF2-40B4-BE49-F238E27FC236}">
-                <a16:creationId xmlns:a16="http://schemas.microsoft.com/office/drawing/2014/main" id="{0B1A78F2-CCFC-4136-8CB0-11BE907AD721}"/>
+                <a16:creationId xmlns:a16="http://schemas.microsoft.com/office/drawing/2014/main" id="{A245710A-8074-4E34-A708-6DC1EF35DE2F}"/>
               </a:ext>
             </a:extLst>
           </p:cNvPr>
@@ -9235,7 +7876,7 @@
     </p:spTree>
     <p:extLst>
       <p:ext uri="{BB962C8B-B14F-4D97-AF65-F5344CB8AC3E}">
-        <p14:creationId xmlns:p14="http://schemas.microsoft.com/office/powerpoint/2010/main" val="531708585"/>
+        <p14:creationId xmlns:p14="http://schemas.microsoft.com/office/powerpoint/2010/main" val="1163093219"/>
       </p:ext>
     </p:extLst>
   </p:cSld>
@@ -9266,7 +7907,7 @@
           <p:cNvPr id="10" name="slide-title">
             <a:extLst xmlns:a="http://schemas.openxmlformats.org/drawingml/2006/main">
               <a:ext uri="{FF2B5EF4-FFF2-40B4-BE49-F238E27FC236}">
-                <a16:creationId xmlns:a16="http://schemas.microsoft.com/office/drawing/2014/main" id="{B56F8549-EF4F-4511-9909-DFB8F3910C50}"/>
+                <a16:creationId xmlns:a16="http://schemas.microsoft.com/office/drawing/2014/main" id="{483B9307-24E6-4213-98C4-4B645AD33831}"/>
               </a:ext>
             </a:extLst>
           </p:cNvPr>
@@ -9313,7 +7954,7 @@
                 <a:ea typeface="Microsoft JhengHei"/>
                 <a:cs typeface="Microsoft JhengHei"/>
               </a:rPr>
-              <a:t>清理後使用 467,221 筆最終訓練資料</a:t>
+              <a:t>清理後使用 467,221 筆訓練資料</a:t>
             </a:r>
           </a:p>
         </p:txBody>
@@ -9323,7 +7964,7 @@
           <p:cNvPr id="2" name="text">
             <a:extLst xmlns:a="http://schemas.openxmlformats.org/drawingml/2006/main">
               <a:ext uri="{FF2B5EF4-FFF2-40B4-BE49-F238E27FC236}">
-                <a16:creationId xmlns:a16="http://schemas.microsoft.com/office/drawing/2014/main" id="{36AF7807-8CA4-46E3-8A29-6410B8FC2BB3}"/>
+                <a16:creationId xmlns:a16="http://schemas.microsoft.com/office/drawing/2014/main" id="{5CECA7F2-6585-4851-91AC-E42B1207F754}"/>
               </a:ext>
             </a:extLst>
           </p:cNvPr>
@@ -9370,7 +8011,7 @@
                 <a:ea typeface="Microsoft JhengHei"/>
                 <a:cs typeface="Microsoft JhengHei"/>
               </a:rPr>
-              <a:t>臺灣房屋總價預測／v22</a:t>
+              <a:t>臺灣房屋總價預測</a:t>
             </a:r>
           </a:p>
         </p:txBody>
@@ -9380,7 +8021,7 @@
           <p:cNvPr id="3" name="text">
             <a:extLst xmlns:a="http://schemas.openxmlformats.org/drawingml/2006/main">
               <a:ext uri="{FF2B5EF4-FFF2-40B4-BE49-F238E27FC236}">
-                <a16:creationId xmlns:a16="http://schemas.microsoft.com/office/drawing/2014/main" id="{6C0A4F4E-D26C-48F7-AE95-60FF656B66A6}"/>
+                <a16:creationId xmlns:a16="http://schemas.microsoft.com/office/drawing/2014/main" id="{E67A0C25-DD41-4644-A400-1011D21725DF}"/>
               </a:ext>
             </a:extLst>
           </p:cNvPr>
@@ -9783,7 +8424,7 @@
           <p:cNvPr id="5" name="text">
             <a:extLst xmlns:a="http://schemas.openxmlformats.org/drawingml/2006/main">
               <a:ext uri="{FF2B5EF4-FFF2-40B4-BE49-F238E27FC236}">
-                <a16:creationId xmlns:a16="http://schemas.microsoft.com/office/drawing/2014/main" id="{4EFBC550-1C20-4F3E-9392-5712A0206E4B}"/>
+                <a16:creationId xmlns:a16="http://schemas.microsoft.com/office/drawing/2014/main" id="{C362DF0E-6FD7-4A22-BB9B-DBAF1BAAF4CE}"/>
               </a:ext>
             </a:extLst>
           </p:cNvPr>
@@ -9840,7 +8481,7 @@
           <p:cNvPr id="6" name="text">
             <a:extLst xmlns:a="http://schemas.openxmlformats.org/drawingml/2006/main">
               <a:ext uri="{FF2B5EF4-FFF2-40B4-BE49-F238E27FC236}">
-                <a16:creationId xmlns:a16="http://schemas.microsoft.com/office/drawing/2014/main" id="{A8878D19-7F31-4CB4-A4CB-C61528B44C15}"/>
+                <a16:creationId xmlns:a16="http://schemas.microsoft.com/office/drawing/2014/main" id="{2A89942B-925D-4580-932C-816C2FBD47BA}"/>
               </a:ext>
             </a:extLst>
           </p:cNvPr>
@@ -9897,7 +8538,7 @@
           <p:cNvPr id="7" name="text">
             <a:extLst xmlns:a="http://schemas.openxmlformats.org/drawingml/2006/main">
               <a:ext uri="{FF2B5EF4-FFF2-40B4-BE49-F238E27FC236}">
-                <a16:creationId xmlns:a16="http://schemas.microsoft.com/office/drawing/2014/main" id="{6B6E191A-95EC-4D8C-8109-C2EB56BBB735}"/>
+                <a16:creationId xmlns:a16="http://schemas.microsoft.com/office/drawing/2014/main" id="{1442C742-AC74-4298-A0C4-5B039926CEA7}"/>
               </a:ext>
             </a:extLst>
           </p:cNvPr>
@@ -9954,7 +8595,7 @@
           <p:cNvPr id="8" name="text">
             <a:extLst xmlns:a="http://schemas.openxmlformats.org/drawingml/2006/main">
               <a:ext uri="{FF2B5EF4-FFF2-40B4-BE49-F238E27FC236}">
-                <a16:creationId xmlns:a16="http://schemas.microsoft.com/office/drawing/2014/main" id="{AFFF0F53-B141-47A4-8034-F9EA2E4C6851}"/>
+                <a16:creationId xmlns:a16="http://schemas.microsoft.com/office/drawing/2014/main" id="{D124BD56-4974-4408-B4B0-9DA9A4CFE61A}"/>
               </a:ext>
             </a:extLst>
           </p:cNvPr>
@@ -10011,7 +8652,7 @@
           <p:cNvPr id="9" name="text">
             <a:extLst xmlns:a="http://schemas.openxmlformats.org/drawingml/2006/main">
               <a:ext uri="{FF2B5EF4-FFF2-40B4-BE49-F238E27FC236}">
-                <a16:creationId xmlns:a16="http://schemas.microsoft.com/office/drawing/2014/main" id="{BC014990-6BAF-405D-A99A-3AABD3868FC3}"/>
+                <a16:creationId xmlns:a16="http://schemas.microsoft.com/office/drawing/2014/main" id="{FBB14074-DDC9-4477-8D3E-670DEA942C07}"/>
               </a:ext>
             </a:extLst>
           </p:cNvPr>
@@ -10066,7 +8707,7 @@
     </p:spTree>
     <p:extLst>
       <p:ext uri="{BB962C8B-B14F-4D97-AF65-F5344CB8AC3E}">
-        <p14:creationId xmlns:p14="http://schemas.microsoft.com/office/powerpoint/2010/main" val="1454545900"/>
+        <p14:creationId xmlns:p14="http://schemas.microsoft.com/office/powerpoint/2010/main" val="1040332931"/>
       </p:ext>
     </p:extLst>
   </p:cSld>
@@ -10097,7 +8738,7 @@
           <p:cNvPr id="9" name="slide-title">
             <a:extLst xmlns:a="http://schemas.openxmlformats.org/drawingml/2006/main">
               <a:ext uri="{FF2B5EF4-FFF2-40B4-BE49-F238E27FC236}">
-                <a16:creationId xmlns:a16="http://schemas.microsoft.com/office/drawing/2014/main" id="{6630B6D4-1EE4-46D5-A537-5215C4B7A4F0}"/>
+                <a16:creationId xmlns:a16="http://schemas.microsoft.com/office/drawing/2014/main" id="{08436B34-8CBD-40DC-ADCC-DA6A1FD0EAF4}"/>
               </a:ext>
             </a:extLst>
           </p:cNvPr>
@@ -10154,7 +8795,7 @@
           <p:cNvPr id="2" name="text">
             <a:extLst xmlns:a="http://schemas.openxmlformats.org/drawingml/2006/main">
               <a:ext uri="{FF2B5EF4-FFF2-40B4-BE49-F238E27FC236}">
-                <a16:creationId xmlns:a16="http://schemas.microsoft.com/office/drawing/2014/main" id="{0DDAFB0F-2E89-4C9B-98F5-2DFC33B9F8E2}"/>
+                <a16:creationId xmlns:a16="http://schemas.microsoft.com/office/drawing/2014/main" id="{64ED6B25-6187-49A7-A103-D2AD52420CD7}"/>
               </a:ext>
             </a:extLst>
           </p:cNvPr>
@@ -10201,7 +8842,7 @@
                 <a:ea typeface="Microsoft JhengHei"/>
                 <a:cs typeface="Microsoft JhengHei"/>
               </a:rPr>
-              <a:t>臺灣房屋總價預測／v22</a:t>
+              <a:t>臺灣房屋總價預測</a:t>
             </a:r>
           </a:p>
         </p:txBody>
@@ -10211,7 +8852,7 @@
           <p:cNvPr id="3" name="text">
             <a:extLst xmlns:a="http://schemas.openxmlformats.org/drawingml/2006/main">
               <a:ext uri="{FF2B5EF4-FFF2-40B4-BE49-F238E27FC236}">
-                <a16:creationId xmlns:a16="http://schemas.microsoft.com/office/drawing/2014/main" id="{949FA81B-D7A2-4D68-810C-84D1E199217B}"/>
+                <a16:creationId xmlns:a16="http://schemas.microsoft.com/office/drawing/2014/main" id="{E0D5D768-B899-4B15-9E95-A2327304C538}"/>
               </a:ext>
             </a:extLst>
           </p:cNvPr>
@@ -10506,7 +9147,7 @@
           <p:cNvPr id="5" name="text">
             <a:extLst xmlns:a="http://schemas.openxmlformats.org/drawingml/2006/main">
               <a:ext uri="{FF2B5EF4-FFF2-40B4-BE49-F238E27FC236}">
-                <a16:creationId xmlns:a16="http://schemas.microsoft.com/office/drawing/2014/main" id="{37FD4114-56B1-470B-B248-09CCEEF57002}"/>
+                <a16:creationId xmlns:a16="http://schemas.microsoft.com/office/drawing/2014/main" id="{8D4C6F28-4B0E-4ED9-8E83-645A7F6EE7AB}"/>
               </a:ext>
             </a:extLst>
           </p:cNvPr>
@@ -10563,7 +9204,7 @@
           <p:cNvPr id="6" name="text">
             <a:extLst xmlns:a="http://schemas.openxmlformats.org/drawingml/2006/main">
               <a:ext uri="{FF2B5EF4-FFF2-40B4-BE49-F238E27FC236}">
-                <a16:creationId xmlns:a16="http://schemas.microsoft.com/office/drawing/2014/main" id="{B383578C-EFBD-4B3F-8205-8F2E0814B53D}"/>
+                <a16:creationId xmlns:a16="http://schemas.microsoft.com/office/drawing/2014/main" id="{1266CD30-CE23-4E1A-AAD0-26DD4CC575C1}"/>
               </a:ext>
             </a:extLst>
           </p:cNvPr>
@@ -10643,7 +9284,7 @@
           <p:cNvPr id="7" name="text">
             <a:extLst xmlns:a="http://schemas.openxmlformats.org/drawingml/2006/main">
               <a:ext uri="{FF2B5EF4-FFF2-40B4-BE49-F238E27FC236}">
-                <a16:creationId xmlns:a16="http://schemas.microsoft.com/office/drawing/2014/main" id="{7706F649-07B0-4CA5-B21A-CC021412AA35}"/>
+                <a16:creationId xmlns:a16="http://schemas.microsoft.com/office/drawing/2014/main" id="{02CE8D3D-FC60-48B1-81DB-BBE84D5C2AA2}"/>
               </a:ext>
             </a:extLst>
           </p:cNvPr>
@@ -10700,7 +9341,7 @@
           <p:cNvPr id="8" name="text">
             <a:extLst xmlns:a="http://schemas.openxmlformats.org/drawingml/2006/main">
               <a:ext uri="{FF2B5EF4-FFF2-40B4-BE49-F238E27FC236}">
-                <a16:creationId xmlns:a16="http://schemas.microsoft.com/office/drawing/2014/main" id="{12D8013D-1955-420C-B278-5876552E03FB}"/>
+                <a16:creationId xmlns:a16="http://schemas.microsoft.com/office/drawing/2014/main" id="{B8C98B27-01F4-4019-95F2-7A32016B4487}"/>
               </a:ext>
             </a:extLst>
           </p:cNvPr>
@@ -10747,7 +9388,7 @@
                 <a:ea typeface="Microsoft JhengHei"/>
                 <a:cs typeface="Microsoft JhengHei"/>
               </a:rPr>
-              <a:t>價格標籤與成交參考來自課程資料，外部地圖僅提供地理資訊</a:t>
+              <a:t>價格標籤來自課程資料，外部地圖僅提供地理資訊</a:t>
             </a:r>
           </a:p>
         </p:txBody>
@@ -10755,7 +9396,7 @@
     </p:spTree>
     <p:extLst>
       <p:ext uri="{BB962C8B-B14F-4D97-AF65-F5344CB8AC3E}">
-        <p14:creationId xmlns:p14="http://schemas.microsoft.com/office/powerpoint/2010/main" val="859836404"/>
+        <p14:creationId xmlns:p14="http://schemas.microsoft.com/office/powerpoint/2010/main" val="764301229"/>
       </p:ext>
     </p:extLst>
   </p:cSld>
@@ -10783,10 +9424,10 @@
       </p:grpSpPr>
       <p:sp>
         <p:nvSpPr>
-          <p:cNvPr id="7" name="slide-title">
+          <p:cNvPr id="8" name="slide-title">
             <a:extLst xmlns:a="http://schemas.openxmlformats.org/drawingml/2006/main">
               <a:ext uri="{FF2B5EF4-FFF2-40B4-BE49-F238E27FC236}">
-                <a16:creationId xmlns:a16="http://schemas.microsoft.com/office/drawing/2014/main" id="{A7EEAC40-5FCA-482A-88C5-4763728EC753}"/>
+                <a16:creationId xmlns:a16="http://schemas.microsoft.com/office/drawing/2014/main" id="{C57D27F3-B6AE-46A7-B3B1-3385EF975D26}"/>
               </a:ext>
             </a:extLst>
           </p:cNvPr>
@@ -10833,7 +9474,7 @@
                 <a:ea typeface="Microsoft JhengHei"/>
                 <a:cs typeface="Microsoft JhengHei"/>
               </a:rPr>
-              <a:t>三條價格分支逐筆取中位數</a:t>
+              <a:t>六個模型組成三條價格分支</a:t>
             </a:r>
           </a:p>
         </p:txBody>
@@ -10843,7 +9484,7 @@
           <p:cNvPr id="2" name="text">
             <a:extLst xmlns:a="http://schemas.openxmlformats.org/drawingml/2006/main">
               <a:ext uri="{FF2B5EF4-FFF2-40B4-BE49-F238E27FC236}">
-                <a16:creationId xmlns:a16="http://schemas.microsoft.com/office/drawing/2014/main" id="{040729A8-19E5-4002-B357-A3E857F795D1}"/>
+                <a16:creationId xmlns:a16="http://schemas.microsoft.com/office/drawing/2014/main" id="{6E662019-C6ED-4334-98BF-8EED954AE20F}"/>
               </a:ext>
             </a:extLst>
           </p:cNvPr>
@@ -10890,7 +9531,7 @@
                 <a:ea typeface="Microsoft JhengHei"/>
                 <a:cs typeface="Microsoft JhengHei"/>
               </a:rPr>
-              <a:t>臺灣房屋總價預測／v22</a:t>
+              <a:t>臺灣房屋總價預測</a:t>
             </a:r>
           </a:p>
         </p:txBody>
@@ -10900,7 +9541,7 @@
           <p:cNvPr id="3" name="text">
             <a:extLst xmlns:a="http://schemas.openxmlformats.org/drawingml/2006/main">
               <a:ext uri="{FF2B5EF4-FFF2-40B4-BE49-F238E27FC236}">
-                <a16:creationId xmlns:a16="http://schemas.microsoft.com/office/drawing/2014/main" id="{1C48C47F-DBE8-4A8E-9F1A-FDAB17501507}"/>
+                <a16:creationId xmlns:a16="http://schemas.microsoft.com/office/drawing/2014/main" id="{567AE44E-F012-409E-BAA9-86C51D2A5F5D}"/>
               </a:ext>
             </a:extLst>
           </p:cNvPr>
@@ -10952,15 +9593,72 @@
           </a:p>
         </p:txBody>
       </p:sp>
+      <p:sp>
+        <p:nvSpPr>
+          <p:cNvPr id="4" name="text">
+            <a:extLst xmlns:a="http://schemas.openxmlformats.org/drawingml/2006/main">
+              <a:ext uri="{FF2B5EF4-FFF2-40B4-BE49-F238E27FC236}">
+                <a16:creationId xmlns:a16="http://schemas.microsoft.com/office/drawing/2014/main" id="{3CDAAF34-D2C1-42B1-A71E-B0F6C2BCA13A}"/>
+              </a:ext>
+            </a:extLst>
+          </p:cNvPr>
+          <p:cNvSpPr>
+            <a:spLocks xmlns:a="http://schemas.openxmlformats.org/drawingml/2006/main" noGrp="1"/>
+          </p:cNvSpPr>
+          <p:nvPr/>
+        </p:nvSpPr>
+        <p:spPr>
+          <a:xfrm xmlns:a="http://schemas.openxmlformats.org/drawingml/2006/main">
+            <a:off x="685800" y="1381125"/>
+            <a:ext cx="10820400" cy="419100"/>
+          </a:xfrm>
+          <a:prstGeom xmlns:a="http://schemas.openxmlformats.org/drawingml/2006/main" prst="rect">
+            <a:avLst/>
+          </a:prstGeom>
+          <a:noFill xmlns:a="http://schemas.openxmlformats.org/drawingml/2006/main"/>
+          <a:ln xmlns:a="http://schemas.openxmlformats.org/drawingml/2006/main" w="0">
+            <a:noFill/>
+          </a:ln>
+        </p:spPr>
+        <p:txBody>
+          <a:bodyPr xmlns:a="http://schemas.openxmlformats.org/drawingml/2006/main" wrap="square" lIns="0" tIns="0" rIns="0" bIns="0" anchor="t">
+            <a:noAutofit/>
+          </a:bodyPr>
+          <a:lstStyle xmlns:a="http://schemas.openxmlformats.org/drawingml/2006/main"/>
+          <a:p xmlns:a="http://schemas.openxmlformats.org/drawingml/2006/main">
+            <a:pPr algn="l">
+              <a:defRPr sz="2175" b="1">
+                <a:solidFill>
+                  <a:srgbClr val="31644F"/>
+                </a:solidFill>
+                <a:latin typeface="Microsoft JhengHei"/>
+                <a:ea typeface="Microsoft JhengHei"/>
+                <a:cs typeface="Microsoft JhengHei"/>
+              </a:defRPr>
+            </a:pPr>
+            <a:r>
+              <a:rPr sz="2175" b="1">
+                <a:solidFill>
+                  <a:srgbClr val="31644F"/>
+                </a:solidFill>
+                <a:latin typeface="Microsoft JhengHei"/>
+                <a:ea typeface="Microsoft JhengHei"/>
+                <a:cs typeface="Microsoft JhengHei"/>
+              </a:rPr>
+              <a:t>單價 × 面積 = 總價，另以不同價格尺度補充預測</a:t>
+            </a:r>
+          </a:p>
+        </p:txBody>
+      </p:sp>
       <p:graphicFrame>
         <p:nvGraphicFramePr>
-          <p:cNvPr id="10" name=""/>
+          <p:cNvPr id="12" name=""/>
           <p:cNvGraphicFramePr/>
           <p:nvPr/>
         </p:nvGraphicFramePr>
         <p:xfrm>
-          <a:off xmlns:a="http://schemas.openxmlformats.org/drawingml/2006/main" x="685800" y="1581150"/>
-          <a:ext xmlns:a="http://schemas.openxmlformats.org/drawingml/2006/main" cx="10820400" cy="3124200"/>
+          <a:off xmlns:a="http://schemas.openxmlformats.org/drawingml/2006/main" x="685800" y="2028825"/>
+          <a:ext xmlns:a="http://schemas.openxmlformats.org/drawingml/2006/main" cx="10820400" cy="2867025"/>
         </p:xfrm>
         <a:graphic xmlns:a="http://schemas.openxmlformats.org/drawingml/2006/main">
           <a:graphicData uri="http://schemas.openxmlformats.org/drawingml/2006/table">
@@ -10968,10 +9666,10 @@
               <a:tblPr/>
               <a:tblGrid>
                 <a:gridCol w="2028825"/>
-                <a:gridCol w="5086350"/>
-                <a:gridCol w="3705225"/>
+                <a:gridCol w="5191125"/>
+                <a:gridCol w="3600450"/>
               </a:tblGrid>
-              <a:tr h="781050">
+              <a:tr h="716756">
                 <a:tc>
                   <a:txBody>
                     <a:bodyPr lIns="152400" tIns="76200" rIns="114300" bIns="76200">
@@ -10980,7 +9678,7 @@
                     <a:lstStyle/>
                     <a:p>
                       <a:r>
-                        <a:rPr sz="1950" b="1">
+                        <a:rPr sz="1875" b="1">
                           <a:solidFill>
                             <a:srgbClr val="FFFFFF"/>
                           </a:solidFill>
@@ -11006,7 +9704,7 @@
                     <a:lstStyle/>
                     <a:p>
                       <a:r>
-                        <a:rPr sz="1950" b="1">
+                        <a:rPr sz="1875" b="1">
                           <a:solidFill>
                             <a:srgbClr val="FFFFFF"/>
                           </a:solidFill>
@@ -11014,7 +9712,7 @@
                           <a:ea typeface="Microsoft JhengHei"/>
                           <a:cs typeface="Microsoft JhengHei"/>
                         </a:rPr>
-                        <a:t>分支內的主要模型</a:t>
+                        <a:t>主要模型</a:t>
                       </a:r>
                     </a:p>
                   </a:txBody>
@@ -11032,7 +9730,7 @@
                     <a:lstStyle/>
                     <a:p>
                       <a:r>
-                        <a:rPr sz="1950" b="1">
+                        <a:rPr sz="1875" b="1">
                           <a:solidFill>
                             <a:srgbClr val="FFFFFF"/>
                           </a:solidFill>
@@ -11040,7 +9738,7 @@
                           <a:ea typeface="Microsoft JhengHei"/>
                           <a:cs typeface="Microsoft JhengHei"/>
                         </a:rPr>
-                        <a:t>預測方式</a:t>
+                        <a:t>學習的價格表示</a:t>
                       </a:r>
                     </a:p>
                   </a:txBody>
@@ -11051,7 +9749,7 @@
                   </a:tcPr>
                 </a:tc>
               </a:tr>
-              <a:tr h="781050">
+              <a:tr h="716756">
                 <a:tc>
                   <a:txBody>
                     <a:bodyPr lIns="152400" tIns="76200" rIns="114300" bIns="76200">
@@ -11060,7 +9758,7 @@
                     <a:lstStyle/>
                     <a:p>
                       <a:r>
-                        <a:rPr sz="1950" b="0">
+                        <a:rPr sz="1875" b="0">
                           <a:solidFill>
                             <a:srgbClr val="34483F"/>
                           </a:solidFill>
@@ -11086,7 +9784,7 @@
                     <a:lstStyle/>
                     <a:p>
                       <a:r>
-                        <a:rPr sz="1950" b="0">
+                        <a:rPr sz="1875" b="0">
                           <a:solidFill>
                             <a:srgbClr val="34483F"/>
                           </a:solidFill>
@@ -11094,7 +9792,7 @@
                           <a:ea typeface="Microsoft JhengHei"/>
                           <a:cs typeface="Microsoft JhengHei"/>
                         </a:rPr>
-                        <a:t>CatBoost + LightGBM</a:t>
+                        <a:t>單價 CatBoost + LightGBM</a:t>
                       </a:r>
                     </a:p>
                   </a:txBody>
@@ -11112,7 +9810,7 @@
                     <a:lstStyle/>
                     <a:p>
                       <a:r>
-                        <a:rPr sz="1950" b="0">
+                        <a:rPr sz="1875" b="0">
                           <a:solidFill>
                             <a:srgbClr val="34483F"/>
                           </a:solidFill>
@@ -11131,7 +9829,7 @@
                   </a:tcPr>
                 </a:tc>
               </a:tr>
-              <a:tr h="781050">
+              <a:tr h="716756">
                 <a:tc>
                   <a:txBody>
                     <a:bodyPr lIns="152400" tIns="76200" rIns="114300" bIns="76200">
@@ -11140,7 +9838,7 @@
                     <a:lstStyle/>
                     <a:p>
                       <a:r>
-                        <a:rPr sz="1950" b="0">
+                        <a:rPr sz="1875" b="0">
                           <a:solidFill>
                             <a:srgbClr val="34483F"/>
                           </a:solidFill>
@@ -11166,7 +9864,7 @@
                     <a:lstStyle/>
                     <a:p>
                       <a:r>
-                        <a:rPr sz="1950" b="0">
+                        <a:rPr sz="1875" b="0">
                           <a:solidFill>
                             <a:srgbClr val="34483F"/>
                           </a:solidFill>
@@ -11174,7 +9872,7 @@
                           <a:ea typeface="Microsoft JhengHei"/>
                           <a:cs typeface="Microsoft JhengHei"/>
                         </a:rPr>
-                        <a:t>總價與 log CatBoost + LightGBM</a:t>
+                        <a:t>總價及 log CatBoost + LightGBM</a:t>
                       </a:r>
                     </a:p>
                   </a:txBody>
@@ -11192,7 +9890,7 @@
                     <a:lstStyle/>
                     <a:p>
                       <a:r>
-                        <a:rPr sz="1950" b="0">
+                        <a:rPr sz="1875" b="0">
                           <a:solidFill>
                             <a:srgbClr val="34483F"/>
                           </a:solidFill>
@@ -11200,7 +9898,7 @@
                           <a:ea typeface="Microsoft JhengHei"/>
                           <a:cs typeface="Microsoft JhengHei"/>
                         </a:rPr>
-                        <a:t>以不同價格尺度學習</a:t>
+                        <a:t>直接總價與對數總價</a:t>
                       </a:r>
                     </a:p>
                   </a:txBody>
@@ -11211,7 +9909,7 @@
                   </a:tcPr>
                 </a:tc>
               </a:tr>
-              <a:tr h="781050">
+              <a:tr h="716756">
                 <a:tc>
                   <a:txBody>
                     <a:bodyPr lIns="152400" tIns="76200" rIns="114300" bIns="76200">
@@ -11220,7 +9918,7 @@
                     <a:lstStyle/>
                     <a:p>
                       <a:r>
-                        <a:rPr sz="1950" b="0">
+                        <a:rPr sz="1875" b="0">
                           <a:solidFill>
                             <a:srgbClr val="34483F"/>
                           </a:solidFill>
@@ -11246,7 +9944,7 @@
                     <a:lstStyle/>
                     <a:p>
                       <a:r>
-                        <a:rPr sz="1950" b="0">
+                        <a:rPr sz="1875" b="0">
                           <a:solidFill>
                             <a:srgbClr val="34483F"/>
                           </a:solidFill>
@@ -11272,7 +9970,7 @@
                     <a:lstStyle/>
                     <a:p>
                       <a:r>
-                        <a:rPr sz="1950" b="0">
+                        <a:rPr sz="1875" b="0">
                           <a:solidFill>
                             <a:srgbClr val="34483F"/>
                           </a:solidFill>
@@ -11280,7 +9978,7 @@
                           <a:ea typeface="Microsoft JhengHei"/>
                           <a:cs typeface="Microsoft JhengHei"/>
                         </a:rPr>
-                        <a:t>面積連結與參考價倍率</a:t>
+                        <a:t>面積連結與先驗倍率</a:t>
                       </a:r>
                     </a:p>
                   </a:txBody>
@@ -11297,10 +9995,10 @@
       </p:graphicFrame>
       <p:sp>
         <p:nvSpPr>
-          <p:cNvPr id="5" name="text">
+          <p:cNvPr id="6" name="text">
             <a:extLst xmlns:a="http://schemas.openxmlformats.org/drawingml/2006/main">
               <a:ext uri="{FF2B5EF4-FFF2-40B4-BE49-F238E27FC236}">
-                <a16:creationId xmlns:a16="http://schemas.microsoft.com/office/drawing/2014/main" id="{0F516E31-ADD0-40D0-9127-A096C5F3FCAE}"/>
+                <a16:creationId xmlns:a16="http://schemas.microsoft.com/office/drawing/2014/main" id="{7F9E8801-0C63-4DD6-AFC7-852396A33A60}"/>
               </a:ext>
             </a:extLst>
           </p:cNvPr>
@@ -11311,8 +10009,8 @@
         </p:nvSpPr>
         <p:spPr>
           <a:xfrm xmlns:a="http://schemas.openxmlformats.org/drawingml/2006/main">
-            <a:off x="685800" y="4981575"/>
-            <a:ext cx="10820400" cy="428625"/>
+            <a:off x="685800" y="5257800"/>
+            <a:ext cx="10820400" cy="419100"/>
           </a:xfrm>
           <a:prstGeom xmlns:a="http://schemas.openxmlformats.org/drawingml/2006/main" prst="rect">
             <a:avLst/>
@@ -11347,17 +10045,17 @@
                 <a:ea typeface="Microsoft JhengHei"/>
                 <a:cs typeface="Microsoft JhengHei"/>
               </a:rPr>
-              <a:t>各分支先換回「元」，再做成交參考與空間修正</a:t>
-            </a:r>
-          </a:p>
-        </p:txBody>
-      </p:sp>
-      <p:sp>
-        <p:nvSpPr>
-          <p:cNvPr id="6" name="text">
+              <a:t>各分支還原成「元」，再做成交參考與空間修正</a:t>
+            </a:r>
+          </a:p>
+        </p:txBody>
+      </p:sp>
+      <p:sp>
+        <p:nvSpPr>
+          <p:cNvPr id="7" name="text">
             <a:extLst xmlns:a="http://schemas.openxmlformats.org/drawingml/2006/main">
               <a:ext uri="{FF2B5EF4-FFF2-40B4-BE49-F238E27FC236}">
-                <a16:creationId xmlns:a16="http://schemas.microsoft.com/office/drawing/2014/main" id="{FE3C0FE0-0768-4CFD-A791-9E3B2954976A}"/>
+                <a16:creationId xmlns:a16="http://schemas.microsoft.com/office/drawing/2014/main" id="{52AEA1B1-6C54-44AE-B5ED-D994D52A6961}"/>
               </a:ext>
             </a:extLst>
           </p:cNvPr>
@@ -11368,8 +10066,8 @@
         </p:nvSpPr>
         <p:spPr>
           <a:xfrm xmlns:a="http://schemas.openxmlformats.org/drawingml/2006/main">
-            <a:off x="685800" y="5619750"/>
-            <a:ext cx="10820400" cy="457200"/>
+            <a:off x="685800" y="5895975"/>
+            <a:ext cx="10820400" cy="333375"/>
           </a:xfrm>
           <a:prstGeom xmlns:a="http://schemas.openxmlformats.org/drawingml/2006/main" prst="rect">
             <a:avLst/>
@@ -11386,25 +10084,25 @@
           <a:lstStyle xmlns:a="http://schemas.openxmlformats.org/drawingml/2006/main"/>
           <a:p xmlns:a="http://schemas.openxmlformats.org/drawingml/2006/main">
             <a:pPr algn="l">
-              <a:defRPr sz="2400" b="1">
-                <a:solidFill>
-                  <a:srgbClr val="31644F"/>
-                </a:solidFill>
-                <a:latin typeface="Microsoft JhengHei"/>
-                <a:ea typeface="Microsoft JhengHei"/>
-                <a:cs typeface="Microsoft JhengHei"/>
-              </a:defRPr>
-            </a:pPr>
-            <a:r>
-              <a:rPr sz="2400" b="1">
-                <a:solidFill>
-                  <a:srgbClr val="31644F"/>
-                </a:solidFill>
-                <a:latin typeface="Microsoft JhengHei"/>
-                <a:ea typeface="Microsoft JhengHei"/>
-                <a:cs typeface="Microsoft JhengHei"/>
-              </a:rPr>
-              <a:t>最終總價 = median(NN 分支, log 分支, 單價分支)</a:t>
+              <a:defRPr sz="1800" b="0">
+                <a:solidFill>
+                  <a:srgbClr val="69776D"/>
+                </a:solidFill>
+                <a:latin typeface="Microsoft JhengHei"/>
+                <a:ea typeface="Microsoft JhengHei"/>
+                <a:cs typeface="Microsoft JhengHei"/>
+              </a:defRPr>
+            </a:pPr>
+            <a:r>
+              <a:rPr sz="1800" b="0">
+                <a:solidFill>
+                  <a:srgbClr val="69776D"/>
+                </a:solidFill>
+                <a:latin typeface="Microsoft JhengHei"/>
+                <a:ea typeface="Microsoft JhengHei"/>
+                <a:cs typeface="Microsoft JhengHei"/>
+              </a:rPr>
+              <a:t>3 個 CatBoost ＋ 1 個 LightGBM ＋ 2 個 NN，LightGBM 由三分支共用</a:t>
             </a:r>
           </a:p>
         </p:txBody>
@@ -11412,7 +10110,7 @@
     </p:spTree>
     <p:extLst>
       <p:ext uri="{BB962C8B-B14F-4D97-AF65-F5344CB8AC3E}">
-        <p14:creationId xmlns:p14="http://schemas.microsoft.com/office/powerpoint/2010/main" val="1721229829"/>
+        <p14:creationId xmlns:p14="http://schemas.microsoft.com/office/powerpoint/2010/main" val="452734226"/>
       </p:ext>
     </p:extLst>
   </p:cSld>
@@ -11443,7 +10141,7 @@
           <p:cNvPr id="11" name="slide-title">
             <a:extLst xmlns:a="http://schemas.openxmlformats.org/drawingml/2006/main">
               <a:ext uri="{FF2B5EF4-FFF2-40B4-BE49-F238E27FC236}">
-                <a16:creationId xmlns:a16="http://schemas.microsoft.com/office/drawing/2014/main" id="{3FAEF496-0AC1-4551-A994-398BE856AF6E}"/>
+                <a16:creationId xmlns:a16="http://schemas.microsoft.com/office/drawing/2014/main" id="{D863F8ED-A199-4500-B22A-E88400BBFFC1}"/>
               </a:ext>
             </a:extLst>
           </p:cNvPr>
@@ -11490,7 +10188,7 @@
                 <a:ea typeface="Microsoft JhengHei"/>
                 <a:cs typeface="Microsoft JhengHei"/>
               </a:rPr>
-              <a:t>近期成交的訓練權重較高</a:t>
+              <a:t>單價 CatBoost 提高近期成交權重</a:t>
             </a:r>
           </a:p>
         </p:txBody>
@@ -11500,7 +10198,7 @@
           <p:cNvPr id="2" name="text">
             <a:extLst xmlns:a="http://schemas.openxmlformats.org/drawingml/2006/main">
               <a:ext uri="{FF2B5EF4-FFF2-40B4-BE49-F238E27FC236}">
-                <a16:creationId xmlns:a16="http://schemas.microsoft.com/office/drawing/2014/main" id="{B8D34BFC-9DFD-4E89-895A-66F43DF9DB5A}"/>
+                <a16:creationId xmlns:a16="http://schemas.microsoft.com/office/drawing/2014/main" id="{C10E0569-A80E-4068-AAA5-3A7C8DCE6CE0}"/>
               </a:ext>
             </a:extLst>
           </p:cNvPr>
@@ -11547,7 +10245,7 @@
                 <a:ea typeface="Microsoft JhengHei"/>
                 <a:cs typeface="Microsoft JhengHei"/>
               </a:rPr>
-              <a:t>臺灣房屋總價預測／v22</a:t>
+              <a:t>臺灣房屋總價預測</a:t>
             </a:r>
           </a:p>
         </p:txBody>
@@ -11557,7 +10255,7 @@
           <p:cNvPr id="3" name="text">
             <a:extLst xmlns:a="http://schemas.openxmlformats.org/drawingml/2006/main">
               <a:ext uri="{FF2B5EF4-FFF2-40B4-BE49-F238E27FC236}">
-                <a16:creationId xmlns:a16="http://schemas.microsoft.com/office/drawing/2014/main" id="{33E1F25E-E1D2-44C7-8CEA-5BFB4EA0502E}"/>
+                <a16:creationId xmlns:a16="http://schemas.microsoft.com/office/drawing/2014/main" id="{A774222B-D345-45D0-BCB4-2F0F3280524C}"/>
               </a:ext>
             </a:extLst>
           </p:cNvPr>
@@ -11614,7 +10312,7 @@
           <p:cNvPr id="4" name="text">
             <a:extLst xmlns:a="http://schemas.openxmlformats.org/drawingml/2006/main">
               <a:ext uri="{FF2B5EF4-FFF2-40B4-BE49-F238E27FC236}">
-                <a16:creationId xmlns:a16="http://schemas.microsoft.com/office/drawing/2014/main" id="{98F002A4-E605-40BB-BE6A-B6C6729EEC21}"/>
+                <a16:creationId xmlns:a16="http://schemas.microsoft.com/office/drawing/2014/main" id="{39492D99-7412-4A0C-92AE-5312C5076F18}"/>
               </a:ext>
             </a:extLst>
           </p:cNvPr>
@@ -11678,7 +10376,7 @@
         </p:xfrm>
         <a:graphic xmlns:a="http://schemas.openxmlformats.org/drawingml/2006/main">
           <a:graphicData uri="http://schemas.openxmlformats.org/drawingml/2006/chart">
-            <c:chart xmlns:r="http://schemas.openxmlformats.org/officeDocument/2006/relationships" xmlns:c="http://schemas.openxmlformats.org/drawingml/2006/chart" r:id="Rc98fa3156d1e4d88"/>
+            <c:chart xmlns:r="http://schemas.openxmlformats.org/officeDocument/2006/relationships" xmlns:c="http://schemas.openxmlformats.org/drawingml/2006/chart" r:id="R985880dd40d3457c"/>
           </a:graphicData>
         </a:graphic>
       </p:graphicFrame>
@@ -11687,7 +10385,7 @@
           <p:cNvPr id="6" name="text">
             <a:extLst xmlns:a="http://schemas.openxmlformats.org/drawingml/2006/main">
               <a:ext uri="{FF2B5EF4-FFF2-40B4-BE49-F238E27FC236}">
-                <a16:creationId xmlns:a16="http://schemas.microsoft.com/office/drawing/2014/main" id="{DE0A4191-83C0-4047-B333-BE7D6CF0A01E}"/>
+                <a16:creationId xmlns:a16="http://schemas.microsoft.com/office/drawing/2014/main" id="{74D049A2-1722-4B3B-B6D1-F85DABF6E53F}"/>
               </a:ext>
             </a:extLst>
           </p:cNvPr>
@@ -11744,7 +10442,7 @@
           <p:cNvPr id="7" name="text">
             <a:extLst xmlns:a="http://schemas.openxmlformats.org/drawingml/2006/main">
               <a:ext uri="{FF2B5EF4-FFF2-40B4-BE49-F238E27FC236}">
-                <a16:creationId xmlns:a16="http://schemas.microsoft.com/office/drawing/2014/main" id="{37F7AAEF-C99B-4C68-B60B-CAFBF747B1D4}"/>
+                <a16:creationId xmlns:a16="http://schemas.microsoft.com/office/drawing/2014/main" id="{04884381-55A3-4F83-A87B-575A651613A7}"/>
               </a:ext>
             </a:extLst>
           </p:cNvPr>
@@ -11801,7 +10499,7 @@
           <p:cNvPr id="8" name="text">
             <a:extLst xmlns:a="http://schemas.openxmlformats.org/drawingml/2006/main">
               <a:ext uri="{FF2B5EF4-FFF2-40B4-BE49-F238E27FC236}">
-                <a16:creationId xmlns:a16="http://schemas.microsoft.com/office/drawing/2014/main" id="{CDAAE8E1-47FA-42AC-B7B1-DB093980DA77}"/>
+                <a16:creationId xmlns:a16="http://schemas.microsoft.com/office/drawing/2014/main" id="{17341B62-64D2-449A-9633-F322C0DC9FC4}"/>
               </a:ext>
             </a:extLst>
           </p:cNvPr>
@@ -11858,7 +10556,7 @@
           <p:cNvPr id="9" name="text">
             <a:extLst xmlns:a="http://schemas.openxmlformats.org/drawingml/2006/main">
               <a:ext uri="{FF2B5EF4-FFF2-40B4-BE49-F238E27FC236}">
-                <a16:creationId xmlns:a16="http://schemas.microsoft.com/office/drawing/2014/main" id="{EB778F77-A69E-441D-8087-D358097226EB}"/>
+                <a16:creationId xmlns:a16="http://schemas.microsoft.com/office/drawing/2014/main" id="{93B35509-184E-42DB-8A9F-F01BE09AB23A}"/>
               </a:ext>
             </a:extLst>
           </p:cNvPr>
@@ -11905,7 +10603,7 @@
                 <a:ea typeface="Microsoft JhengHei"/>
                 <a:cs typeface="Microsoft JhengHei"/>
               </a:rPr>
-              <a:t>單價學習仍對齊</a:t>
+              <a:t>面積對齊總價誤差</a:t>
             </a:r>
           </a:p>
           <a:p xmlns:a="http://schemas.openxmlformats.org/drawingml/2006/main">
@@ -11928,7 +10626,7 @@
                 <a:ea typeface="Microsoft JhengHei"/>
                 <a:cs typeface="Microsoft JhengHei"/>
               </a:rPr>
-              <a:t>近期成交的總價誤差</a:t>
+              <a:t>日期提高近期影響</a:t>
             </a:r>
           </a:p>
         </p:txBody>
@@ -11938,7 +10636,7 @@
           <p:cNvPr id="10" name="text">
             <a:extLst xmlns:a="http://schemas.openxmlformats.org/drawingml/2006/main">
               <a:ext uri="{FF2B5EF4-FFF2-40B4-BE49-F238E27FC236}">
-                <a16:creationId xmlns:a16="http://schemas.microsoft.com/office/drawing/2014/main" id="{8AB99394-3271-454E-B2C6-727D81F22D95}"/>
+                <a16:creationId xmlns:a16="http://schemas.microsoft.com/office/drawing/2014/main" id="{C0BD378B-74F8-4EB5-8D16-E9B0D9A357D4}"/>
               </a:ext>
             </a:extLst>
           </p:cNvPr>
@@ -11993,7 +10691,7 @@
     </p:spTree>
     <p:extLst>
       <p:ext uri="{BB962C8B-B14F-4D97-AF65-F5344CB8AC3E}">
-        <p14:creationId xmlns:p14="http://schemas.microsoft.com/office/powerpoint/2010/main" val="327308684"/>
+        <p14:creationId xmlns:p14="http://schemas.microsoft.com/office/powerpoint/2010/main" val="809074958"/>
       </p:ext>
     </p:extLst>
   </p:cSld>
@@ -12021,10 +10719,10 @@
       </p:grpSpPr>
       <p:sp>
         <p:nvSpPr>
-          <p:cNvPr id="7" name="slide-title">
+          <p:cNvPr id="10" name="slide-title">
             <a:extLst xmlns:a="http://schemas.openxmlformats.org/drawingml/2006/main">
               <a:ext uri="{FF2B5EF4-FFF2-40B4-BE49-F238E27FC236}">
-                <a16:creationId xmlns:a16="http://schemas.microsoft.com/office/drawing/2014/main" id="{4236BFD6-8A46-46E1-8A3E-6A3EA12947CD}"/>
+                <a16:creationId xmlns:a16="http://schemas.microsoft.com/office/drawing/2014/main" id="{092AF0FB-04A3-498F-B576-C5488D9AAF99}"/>
               </a:ext>
             </a:extLst>
           </p:cNvPr>
@@ -12071,7 +10769,7 @@
                 <a:ea typeface="Microsoft JhengHei"/>
                 <a:cs typeface="Microsoft JhengHei"/>
               </a:rPr>
-              <a:t>每一期用過去資料預測下一年</a:t>
+              <a:t>三條總價預測逐筆取中位數</a:t>
             </a:r>
           </a:p>
         </p:txBody>
@@ -12081,7 +10779,7 @@
           <p:cNvPr id="2" name="text">
             <a:extLst xmlns:a="http://schemas.openxmlformats.org/drawingml/2006/main">
               <a:ext uri="{FF2B5EF4-FFF2-40B4-BE49-F238E27FC236}">
-                <a16:creationId xmlns:a16="http://schemas.microsoft.com/office/drawing/2014/main" id="{DBA0759D-EE2B-475F-8B59-32B1D2E50B05}"/>
+                <a16:creationId xmlns:a16="http://schemas.microsoft.com/office/drawing/2014/main" id="{2B0FBC39-1DEE-4BA3-9E45-D10721E375F6}"/>
               </a:ext>
             </a:extLst>
           </p:cNvPr>
@@ -12128,7 +10826,7 @@
                 <a:ea typeface="Microsoft JhengHei"/>
                 <a:cs typeface="Microsoft JhengHei"/>
               </a:rPr>
-              <a:t>臺灣房屋總價預測／v22</a:t>
+              <a:t>臺灣房屋總價預測</a:t>
             </a:r>
           </a:p>
         </p:txBody>
@@ -12138,7 +10836,7 @@
           <p:cNvPr id="3" name="text">
             <a:extLst xmlns:a="http://schemas.openxmlformats.org/drawingml/2006/main">
               <a:ext uri="{FF2B5EF4-FFF2-40B4-BE49-F238E27FC236}">
-                <a16:creationId xmlns:a16="http://schemas.microsoft.com/office/drawing/2014/main" id="{B02228BD-A471-4836-81D2-A323D8BE7D9F}"/>
+                <a16:creationId xmlns:a16="http://schemas.microsoft.com/office/drawing/2014/main" id="{4913349A-9619-457F-BD21-7B5DE00E0CDA}"/>
               </a:ext>
             </a:extLst>
           </p:cNvPr>
@@ -12186,6 +10884,530 @@
                 <a:cs typeface="Microsoft JhengHei"/>
               </a:rPr>
               <a:t>07</a:t>
+            </a:r>
+          </a:p>
+        </p:txBody>
+      </p:sp>
+      <p:sp>
+        <p:nvSpPr>
+          <p:cNvPr id="4" name="text">
+            <a:extLst xmlns:a="http://schemas.openxmlformats.org/drawingml/2006/main">
+              <a:ext uri="{FF2B5EF4-FFF2-40B4-BE49-F238E27FC236}">
+                <a16:creationId xmlns:a16="http://schemas.microsoft.com/office/drawing/2014/main" id="{D78EFB19-4B7F-4A5D-B497-9564034D1E93}"/>
+              </a:ext>
+            </a:extLst>
+          </p:cNvPr>
+          <p:cNvSpPr>
+            <a:spLocks xmlns:a="http://schemas.openxmlformats.org/drawingml/2006/main" noGrp="1"/>
+          </p:cNvSpPr>
+          <p:nvPr/>
+        </p:nvSpPr>
+        <p:spPr>
+          <a:xfrm xmlns:a="http://schemas.openxmlformats.org/drawingml/2006/main">
+            <a:off x="685800" y="1409700"/>
+            <a:ext cx="10820400" cy="409575"/>
+          </a:xfrm>
+          <a:prstGeom xmlns:a="http://schemas.openxmlformats.org/drawingml/2006/main" prst="rect">
+            <a:avLst/>
+          </a:prstGeom>
+          <a:noFill xmlns:a="http://schemas.openxmlformats.org/drawingml/2006/main"/>
+          <a:ln xmlns:a="http://schemas.openxmlformats.org/drawingml/2006/main" w="0">
+            <a:noFill/>
+          </a:ln>
+        </p:spPr>
+        <p:txBody>
+          <a:bodyPr xmlns:a="http://schemas.openxmlformats.org/drawingml/2006/main" wrap="square" lIns="0" tIns="0" rIns="0" bIns="0" anchor="t">
+            <a:noAutofit/>
+          </a:bodyPr>
+          <a:lstStyle xmlns:a="http://schemas.openxmlformats.org/drawingml/2006/main"/>
+          <a:p xmlns:a="http://schemas.openxmlformats.org/drawingml/2006/main">
+            <a:pPr algn="l">
+              <a:defRPr sz="1875" b="0">
+                <a:solidFill>
+                  <a:srgbClr val="69776D"/>
+                </a:solidFill>
+                <a:latin typeface="Microsoft JhengHei"/>
+                <a:ea typeface="Microsoft JhengHei"/>
+                <a:cs typeface="Microsoft JhengHei"/>
+              </a:defRPr>
+            </a:pPr>
+            <a:r>
+              <a:rPr sz="1875" b="0">
+                <a:solidFill>
+                  <a:srgbClr val="69776D"/>
+                </a:solidFill>
+                <a:latin typeface="Microsoft JhengHei"/>
+                <a:ea typeface="Microsoft JhengHei"/>
+                <a:cs typeface="Microsoft JhengHei"/>
+              </a:rPr>
+              <a:t>假設例子：各分支修正後的總價，單位為萬元</a:t>
+            </a:r>
+          </a:p>
+        </p:txBody>
+      </p:sp>
+      <p:graphicFrame>
+        <p:nvGraphicFramePr>
+          <p:cNvPr id="14" name="Chart"/>
+          <p:cNvGraphicFramePr/>
+          <p:nvPr/>
+        </p:nvGraphicFramePr>
+        <p:xfrm>
+          <a:off xmlns:a="http://schemas.openxmlformats.org/drawingml/2006/main" x="685800" y="2114550"/>
+          <a:ext xmlns:a="http://schemas.openxmlformats.org/drawingml/2006/main" cx="7219950" cy="3228975"/>
+        </p:xfrm>
+        <a:graphic xmlns:a="http://schemas.openxmlformats.org/drawingml/2006/main">
+          <a:graphicData uri="http://schemas.openxmlformats.org/drawingml/2006/chart">
+            <c:chart xmlns:r="http://schemas.openxmlformats.org/officeDocument/2006/relationships" xmlns:c="http://schemas.openxmlformats.org/drawingml/2006/chart" r:id="R0cdda02f3d594abb"/>
+          </a:graphicData>
+        </a:graphic>
+      </p:graphicFrame>
+      <p:sp>
+        <p:nvSpPr>
+          <p:cNvPr id="6" name="text">
+            <a:extLst xmlns:a="http://schemas.openxmlformats.org/drawingml/2006/main">
+              <a:ext uri="{FF2B5EF4-FFF2-40B4-BE49-F238E27FC236}">
+                <a16:creationId xmlns:a16="http://schemas.microsoft.com/office/drawing/2014/main" id="{BC28D941-6A04-46BD-B3A0-7A5F1C933A32}"/>
+              </a:ext>
+            </a:extLst>
+          </p:cNvPr>
+          <p:cNvSpPr>
+            <a:spLocks xmlns:a="http://schemas.openxmlformats.org/drawingml/2006/main" noGrp="1"/>
+          </p:cNvSpPr>
+          <p:nvPr/>
+        </p:nvSpPr>
+        <p:spPr>
+          <a:xfrm xmlns:a="http://schemas.openxmlformats.org/drawingml/2006/main">
+            <a:off x="8543925" y="2457450"/>
+            <a:ext cx="3009900" cy="971550"/>
+          </a:xfrm>
+          <a:prstGeom xmlns:a="http://schemas.openxmlformats.org/drawingml/2006/main" prst="rect">
+            <a:avLst/>
+          </a:prstGeom>
+          <a:noFill xmlns:a="http://schemas.openxmlformats.org/drawingml/2006/main"/>
+          <a:ln xmlns:a="http://schemas.openxmlformats.org/drawingml/2006/main" w="0">
+            <a:noFill/>
+          </a:ln>
+        </p:spPr>
+        <p:txBody>
+          <a:bodyPr xmlns:a="http://schemas.openxmlformats.org/drawingml/2006/main" wrap="square" lIns="0" tIns="0" rIns="0" bIns="0" anchor="t">
+            <a:noAutofit/>
+          </a:bodyPr>
+          <a:lstStyle xmlns:a="http://schemas.openxmlformats.org/drawingml/2006/main"/>
+          <a:p xmlns:a="http://schemas.openxmlformats.org/drawingml/2006/main">
+            <a:pPr algn="l">
+              <a:defRPr sz="4425" b="1">
+                <a:solidFill>
+                  <a:srgbClr val="31644F"/>
+                </a:solidFill>
+                <a:latin typeface="Microsoft JhengHei"/>
+                <a:ea typeface="Microsoft JhengHei"/>
+                <a:cs typeface="Microsoft JhengHei"/>
+              </a:defRPr>
+            </a:pPr>
+            <a:r>
+              <a:rPr sz="4425" b="1">
+                <a:solidFill>
+                  <a:srgbClr val="31644F"/>
+                </a:solidFill>
+                <a:latin typeface="Microsoft JhengHei"/>
+                <a:ea typeface="Microsoft JhengHei"/>
+                <a:cs typeface="Microsoft JhengHei"/>
+              </a:rPr>
+              <a:t>1,320 萬</a:t>
+            </a:r>
+          </a:p>
+        </p:txBody>
+      </p:sp>
+      <p:sp>
+        <p:nvSpPr>
+          <p:cNvPr id="7" name="text">
+            <a:extLst xmlns:a="http://schemas.openxmlformats.org/drawingml/2006/main">
+              <a:ext uri="{FF2B5EF4-FFF2-40B4-BE49-F238E27FC236}">
+                <a16:creationId xmlns:a16="http://schemas.microsoft.com/office/drawing/2014/main" id="{3C565D3B-4F0A-479C-91CF-6BE104630F95}"/>
+              </a:ext>
+            </a:extLst>
+          </p:cNvPr>
+          <p:cNvSpPr>
+            <a:spLocks xmlns:a="http://schemas.openxmlformats.org/drawingml/2006/main" noGrp="1"/>
+          </p:cNvSpPr>
+          <p:nvPr/>
+        </p:nvSpPr>
+        <p:spPr>
+          <a:xfrm xmlns:a="http://schemas.openxmlformats.org/drawingml/2006/main">
+            <a:off x="8486775" y="3724275"/>
+            <a:ext cx="3067050" cy="438150"/>
+          </a:xfrm>
+          <a:prstGeom xmlns:a="http://schemas.openxmlformats.org/drawingml/2006/main" prst="rect">
+            <a:avLst/>
+          </a:prstGeom>
+          <a:noFill xmlns:a="http://schemas.openxmlformats.org/drawingml/2006/main"/>
+          <a:ln xmlns:a="http://schemas.openxmlformats.org/drawingml/2006/main" w="0">
+            <a:noFill/>
+          </a:ln>
+        </p:spPr>
+        <p:txBody>
+          <a:bodyPr xmlns:a="http://schemas.openxmlformats.org/drawingml/2006/main" wrap="square" lIns="0" tIns="0" rIns="0" bIns="0" anchor="t">
+            <a:noAutofit/>
+          </a:bodyPr>
+          <a:lstStyle xmlns:a="http://schemas.openxmlformats.org/drawingml/2006/main"/>
+          <a:p xmlns:a="http://schemas.openxmlformats.org/drawingml/2006/main">
+            <a:pPr algn="l">
+              <a:defRPr sz="2100" b="0">
+                <a:solidFill>
+                  <a:srgbClr val="34483F"/>
+                </a:solidFill>
+                <a:latin typeface="Microsoft JhengHei"/>
+                <a:ea typeface="Microsoft JhengHei"/>
+                <a:cs typeface="Microsoft JhengHei"/>
+              </a:defRPr>
+            </a:pPr>
+            <a:r>
+              <a:rPr sz="2100" b="0">
+                <a:solidFill>
+                  <a:srgbClr val="34483F"/>
+                </a:solidFill>
+                <a:latin typeface="Microsoft JhengHei"/>
+                <a:ea typeface="Microsoft JhengHei"/>
+                <a:cs typeface="Microsoft JhengHei"/>
+              </a:rPr>
+              <a:t>這筆的最終預測</a:t>
+            </a:r>
+          </a:p>
+        </p:txBody>
+      </p:sp>
+      <p:sp>
+        <p:nvSpPr>
+          <p:cNvPr id="8" name="text">
+            <a:extLst xmlns:a="http://schemas.openxmlformats.org/drawingml/2006/main">
+              <a:ext uri="{FF2B5EF4-FFF2-40B4-BE49-F238E27FC236}">
+                <a16:creationId xmlns:a16="http://schemas.microsoft.com/office/drawing/2014/main" id="{29EBC93B-F428-4959-B831-7982C01F0519}"/>
+              </a:ext>
+            </a:extLst>
+          </p:cNvPr>
+          <p:cNvSpPr>
+            <a:spLocks xmlns:a="http://schemas.openxmlformats.org/drawingml/2006/main" noGrp="1"/>
+          </p:cNvSpPr>
+          <p:nvPr/>
+        </p:nvSpPr>
+        <p:spPr>
+          <a:xfrm xmlns:a="http://schemas.openxmlformats.org/drawingml/2006/main">
+            <a:off x="8486775" y="4495800"/>
+            <a:ext cx="3067050" cy="838200"/>
+          </a:xfrm>
+          <a:prstGeom xmlns:a="http://schemas.openxmlformats.org/drawingml/2006/main" prst="rect">
+            <a:avLst/>
+          </a:prstGeom>
+          <a:noFill xmlns:a="http://schemas.openxmlformats.org/drawingml/2006/main"/>
+          <a:ln xmlns:a="http://schemas.openxmlformats.org/drawingml/2006/main" w="0">
+            <a:noFill/>
+          </a:ln>
+        </p:spPr>
+        <p:txBody>
+          <a:bodyPr xmlns:a="http://schemas.openxmlformats.org/drawingml/2006/main" wrap="square" lIns="0" tIns="0" rIns="0" bIns="0" anchor="t">
+            <a:noAutofit/>
+          </a:bodyPr>
+          <a:lstStyle xmlns:a="http://schemas.openxmlformats.org/drawingml/2006/main"/>
+          <a:p xmlns:a="http://schemas.openxmlformats.org/drawingml/2006/main">
+            <a:pPr algn="l">
+              <a:defRPr sz="2025" b="0">
+                <a:solidFill>
+                  <a:srgbClr val="34483F"/>
+                </a:solidFill>
+                <a:latin typeface="Microsoft JhengHei"/>
+                <a:ea typeface="Microsoft JhengHei"/>
+                <a:cs typeface="Microsoft JhengHei"/>
+              </a:defRPr>
+            </a:pPr>
+            <a:r>
+              <a:rPr sz="2025" b="0">
+                <a:solidFill>
+                  <a:srgbClr val="34483F"/>
+                </a:solidFill>
+                <a:latin typeface="Microsoft JhengHei"/>
+                <a:ea typeface="Microsoft JhengHei"/>
+                <a:cs typeface="Microsoft JhengHei"/>
+              </a:rPr>
+              <a:t>取三個數字</a:t>
+            </a:r>
+          </a:p>
+          <a:p xmlns:a="http://schemas.openxmlformats.org/drawingml/2006/main">
+            <a:pPr algn="l">
+              <a:defRPr sz="2025" b="0">
+                <a:solidFill>
+                  <a:srgbClr val="34483F"/>
+                </a:solidFill>
+                <a:latin typeface="Microsoft JhengHei"/>
+                <a:ea typeface="Microsoft JhengHei"/>
+                <a:cs typeface="Microsoft JhengHei"/>
+              </a:defRPr>
+            </a:pPr>
+            <a:r>
+              <a:rPr sz="2025" b="0">
+                <a:solidFill>
+                  <a:srgbClr val="34483F"/>
+                </a:solidFill>
+                <a:latin typeface="Microsoft JhengHei"/>
+                <a:ea typeface="Microsoft JhengHei"/>
+                <a:cs typeface="Microsoft JhengHei"/>
+              </a:rPr>
+              <a:t>排序後的中間值</a:t>
+            </a:r>
+          </a:p>
+        </p:txBody>
+      </p:sp>
+      <p:sp>
+        <p:nvSpPr>
+          <p:cNvPr id="9" name="text">
+            <a:extLst xmlns:a="http://schemas.openxmlformats.org/drawingml/2006/main">
+              <a:ext uri="{FF2B5EF4-FFF2-40B4-BE49-F238E27FC236}">
+                <a16:creationId xmlns:a16="http://schemas.microsoft.com/office/drawing/2014/main" id="{F2BED0BC-EC93-497D-8E3D-AC961EFFE083}"/>
+              </a:ext>
+            </a:extLst>
+          </p:cNvPr>
+          <p:cNvSpPr>
+            <a:spLocks xmlns:a="http://schemas.openxmlformats.org/drawingml/2006/main" noGrp="1"/>
+          </p:cNvSpPr>
+          <p:nvPr/>
+        </p:nvSpPr>
+        <p:spPr>
+          <a:xfrm xmlns:a="http://schemas.openxmlformats.org/drawingml/2006/main">
+            <a:off x="685800" y="5857875"/>
+            <a:ext cx="10820400" cy="447675"/>
+          </a:xfrm>
+          <a:prstGeom xmlns:a="http://schemas.openxmlformats.org/drawingml/2006/main" prst="rect">
+            <a:avLst/>
+          </a:prstGeom>
+          <a:noFill xmlns:a="http://schemas.openxmlformats.org/drawingml/2006/main"/>
+          <a:ln xmlns:a="http://schemas.openxmlformats.org/drawingml/2006/main" w="0">
+            <a:noFill/>
+          </a:ln>
+        </p:spPr>
+        <p:txBody>
+          <a:bodyPr xmlns:a="http://schemas.openxmlformats.org/drawingml/2006/main" wrap="square" lIns="0" tIns="0" rIns="0" bIns="0" anchor="t">
+            <a:noAutofit/>
+          </a:bodyPr>
+          <a:lstStyle xmlns:a="http://schemas.openxmlformats.org/drawingml/2006/main"/>
+          <a:p xmlns:a="http://schemas.openxmlformats.org/drawingml/2006/main">
+            <a:pPr algn="l">
+              <a:defRPr sz="1875" b="0">
+                <a:solidFill>
+                  <a:srgbClr val="69776D"/>
+                </a:solidFill>
+                <a:latin typeface="Microsoft JhengHei"/>
+                <a:ea typeface="Microsoft JhengHei"/>
+                <a:cs typeface="Microsoft JhengHei"/>
+              </a:defRPr>
+            </a:pPr>
+            <a:r>
+              <a:rPr sz="1875" b="0">
+                <a:solidFill>
+                  <a:srgbClr val="69776D"/>
+                </a:solidFill>
+                <a:latin typeface="Microsoft JhengHei"/>
+                <a:ea typeface="Microsoft JhengHei"/>
+                <a:cs typeface="Microsoft JhengHei"/>
+              </a:rPr>
+              <a:t>中位數可降低單一分支極端輸出的影響，三條共同偏誤仍可能保留</a:t>
+            </a:r>
+          </a:p>
+        </p:txBody>
+      </p:sp>
+    </p:spTree>
+    <p:extLst>
+      <p:ext uri="{BB962C8B-B14F-4D97-AF65-F5344CB8AC3E}">
+        <p14:creationId xmlns:p14="http://schemas.microsoft.com/office/powerpoint/2010/main" val="674373125"/>
+      </p:ext>
+    </p:extLst>
+  </p:cSld>
+</p:sld>
+</file>
+
+<file path=ppt/slides/slide8.xml><?xml version="1.0" encoding="utf-8"?>
+<p:sld xmlns:p="http://schemas.openxmlformats.org/presentationml/2006/main">
+  <p:cSld>
+    <p:bg>
+      <p:bgPr>
+        <a:solidFill xmlns:a="http://schemas.openxmlformats.org/drawingml/2006/main">
+          <a:srgbClr val="F5F3EC"/>
+        </a:solidFill>
+      </p:bgPr>
+    </p:bg>
+    <p:spTree>
+      <p:nvGrpSpPr>
+        <p:cNvPr id="1" name=""/>
+        <p:cNvGrpSpPr/>
+        <p:nvPr/>
+      </p:nvGrpSpPr>
+      <p:grpSpPr>
+        <a:xfrm xmlns:a="http://schemas.openxmlformats.org/drawingml/2006/main"/>
+      </p:grpSpPr>
+      <p:sp>
+        <p:nvSpPr>
+          <p:cNvPr id="7" name="slide-title">
+            <a:extLst xmlns:a="http://schemas.openxmlformats.org/drawingml/2006/main">
+              <a:ext uri="{FF2B5EF4-FFF2-40B4-BE49-F238E27FC236}">
+                <a16:creationId xmlns:a16="http://schemas.microsoft.com/office/drawing/2014/main" id="{652696CD-8921-48EC-959F-FA82E278DA88}"/>
+              </a:ext>
+            </a:extLst>
+          </p:cNvPr>
+          <p:cNvSpPr>
+            <a:spLocks xmlns:a="http://schemas.openxmlformats.org/drawingml/2006/main" noGrp="1"/>
+          </p:cNvSpPr>
+          <p:nvPr/>
+        </p:nvSpPr>
+        <p:spPr>
+          <a:xfrm xmlns:a="http://schemas.openxmlformats.org/drawingml/2006/main">
+            <a:off x="685800" y="457200"/>
+            <a:ext cx="10820400" cy="685800"/>
+          </a:xfrm>
+          <a:prstGeom xmlns:a="http://schemas.openxmlformats.org/drawingml/2006/main" prst="rect">
+            <a:avLst/>
+          </a:prstGeom>
+          <a:noFill xmlns:a="http://schemas.openxmlformats.org/drawingml/2006/main"/>
+          <a:ln xmlns:a="http://schemas.openxmlformats.org/drawingml/2006/main" w="0">
+            <a:noFill/>
+          </a:ln>
+        </p:spPr>
+        <p:txBody>
+          <a:bodyPr xmlns:a="http://schemas.openxmlformats.org/drawingml/2006/main" wrap="square" lIns="0" tIns="0" rIns="0" bIns="0" anchor="t">
+            <a:noAutofit/>
+          </a:bodyPr>
+          <a:lstStyle xmlns:a="http://schemas.openxmlformats.org/drawingml/2006/main"/>
+          <a:p xmlns:a="http://schemas.openxmlformats.org/drawingml/2006/main">
+            <a:pPr algn="l">
+              <a:defRPr sz="3300" b="1">
+                <a:solidFill>
+                  <a:srgbClr val="203D35"/>
+                </a:solidFill>
+                <a:latin typeface="Microsoft JhengHei"/>
+                <a:ea typeface="Microsoft JhengHei"/>
+                <a:cs typeface="Microsoft JhengHei"/>
+              </a:defRPr>
+            </a:pPr>
+            <a:r>
+              <a:rPr sz="3300" b="1">
+                <a:solidFill>
+                  <a:srgbClr val="203D35"/>
+                </a:solidFill>
+                <a:latin typeface="Microsoft JhengHei"/>
+                <a:ea typeface="Microsoft JhengHei"/>
+                <a:cs typeface="Microsoft JhengHei"/>
+              </a:rPr>
+              <a:t>每一期用過去資料預測下一年</a:t>
+            </a:r>
+          </a:p>
+        </p:txBody>
+      </p:sp>
+      <p:sp>
+        <p:nvSpPr>
+          <p:cNvPr id="2" name="text">
+            <a:extLst xmlns:a="http://schemas.openxmlformats.org/drawingml/2006/main">
+              <a:ext uri="{FF2B5EF4-FFF2-40B4-BE49-F238E27FC236}">
+                <a16:creationId xmlns:a16="http://schemas.microsoft.com/office/drawing/2014/main" id="{A71AD753-830D-403D-9974-D69C612821B3}"/>
+              </a:ext>
+            </a:extLst>
+          </p:cNvPr>
+          <p:cNvSpPr>
+            <a:spLocks xmlns:a="http://schemas.openxmlformats.org/drawingml/2006/main" noGrp="1"/>
+          </p:cNvSpPr>
+          <p:nvPr/>
+        </p:nvSpPr>
+        <p:spPr>
+          <a:xfrm xmlns:a="http://schemas.openxmlformats.org/drawingml/2006/main">
+            <a:off x="685800" y="6438900"/>
+            <a:ext cx="6191250" cy="228600"/>
+          </a:xfrm>
+          <a:prstGeom xmlns:a="http://schemas.openxmlformats.org/drawingml/2006/main" prst="rect">
+            <a:avLst/>
+          </a:prstGeom>
+          <a:noFill xmlns:a="http://schemas.openxmlformats.org/drawingml/2006/main"/>
+          <a:ln xmlns:a="http://schemas.openxmlformats.org/drawingml/2006/main" w="0">
+            <a:noFill/>
+          </a:ln>
+        </p:spPr>
+        <p:txBody>
+          <a:bodyPr xmlns:a="http://schemas.openxmlformats.org/drawingml/2006/main" wrap="square" lIns="0" tIns="0" rIns="0" bIns="0" anchor="t">
+            <a:noAutofit/>
+          </a:bodyPr>
+          <a:lstStyle xmlns:a="http://schemas.openxmlformats.org/drawingml/2006/main"/>
+          <a:p xmlns:a="http://schemas.openxmlformats.org/drawingml/2006/main">
+            <a:pPr algn="l">
+              <a:defRPr sz="1275" b="0">
+                <a:solidFill>
+                  <a:srgbClr val="69776D"/>
+                </a:solidFill>
+                <a:latin typeface="Microsoft JhengHei"/>
+                <a:ea typeface="Microsoft JhengHei"/>
+                <a:cs typeface="Microsoft JhengHei"/>
+              </a:defRPr>
+            </a:pPr>
+            <a:r>
+              <a:rPr sz="1275" b="0">
+                <a:solidFill>
+                  <a:srgbClr val="69776D"/>
+                </a:solidFill>
+                <a:latin typeface="Microsoft JhengHei"/>
+                <a:ea typeface="Microsoft JhengHei"/>
+                <a:cs typeface="Microsoft JhengHei"/>
+              </a:rPr>
+              <a:t>臺灣房屋總價預測</a:t>
+            </a:r>
+          </a:p>
+        </p:txBody>
+      </p:sp>
+      <p:sp>
+        <p:nvSpPr>
+          <p:cNvPr id="3" name="text">
+            <a:extLst xmlns:a="http://schemas.openxmlformats.org/drawingml/2006/main">
+              <a:ext uri="{FF2B5EF4-FFF2-40B4-BE49-F238E27FC236}">
+                <a16:creationId xmlns:a16="http://schemas.microsoft.com/office/drawing/2014/main" id="{87EF9991-5C5F-400B-91CD-9956BFAE8B75}"/>
+              </a:ext>
+            </a:extLst>
+          </p:cNvPr>
+          <p:cNvSpPr>
+            <a:spLocks xmlns:a="http://schemas.openxmlformats.org/drawingml/2006/main" noGrp="1"/>
+          </p:cNvSpPr>
+          <p:nvPr/>
+        </p:nvSpPr>
+        <p:spPr>
+          <a:xfrm xmlns:a="http://schemas.openxmlformats.org/drawingml/2006/main">
+            <a:off x="10953750" y="6410325"/>
+            <a:ext cx="552450" cy="266700"/>
+          </a:xfrm>
+          <a:prstGeom xmlns:a="http://schemas.openxmlformats.org/drawingml/2006/main" prst="rect">
+            <a:avLst/>
+          </a:prstGeom>
+          <a:noFill xmlns:a="http://schemas.openxmlformats.org/drawingml/2006/main"/>
+          <a:ln xmlns:a="http://schemas.openxmlformats.org/drawingml/2006/main" w="0">
+            <a:noFill/>
+          </a:ln>
+        </p:spPr>
+        <p:txBody>
+          <a:bodyPr xmlns:a="http://schemas.openxmlformats.org/drawingml/2006/main" wrap="square" lIns="0" tIns="0" rIns="0" bIns="0" anchor="t">
+            <a:noAutofit/>
+          </a:bodyPr>
+          <a:lstStyle xmlns:a="http://schemas.openxmlformats.org/drawingml/2006/main"/>
+          <a:p xmlns:a="http://schemas.openxmlformats.org/drawingml/2006/main">
+            <a:pPr algn="r">
+              <a:defRPr sz="1425" b="0">
+                <a:solidFill>
+                  <a:srgbClr val="69776D"/>
+                </a:solidFill>
+                <a:latin typeface="Microsoft JhengHei"/>
+                <a:ea typeface="Microsoft JhengHei"/>
+                <a:cs typeface="Microsoft JhengHei"/>
+              </a:defRPr>
+            </a:pPr>
+            <a:r>
+              <a:rPr sz="1425" b="0">
+                <a:solidFill>
+                  <a:srgbClr val="69776D"/>
+                </a:solidFill>
+                <a:latin typeface="Microsoft JhengHei"/>
+                <a:ea typeface="Microsoft JhengHei"/>
+                <a:cs typeface="Microsoft JhengHei"/>
+              </a:rPr>
+              <a:t>08</a:t>
             </a:r>
           </a:p>
         </p:txBody>
@@ -12682,7 +11904,7 @@
           <p:cNvPr id="5" name="text">
             <a:extLst xmlns:a="http://schemas.openxmlformats.org/drawingml/2006/main">
               <a:ext uri="{FF2B5EF4-FFF2-40B4-BE49-F238E27FC236}">
-                <a16:creationId xmlns:a16="http://schemas.microsoft.com/office/drawing/2014/main" id="{C6642454-60AD-4B37-9C32-5AC1218C3F44}"/>
+                <a16:creationId xmlns:a16="http://schemas.microsoft.com/office/drawing/2014/main" id="{74F290D8-4A47-4798-BF4D-A2B2A3F8FDD6}"/>
               </a:ext>
             </a:extLst>
           </p:cNvPr>
@@ -12739,7 +11961,7 @@
           <p:cNvPr id="6" name="text">
             <a:extLst xmlns:a="http://schemas.openxmlformats.org/drawingml/2006/main">
               <a:ext uri="{FF2B5EF4-FFF2-40B4-BE49-F238E27FC236}">
-                <a16:creationId xmlns:a16="http://schemas.microsoft.com/office/drawing/2014/main" id="{CEDC2466-3762-47D7-A142-2323F1A869E2}"/>
+                <a16:creationId xmlns:a16="http://schemas.microsoft.com/office/drawing/2014/main" id="{0F050587-F3AD-45D7-875D-369A00786F0F}"/>
               </a:ext>
             </a:extLst>
           </p:cNvPr>
@@ -12786,7 +12008,7 @@
                 <a:ea typeface="Microsoft JhengHei"/>
                 <a:cs typeface="Microsoft JhengHei"/>
               </a:rPr>
-              <a:t>這些歷史窗口已反覆使用，不能視為全新盲測</a:t>
+              <a:t>歷史時間窗已多次用於研究，不能視為全新盲測</a:t>
             </a:r>
           </a:p>
         </p:txBody>
@@ -12794,508 +12016,7 @@
     </p:spTree>
     <p:extLst>
       <p:ext uri="{BB962C8B-B14F-4D97-AF65-F5344CB8AC3E}">
-        <p14:creationId xmlns:p14="http://schemas.microsoft.com/office/powerpoint/2010/main" val="339284162"/>
-      </p:ext>
-    </p:extLst>
-  </p:cSld>
-</p:sld>
-</file>
-
-<file path=ppt/slides/slide8.xml><?xml version="1.0" encoding="utf-8"?>
-<p:sld xmlns:p="http://schemas.openxmlformats.org/presentationml/2006/main">
-  <p:cSld>
-    <p:bg>
-      <p:bgPr>
-        <a:solidFill xmlns:a="http://schemas.openxmlformats.org/drawingml/2006/main">
-          <a:srgbClr val="F5F3EC"/>
-        </a:solidFill>
-      </p:bgPr>
-    </p:bg>
-    <p:spTree>
-      <p:nvGrpSpPr>
-        <p:cNvPr id="1" name=""/>
-        <p:cNvGrpSpPr/>
-        <p:nvPr/>
-      </p:nvGrpSpPr>
-      <p:grpSpPr>
-        <a:xfrm xmlns:a="http://schemas.openxmlformats.org/drawingml/2006/main"/>
-      </p:grpSpPr>
-      <p:sp>
-        <p:nvSpPr>
-          <p:cNvPr id="10" name="slide-title">
-            <a:extLst xmlns:a="http://schemas.openxmlformats.org/drawingml/2006/main">
-              <a:ext uri="{FF2B5EF4-FFF2-40B4-BE49-F238E27FC236}">
-                <a16:creationId xmlns:a16="http://schemas.microsoft.com/office/drawing/2014/main" id="{C056D55F-E4B5-4ADB-8BAA-CCF699B4A957}"/>
-              </a:ext>
-            </a:extLst>
-          </p:cNvPr>
-          <p:cNvSpPr>
-            <a:spLocks xmlns:a="http://schemas.openxmlformats.org/drawingml/2006/main" noGrp="1"/>
-          </p:cNvSpPr>
-          <p:nvPr/>
-        </p:nvSpPr>
-        <p:spPr>
-          <a:xfrm xmlns:a="http://schemas.openxmlformats.org/drawingml/2006/main">
-            <a:off x="685800" y="457200"/>
-            <a:ext cx="10820400" cy="685800"/>
-          </a:xfrm>
-          <a:prstGeom xmlns:a="http://schemas.openxmlformats.org/drawingml/2006/main" prst="rect">
-            <a:avLst/>
-          </a:prstGeom>
-          <a:noFill xmlns:a="http://schemas.openxmlformats.org/drawingml/2006/main"/>
-          <a:ln xmlns:a="http://schemas.openxmlformats.org/drawingml/2006/main" w="0">
-            <a:noFill/>
-          </a:ln>
-        </p:spPr>
-        <p:txBody>
-          <a:bodyPr xmlns:a="http://schemas.openxmlformats.org/drawingml/2006/main" wrap="square" lIns="0" tIns="0" rIns="0" bIns="0" anchor="t">
-            <a:noAutofit/>
-          </a:bodyPr>
-          <a:lstStyle xmlns:a="http://schemas.openxmlformats.org/drawingml/2006/main"/>
-          <a:p xmlns:a="http://schemas.openxmlformats.org/drawingml/2006/main">
-            <a:pPr algn="l">
-              <a:defRPr sz="3300" b="1">
-                <a:solidFill>
-                  <a:srgbClr val="203D35"/>
-                </a:solidFill>
-                <a:latin typeface="Microsoft JhengHei"/>
-                <a:ea typeface="Microsoft JhengHei"/>
-                <a:cs typeface="Microsoft JhengHei"/>
-              </a:defRPr>
-            </a:pPr>
-            <a:r>
-              <a:rPr sz="3300" b="1">
-                <a:solidFill>
-                  <a:srgbClr val="203D35"/>
-                </a:solidFill>
-                <a:latin typeface="Microsoft JhengHei"/>
-                <a:ea typeface="Microsoft JhengHei"/>
-                <a:cs typeface="Microsoft JhengHei"/>
-              </a:rPr>
-              <a:t>相對 v20，v22 三期整體 MAE 都較低</a:t>
-            </a:r>
-          </a:p>
-        </p:txBody>
-      </p:sp>
-      <p:sp>
-        <p:nvSpPr>
-          <p:cNvPr id="2" name="text">
-            <a:extLst xmlns:a="http://schemas.openxmlformats.org/drawingml/2006/main">
-              <a:ext uri="{FF2B5EF4-FFF2-40B4-BE49-F238E27FC236}">
-                <a16:creationId xmlns:a16="http://schemas.microsoft.com/office/drawing/2014/main" id="{79823757-10F4-4BC8-A42C-53D7C00BCECD}"/>
-              </a:ext>
-            </a:extLst>
-          </p:cNvPr>
-          <p:cNvSpPr>
-            <a:spLocks xmlns:a="http://schemas.openxmlformats.org/drawingml/2006/main" noGrp="1"/>
-          </p:cNvSpPr>
-          <p:nvPr/>
-        </p:nvSpPr>
-        <p:spPr>
-          <a:xfrm xmlns:a="http://schemas.openxmlformats.org/drawingml/2006/main">
-            <a:off x="685800" y="6438900"/>
-            <a:ext cx="6191250" cy="228600"/>
-          </a:xfrm>
-          <a:prstGeom xmlns:a="http://schemas.openxmlformats.org/drawingml/2006/main" prst="rect">
-            <a:avLst/>
-          </a:prstGeom>
-          <a:noFill xmlns:a="http://schemas.openxmlformats.org/drawingml/2006/main"/>
-          <a:ln xmlns:a="http://schemas.openxmlformats.org/drawingml/2006/main" w="0">
-            <a:noFill/>
-          </a:ln>
-        </p:spPr>
-        <p:txBody>
-          <a:bodyPr xmlns:a="http://schemas.openxmlformats.org/drawingml/2006/main" wrap="square" lIns="0" tIns="0" rIns="0" bIns="0" anchor="t">
-            <a:noAutofit/>
-          </a:bodyPr>
-          <a:lstStyle xmlns:a="http://schemas.openxmlformats.org/drawingml/2006/main"/>
-          <a:p xmlns:a="http://schemas.openxmlformats.org/drawingml/2006/main">
-            <a:pPr algn="l">
-              <a:defRPr sz="1275" b="0">
-                <a:solidFill>
-                  <a:srgbClr val="69776D"/>
-                </a:solidFill>
-                <a:latin typeface="Microsoft JhengHei"/>
-                <a:ea typeface="Microsoft JhengHei"/>
-                <a:cs typeface="Microsoft JhengHei"/>
-              </a:defRPr>
-            </a:pPr>
-            <a:r>
-              <a:rPr sz="1275" b="0">
-                <a:solidFill>
-                  <a:srgbClr val="69776D"/>
-                </a:solidFill>
-                <a:latin typeface="Microsoft JhengHei"/>
-                <a:ea typeface="Microsoft JhengHei"/>
-                <a:cs typeface="Microsoft JhengHei"/>
-              </a:rPr>
-              <a:t>臺灣房屋總價預測／v22</a:t>
-            </a:r>
-          </a:p>
-        </p:txBody>
-      </p:sp>
-      <p:sp>
-        <p:nvSpPr>
-          <p:cNvPr id="3" name="text">
-            <a:extLst xmlns:a="http://schemas.openxmlformats.org/drawingml/2006/main">
-              <a:ext uri="{FF2B5EF4-FFF2-40B4-BE49-F238E27FC236}">
-                <a16:creationId xmlns:a16="http://schemas.microsoft.com/office/drawing/2014/main" id="{6B30280E-9447-4BBB-91B1-E30FB12EB623}"/>
-              </a:ext>
-            </a:extLst>
-          </p:cNvPr>
-          <p:cNvSpPr>
-            <a:spLocks xmlns:a="http://schemas.openxmlformats.org/drawingml/2006/main" noGrp="1"/>
-          </p:cNvSpPr>
-          <p:nvPr/>
-        </p:nvSpPr>
-        <p:spPr>
-          <a:xfrm xmlns:a="http://schemas.openxmlformats.org/drawingml/2006/main">
-            <a:off x="10953750" y="6410325"/>
-            <a:ext cx="552450" cy="266700"/>
-          </a:xfrm>
-          <a:prstGeom xmlns:a="http://schemas.openxmlformats.org/drawingml/2006/main" prst="rect">
-            <a:avLst/>
-          </a:prstGeom>
-          <a:noFill xmlns:a="http://schemas.openxmlformats.org/drawingml/2006/main"/>
-          <a:ln xmlns:a="http://schemas.openxmlformats.org/drawingml/2006/main" w="0">
-            <a:noFill/>
-          </a:ln>
-        </p:spPr>
-        <p:txBody>
-          <a:bodyPr xmlns:a="http://schemas.openxmlformats.org/drawingml/2006/main" wrap="square" lIns="0" tIns="0" rIns="0" bIns="0" anchor="t">
-            <a:noAutofit/>
-          </a:bodyPr>
-          <a:lstStyle xmlns:a="http://schemas.openxmlformats.org/drawingml/2006/main"/>
-          <a:p xmlns:a="http://schemas.openxmlformats.org/drawingml/2006/main">
-            <a:pPr algn="r">
-              <a:defRPr sz="1425" b="0">
-                <a:solidFill>
-                  <a:srgbClr val="69776D"/>
-                </a:solidFill>
-                <a:latin typeface="Microsoft JhengHei"/>
-                <a:ea typeface="Microsoft JhengHei"/>
-                <a:cs typeface="Microsoft JhengHei"/>
-              </a:defRPr>
-            </a:pPr>
-            <a:r>
-              <a:rPr sz="1425" b="0">
-                <a:solidFill>
-                  <a:srgbClr val="69776D"/>
-                </a:solidFill>
-                <a:latin typeface="Microsoft JhengHei"/>
-                <a:ea typeface="Microsoft JhengHei"/>
-                <a:cs typeface="Microsoft JhengHei"/>
-              </a:rPr>
-              <a:t>08</a:t>
-            </a:r>
-          </a:p>
-        </p:txBody>
-      </p:sp>
-      <p:sp>
-        <p:nvSpPr>
-          <p:cNvPr id="4" name="text">
-            <a:extLst xmlns:a="http://schemas.openxmlformats.org/drawingml/2006/main">
-              <a:ext uri="{FF2B5EF4-FFF2-40B4-BE49-F238E27FC236}">
-                <a16:creationId xmlns:a16="http://schemas.microsoft.com/office/drawing/2014/main" id="{9C077278-15A0-4A07-8B81-13F3A747DDA4}"/>
-              </a:ext>
-            </a:extLst>
-          </p:cNvPr>
-          <p:cNvSpPr>
-            <a:spLocks xmlns:a="http://schemas.openxmlformats.org/drawingml/2006/main" noGrp="1"/>
-          </p:cNvSpPr>
-          <p:nvPr/>
-        </p:nvSpPr>
-        <p:spPr>
-          <a:xfrm xmlns:a="http://schemas.openxmlformats.org/drawingml/2006/main">
-            <a:off x="685800" y="1390650"/>
-            <a:ext cx="10820400" cy="352425"/>
-          </a:xfrm>
-          <a:prstGeom xmlns:a="http://schemas.openxmlformats.org/drawingml/2006/main" prst="rect">
-            <a:avLst/>
-          </a:prstGeom>
-          <a:noFill xmlns:a="http://schemas.openxmlformats.org/drawingml/2006/main"/>
-          <a:ln xmlns:a="http://schemas.openxmlformats.org/drawingml/2006/main" w="0">
-            <a:noFill/>
-          </a:ln>
-        </p:spPr>
-        <p:txBody>
-          <a:bodyPr xmlns:a="http://schemas.openxmlformats.org/drawingml/2006/main" wrap="square" lIns="0" tIns="0" rIns="0" bIns="0" anchor="t">
-            <a:noAutofit/>
-          </a:bodyPr>
-          <a:lstStyle xmlns:a="http://schemas.openxmlformats.org/drawingml/2006/main"/>
-          <a:p xmlns:a="http://schemas.openxmlformats.org/drawingml/2006/main">
-            <a:pPr algn="l">
-              <a:defRPr sz="1875" b="0">
-                <a:solidFill>
-                  <a:srgbClr val="69776D"/>
-                </a:solidFill>
-                <a:latin typeface="Microsoft JhengHei"/>
-                <a:ea typeface="Microsoft JhengHei"/>
-                <a:cs typeface="Microsoft JhengHei"/>
-              </a:defRPr>
-            </a:pPr>
-            <a:r>
-              <a:rPr sz="1875" b="0">
-                <a:solidFill>
-                  <a:srgbClr val="69776D"/>
-                </a:solidFill>
-                <a:latin typeface="Microsoft JhengHei"/>
-                <a:ea typeface="Microsoft JhengHei"/>
-                <a:cs typeface="Microsoft JhengHei"/>
-              </a:rPr>
-              <a:t>總價 MAE（萬元，越低越好）</a:t>
-            </a:r>
-          </a:p>
-        </p:txBody>
-      </p:sp>
-      <p:graphicFrame>
-        <p:nvGraphicFramePr>
-          <p:cNvPr id="14" name="Chart"/>
-          <p:cNvGraphicFramePr/>
-          <p:nvPr/>
-        </p:nvGraphicFramePr>
-        <p:xfrm>
-          <a:off xmlns:a="http://schemas.openxmlformats.org/drawingml/2006/main" x="685800" y="1866900"/>
-          <a:ext xmlns:a="http://schemas.openxmlformats.org/drawingml/2006/main" cx="10820400" cy="3552825"/>
-        </p:xfrm>
-        <a:graphic xmlns:a="http://schemas.openxmlformats.org/drawingml/2006/main">
-          <a:graphicData uri="http://schemas.openxmlformats.org/drawingml/2006/chart">
-            <c:chart xmlns:r="http://schemas.openxmlformats.org/officeDocument/2006/relationships" xmlns:c="http://schemas.openxmlformats.org/drawingml/2006/chart" r:id="R8e403c640b7841c8"/>
-          </a:graphicData>
-        </a:graphic>
-      </p:graphicFrame>
-      <p:sp>
-        <p:nvSpPr>
-          <p:cNvPr id="6" name="text">
-            <a:extLst xmlns:a="http://schemas.openxmlformats.org/drawingml/2006/main">
-              <a:ext uri="{FF2B5EF4-FFF2-40B4-BE49-F238E27FC236}">
-                <a16:creationId xmlns:a16="http://schemas.microsoft.com/office/drawing/2014/main" id="{3B883FF8-BD96-469D-976C-31A76FF24CF5}"/>
-              </a:ext>
-            </a:extLst>
-          </p:cNvPr>
-          <p:cNvSpPr>
-            <a:spLocks xmlns:a="http://schemas.openxmlformats.org/drawingml/2006/main" noGrp="1"/>
-          </p:cNvSpPr>
-          <p:nvPr/>
-        </p:nvSpPr>
-        <p:spPr>
-          <a:xfrm xmlns:a="http://schemas.openxmlformats.org/drawingml/2006/main">
-            <a:off x="1981200" y="5591175"/>
-            <a:ext cx="2095500" cy="390525"/>
-          </a:xfrm>
-          <a:prstGeom xmlns:a="http://schemas.openxmlformats.org/drawingml/2006/main" prst="rect">
-            <a:avLst/>
-          </a:prstGeom>
-          <a:noFill xmlns:a="http://schemas.openxmlformats.org/drawingml/2006/main"/>
-          <a:ln xmlns:a="http://schemas.openxmlformats.org/drawingml/2006/main" w="0">
-            <a:noFill/>
-          </a:ln>
-        </p:spPr>
-        <p:txBody>
-          <a:bodyPr xmlns:a="http://schemas.openxmlformats.org/drawingml/2006/main" wrap="square" lIns="0" tIns="0" rIns="0" bIns="0" anchor="t">
-            <a:noAutofit/>
-          </a:bodyPr>
-          <a:lstStyle xmlns:a="http://schemas.openxmlformats.org/drawingml/2006/main"/>
-          <a:p xmlns:a="http://schemas.openxmlformats.org/drawingml/2006/main">
-            <a:pPr algn="ctr">
-              <a:defRPr sz="1950" b="1">
-                <a:solidFill>
-                  <a:srgbClr val="31644F"/>
-                </a:solidFill>
-                <a:latin typeface="Microsoft JhengHei"/>
-                <a:ea typeface="Microsoft JhengHei"/>
-                <a:cs typeface="Microsoft JhengHei"/>
-              </a:defRPr>
-            </a:pPr>
-            <a:r>
-              <a:rPr sz="1950" b="1">
-                <a:solidFill>
-                  <a:srgbClr val="31644F"/>
-                </a:solidFill>
-                <a:latin typeface="Microsoft JhengHei"/>
-                <a:ea typeface="Microsoft JhengHei"/>
-                <a:cs typeface="Microsoft JhengHei"/>
-              </a:rPr>
-              <a:t>改善 2.65%</a:t>
-            </a:r>
-          </a:p>
-        </p:txBody>
-      </p:sp>
-      <p:sp>
-        <p:nvSpPr>
-          <p:cNvPr id="7" name="text">
-            <a:extLst xmlns:a="http://schemas.openxmlformats.org/drawingml/2006/main">
-              <a:ext uri="{FF2B5EF4-FFF2-40B4-BE49-F238E27FC236}">
-                <a16:creationId xmlns:a16="http://schemas.microsoft.com/office/drawing/2014/main" id="{AA1A4989-2501-448E-9E02-47A9519B791A}"/>
-              </a:ext>
-            </a:extLst>
-          </p:cNvPr>
-          <p:cNvSpPr>
-            <a:spLocks xmlns:a="http://schemas.openxmlformats.org/drawingml/2006/main" noGrp="1"/>
-          </p:cNvSpPr>
-          <p:nvPr/>
-        </p:nvSpPr>
-        <p:spPr>
-          <a:xfrm xmlns:a="http://schemas.openxmlformats.org/drawingml/2006/main">
-            <a:off x="5295900" y="5591175"/>
-            <a:ext cx="2095500" cy="390525"/>
-          </a:xfrm>
-          <a:prstGeom xmlns:a="http://schemas.openxmlformats.org/drawingml/2006/main" prst="rect">
-            <a:avLst/>
-          </a:prstGeom>
-          <a:noFill xmlns:a="http://schemas.openxmlformats.org/drawingml/2006/main"/>
-          <a:ln xmlns:a="http://schemas.openxmlformats.org/drawingml/2006/main" w="0">
-            <a:noFill/>
-          </a:ln>
-        </p:spPr>
-        <p:txBody>
-          <a:bodyPr xmlns:a="http://schemas.openxmlformats.org/drawingml/2006/main" wrap="square" lIns="0" tIns="0" rIns="0" bIns="0" anchor="t">
-            <a:noAutofit/>
-          </a:bodyPr>
-          <a:lstStyle xmlns:a="http://schemas.openxmlformats.org/drawingml/2006/main"/>
-          <a:p xmlns:a="http://schemas.openxmlformats.org/drawingml/2006/main">
-            <a:pPr algn="ctr">
-              <a:defRPr sz="1950" b="1">
-                <a:solidFill>
-                  <a:srgbClr val="31644F"/>
-                </a:solidFill>
-                <a:latin typeface="Microsoft JhengHei"/>
-                <a:ea typeface="Microsoft JhengHei"/>
-                <a:cs typeface="Microsoft JhengHei"/>
-              </a:defRPr>
-            </a:pPr>
-            <a:r>
-              <a:rPr sz="1950" b="1">
-                <a:solidFill>
-                  <a:srgbClr val="31644F"/>
-                </a:solidFill>
-                <a:latin typeface="Microsoft JhengHei"/>
-                <a:ea typeface="Microsoft JhengHei"/>
-                <a:cs typeface="Microsoft JhengHei"/>
-              </a:rPr>
-              <a:t>改善 0.62%</a:t>
-            </a:r>
-          </a:p>
-        </p:txBody>
-      </p:sp>
-      <p:sp>
-        <p:nvSpPr>
-          <p:cNvPr id="8" name="text">
-            <a:extLst xmlns:a="http://schemas.openxmlformats.org/drawingml/2006/main">
-              <a:ext uri="{FF2B5EF4-FFF2-40B4-BE49-F238E27FC236}">
-                <a16:creationId xmlns:a16="http://schemas.microsoft.com/office/drawing/2014/main" id="{BFF36639-6BF2-4A66-9598-AF6986E6EF46}"/>
-              </a:ext>
-            </a:extLst>
-          </p:cNvPr>
-          <p:cNvSpPr>
-            <a:spLocks xmlns:a="http://schemas.openxmlformats.org/drawingml/2006/main" noGrp="1"/>
-          </p:cNvSpPr>
-          <p:nvPr/>
-        </p:nvSpPr>
-        <p:spPr>
-          <a:xfrm xmlns:a="http://schemas.openxmlformats.org/drawingml/2006/main">
-            <a:off x="8610600" y="5591175"/>
-            <a:ext cx="2095500" cy="390525"/>
-          </a:xfrm>
-          <a:prstGeom xmlns:a="http://schemas.openxmlformats.org/drawingml/2006/main" prst="rect">
-            <a:avLst/>
-          </a:prstGeom>
-          <a:noFill xmlns:a="http://schemas.openxmlformats.org/drawingml/2006/main"/>
-          <a:ln xmlns:a="http://schemas.openxmlformats.org/drawingml/2006/main" w="0">
-            <a:noFill/>
-          </a:ln>
-        </p:spPr>
-        <p:txBody>
-          <a:bodyPr xmlns:a="http://schemas.openxmlformats.org/drawingml/2006/main" wrap="square" lIns="0" tIns="0" rIns="0" bIns="0" anchor="t">
-            <a:noAutofit/>
-          </a:bodyPr>
-          <a:lstStyle xmlns:a="http://schemas.openxmlformats.org/drawingml/2006/main"/>
-          <a:p xmlns:a="http://schemas.openxmlformats.org/drawingml/2006/main">
-            <a:pPr algn="ctr">
-              <a:defRPr sz="1950" b="1">
-                <a:solidFill>
-                  <a:srgbClr val="31644F"/>
-                </a:solidFill>
-                <a:latin typeface="Microsoft JhengHei"/>
-                <a:ea typeface="Microsoft JhengHei"/>
-                <a:cs typeface="Microsoft JhengHei"/>
-              </a:defRPr>
-            </a:pPr>
-            <a:r>
-              <a:rPr sz="1950" b="1">
-                <a:solidFill>
-                  <a:srgbClr val="31644F"/>
-                </a:solidFill>
-                <a:latin typeface="Microsoft JhengHei"/>
-                <a:ea typeface="Microsoft JhengHei"/>
-                <a:cs typeface="Microsoft JhengHei"/>
-              </a:rPr>
-              <a:t>改善 1.94%</a:t>
-            </a:r>
-          </a:p>
-        </p:txBody>
-      </p:sp>
-      <p:sp>
-        <p:nvSpPr>
-          <p:cNvPr id="9" name="text">
-            <a:extLst xmlns:a="http://schemas.openxmlformats.org/drawingml/2006/main">
-              <a:ext uri="{FF2B5EF4-FFF2-40B4-BE49-F238E27FC236}">
-                <a16:creationId xmlns:a16="http://schemas.microsoft.com/office/drawing/2014/main" id="{EE2BE6FE-28A1-4D13-8CD4-3EADF9B57C4C}"/>
-              </a:ext>
-            </a:extLst>
-          </p:cNvPr>
-          <p:cNvSpPr>
-            <a:spLocks xmlns:a="http://schemas.openxmlformats.org/drawingml/2006/main" noGrp="1"/>
-          </p:cNvSpPr>
-          <p:nvPr/>
-        </p:nvSpPr>
-        <p:spPr>
-          <a:xfrm xmlns:a="http://schemas.openxmlformats.org/drawingml/2006/main">
-            <a:off x="685800" y="6019800"/>
-            <a:ext cx="10820400" cy="295275"/>
-          </a:xfrm>
-          <a:prstGeom xmlns:a="http://schemas.openxmlformats.org/drawingml/2006/main" prst="rect">
-            <a:avLst/>
-          </a:prstGeom>
-          <a:noFill xmlns:a="http://schemas.openxmlformats.org/drawingml/2006/main"/>
-          <a:ln xmlns:a="http://schemas.openxmlformats.org/drawingml/2006/main" w="0">
-            <a:noFill/>
-          </a:ln>
-        </p:spPr>
-        <p:txBody>
-          <a:bodyPr xmlns:a="http://schemas.openxmlformats.org/drawingml/2006/main" wrap="square" lIns="0" tIns="0" rIns="0" bIns="0" anchor="t">
-            <a:noAutofit/>
-          </a:bodyPr>
-          <a:lstStyle xmlns:a="http://schemas.openxmlformats.org/drawingml/2006/main"/>
-          <a:p xmlns:a="http://schemas.openxmlformats.org/drawingml/2006/main">
-            <a:pPr algn="l">
-              <a:defRPr sz="1725" b="0">
-                <a:solidFill>
-                  <a:srgbClr val="69776D"/>
-                </a:solidFill>
-                <a:latin typeface="Microsoft JhengHei"/>
-                <a:ea typeface="Microsoft JhengHei"/>
-                <a:cs typeface="Microsoft JhengHei"/>
-              </a:defRPr>
-            </a:pPr>
-            <a:r>
-              <a:rPr sz="1725" b="0">
-                <a:solidFill>
-                  <a:srgbClr val="69776D"/>
-                </a:solidFill>
-                <a:latin typeface="Microsoft JhengHei"/>
-                <a:ea typeface="Microsoft JhengHei"/>
-                <a:cs typeface="Microsoft JhengHei"/>
-              </a:rPr>
-              <a:t>中間年度的配對區間跨 0，不能稱為三期皆有顯著改善</a:t>
-            </a:r>
-          </a:p>
-        </p:txBody>
-      </p:sp>
-    </p:spTree>
-    <p:extLst>
-      <p:ext uri="{BB962C8B-B14F-4D97-AF65-F5344CB8AC3E}">
-        <p14:creationId xmlns:p14="http://schemas.microsoft.com/office/powerpoint/2010/main" val="772558419"/>
+        <p14:creationId xmlns:p14="http://schemas.microsoft.com/office/powerpoint/2010/main" val="1362947729"/>
       </p:ext>
     </p:extLst>
   </p:cSld>
@@ -13323,10 +12044,10 @@
       </p:grpSpPr>
       <p:sp>
         <p:nvSpPr>
-          <p:cNvPr id="10" name="slide-title">
+          <p:cNvPr id="7" name="slide-title">
             <a:extLst xmlns:a="http://schemas.openxmlformats.org/drawingml/2006/main">
               <a:ext uri="{FF2B5EF4-FFF2-40B4-BE49-F238E27FC236}">
-                <a16:creationId xmlns:a16="http://schemas.microsoft.com/office/drawing/2014/main" id="{B06D2BD7-5D49-441F-AAD4-A564FAC5A0C7}"/>
+                <a16:creationId xmlns:a16="http://schemas.microsoft.com/office/drawing/2014/main" id="{EA073C93-DFFD-43F8-BC72-5D52DDB3A3F6}"/>
               </a:ext>
             </a:extLst>
           </p:cNvPr>
@@ -13373,7 +12094,7 @@
                 <a:ea typeface="Microsoft JhengHei"/>
                 <a:cs typeface="Microsoft JhengHei"/>
               </a:rPr>
-              <a:t>v22 的 Public MAE 為 199.86 萬元</a:t>
+              <a:t>三個年度的歷史回測結果</a:t>
             </a:r>
           </a:p>
         </p:txBody>
@@ -13383,7 +12104,7 @@
           <p:cNvPr id="2" name="text">
             <a:extLst xmlns:a="http://schemas.openxmlformats.org/drawingml/2006/main">
               <a:ext uri="{FF2B5EF4-FFF2-40B4-BE49-F238E27FC236}">
-                <a16:creationId xmlns:a16="http://schemas.microsoft.com/office/drawing/2014/main" id="{39270564-A4FE-41D8-84FF-9DA061E1B63C}"/>
+                <a16:creationId xmlns:a16="http://schemas.microsoft.com/office/drawing/2014/main" id="{85746261-C5C0-4EE9-916D-C40CD1CC0B44}"/>
               </a:ext>
             </a:extLst>
           </p:cNvPr>
@@ -13430,7 +12151,7 @@
                 <a:ea typeface="Microsoft JhengHei"/>
                 <a:cs typeface="Microsoft JhengHei"/>
               </a:rPr>
-              <a:t>臺灣房屋總價預測／v22</a:t>
+              <a:t>臺灣房屋總價預測</a:t>
             </a:r>
           </a:p>
         </p:txBody>
@@ -13440,7 +12161,7 @@
           <p:cNvPr id="3" name="text">
             <a:extLst xmlns:a="http://schemas.openxmlformats.org/drawingml/2006/main">
               <a:ext uri="{FF2B5EF4-FFF2-40B4-BE49-F238E27FC236}">
-                <a16:creationId xmlns:a16="http://schemas.microsoft.com/office/drawing/2014/main" id="{6A9522DD-CDA8-4014-9469-E10C1CB7AF14}"/>
+                <a16:creationId xmlns:a16="http://schemas.microsoft.com/office/drawing/2014/main" id="{69306CFB-55B1-44B0-8CD6-C1BE885B6369}"/>
               </a:ext>
             </a:extLst>
           </p:cNvPr>
@@ -13497,7 +12218,7 @@
           <p:cNvPr id="4" name="text">
             <a:extLst xmlns:a="http://schemas.openxmlformats.org/drawingml/2006/main">
               <a:ext uri="{FF2B5EF4-FFF2-40B4-BE49-F238E27FC236}">
-                <a16:creationId xmlns:a16="http://schemas.microsoft.com/office/drawing/2014/main" id="{8E878A36-B002-49B5-8E71-37C0D6130FEC}"/>
+                <a16:creationId xmlns:a16="http://schemas.microsoft.com/office/drawing/2014/main" id="{BAA4CED9-0F99-4AC6-9D01-8A32E365BB04}"/>
               </a:ext>
             </a:extLst>
           </p:cNvPr>
@@ -13508,8 +12229,8 @@
         </p:nvSpPr>
         <p:spPr>
           <a:xfrm xmlns:a="http://schemas.openxmlformats.org/drawingml/2006/main">
-            <a:off x="685800" y="1438275"/>
-            <a:ext cx="7943850" cy="371475"/>
+            <a:off x="685800" y="1390650"/>
+            <a:ext cx="10820400" cy="352425"/>
           </a:xfrm>
           <a:prstGeom xmlns:a="http://schemas.openxmlformats.org/drawingml/2006/main" prst="rect">
             <a:avLst/>
@@ -13544,24 +12265,24 @@
                 <a:ea typeface="Microsoft JhengHei"/>
                 <a:cs typeface="Microsoft JhengHei"/>
               </a:rPr>
-              <a:t>Public MAE（萬元，越低越好）</a:t>
+              <a:t>總價 MAE（萬元，越低越好）</a:t>
             </a:r>
           </a:p>
         </p:txBody>
       </p:sp>
       <p:graphicFrame>
         <p:nvGraphicFramePr>
-          <p:cNvPr id="14" name="Chart"/>
+          <p:cNvPr id="11" name="Chart"/>
           <p:cNvGraphicFramePr/>
           <p:nvPr/>
         </p:nvGraphicFramePr>
         <p:xfrm>
-          <a:off xmlns:a="http://schemas.openxmlformats.org/drawingml/2006/main" x="590550" y="2066925"/>
-          <a:ext xmlns:a="http://schemas.openxmlformats.org/drawingml/2006/main" cx="7867650" cy="3533775"/>
+          <a:off xmlns:a="http://schemas.openxmlformats.org/drawingml/2006/main" x="685800" y="2076450"/>
+          <a:ext xmlns:a="http://schemas.openxmlformats.org/drawingml/2006/main" cx="10820400" cy="3552825"/>
         </p:xfrm>
         <a:graphic xmlns:a="http://schemas.openxmlformats.org/drawingml/2006/main">
           <a:graphicData uri="http://schemas.openxmlformats.org/drawingml/2006/chart">
-            <c:chart xmlns:r="http://schemas.openxmlformats.org/officeDocument/2006/relationships" xmlns:c="http://schemas.openxmlformats.org/drawingml/2006/chart" r:id="R53d6ed2fce9e4e2d"/>
+            <c:chart xmlns:r="http://schemas.openxmlformats.org/officeDocument/2006/relationships" xmlns:c="http://schemas.openxmlformats.org/drawingml/2006/chart" r:id="R56a4e8e5e495416e"/>
           </a:graphicData>
         </a:graphic>
       </p:graphicFrame>
@@ -13570,7 +12291,7 @@
           <p:cNvPr id="6" name="text">
             <a:extLst xmlns:a="http://schemas.openxmlformats.org/drawingml/2006/main">
               <a:ext uri="{FF2B5EF4-FFF2-40B4-BE49-F238E27FC236}">
-                <a16:creationId xmlns:a16="http://schemas.microsoft.com/office/drawing/2014/main" id="{56B54844-F5EC-4F20-AEBE-825F15C247BE}"/>
+                <a16:creationId xmlns:a16="http://schemas.microsoft.com/office/drawing/2014/main" id="{3AB62693-ABD0-4392-BD99-B29541B806FB}"/>
               </a:ext>
             </a:extLst>
           </p:cNvPr>
@@ -13581,8 +12302,8 @@
         </p:nvSpPr>
         <p:spPr>
           <a:xfrm xmlns:a="http://schemas.openxmlformats.org/drawingml/2006/main">
-            <a:off x="8896350" y="2247900"/>
-            <a:ext cx="2762250" cy="952500"/>
+            <a:off x="685800" y="5905500"/>
+            <a:ext cx="10820400" cy="400050"/>
           </a:xfrm>
           <a:prstGeom xmlns:a="http://schemas.openxmlformats.org/drawingml/2006/main" prst="rect">
             <a:avLst/>
@@ -13599,224 +12320,7 @@
           <a:lstStyle xmlns:a="http://schemas.openxmlformats.org/drawingml/2006/main"/>
           <a:p xmlns:a="http://schemas.openxmlformats.org/drawingml/2006/main">
             <a:pPr algn="l">
-              <a:defRPr sz="4800" b="1">
-                <a:solidFill>
-                  <a:srgbClr val="31644F"/>
-                </a:solidFill>
-                <a:latin typeface="Microsoft JhengHei"/>
-                <a:ea typeface="Microsoft JhengHei"/>
-                <a:cs typeface="Microsoft JhengHei"/>
-              </a:defRPr>
-            </a:pPr>
-            <a:r>
-              <a:rPr sz="4800" b="1">
-                <a:solidFill>
-                  <a:srgbClr val="31644F"/>
-                </a:solidFill>
-                <a:latin typeface="Microsoft JhengHei"/>
-                <a:ea typeface="Microsoft JhengHei"/>
-                <a:cs typeface="Microsoft JhengHei"/>
-              </a:rPr>
-              <a:t>3.44%</a:t>
-            </a:r>
-          </a:p>
-        </p:txBody>
-      </p:sp>
-      <p:sp>
-        <p:nvSpPr>
-          <p:cNvPr id="7" name="text">
-            <a:extLst xmlns:a="http://schemas.openxmlformats.org/drawingml/2006/main">
-              <a:ext uri="{FF2B5EF4-FFF2-40B4-BE49-F238E27FC236}">
-                <a16:creationId xmlns:a16="http://schemas.microsoft.com/office/drawing/2014/main" id="{4BF3551C-0044-46CD-8A1B-0C4D22BB3859}"/>
-              </a:ext>
-            </a:extLst>
-          </p:cNvPr>
-          <p:cNvSpPr>
-            <a:spLocks xmlns:a="http://schemas.openxmlformats.org/drawingml/2006/main" noGrp="1"/>
-          </p:cNvSpPr>
-          <p:nvPr/>
-        </p:nvSpPr>
-        <p:spPr>
-          <a:xfrm xmlns:a="http://schemas.openxmlformats.org/drawingml/2006/main">
-            <a:off x="8905875" y="3352800"/>
-            <a:ext cx="2543175" cy="819150"/>
-          </a:xfrm>
-          <a:prstGeom xmlns:a="http://schemas.openxmlformats.org/drawingml/2006/main" prst="rect">
-            <a:avLst/>
-          </a:prstGeom>
-          <a:noFill xmlns:a="http://schemas.openxmlformats.org/drawingml/2006/main"/>
-          <a:ln xmlns:a="http://schemas.openxmlformats.org/drawingml/2006/main" w="0">
-            <a:noFill/>
-          </a:ln>
-        </p:spPr>
-        <p:txBody>
-          <a:bodyPr xmlns:a="http://schemas.openxmlformats.org/drawingml/2006/main" wrap="square" lIns="0" tIns="0" rIns="0" bIns="0" anchor="t">
-            <a:noAutofit/>
-          </a:bodyPr>
-          <a:lstStyle xmlns:a="http://schemas.openxmlformats.org/drawingml/2006/main"/>
-          <a:p xmlns:a="http://schemas.openxmlformats.org/drawingml/2006/main">
-            <a:pPr algn="l">
-              <a:defRPr sz="2175" b="0">
-                <a:solidFill>
-                  <a:srgbClr val="34483F"/>
-                </a:solidFill>
-                <a:latin typeface="Microsoft JhengHei"/>
-                <a:ea typeface="Microsoft JhengHei"/>
-                <a:cs typeface="Microsoft JhengHei"/>
-              </a:defRPr>
-            </a:pPr>
-            <a:r>
-              <a:rPr sz="2175" b="0">
-                <a:solidFill>
-                  <a:srgbClr val="34483F"/>
-                </a:solidFill>
-                <a:latin typeface="Microsoft JhengHei"/>
-                <a:ea typeface="Microsoft JhengHei"/>
-                <a:cs typeface="Microsoft JhengHei"/>
-              </a:rPr>
-              <a:t>相對 v20</a:t>
-            </a:r>
-          </a:p>
-          <a:p xmlns:a="http://schemas.openxmlformats.org/drawingml/2006/main">
-            <a:pPr algn="l">
-              <a:defRPr sz="2175" b="0">
-                <a:solidFill>
-                  <a:srgbClr val="34483F"/>
-                </a:solidFill>
-                <a:latin typeface="Microsoft JhengHei"/>
-                <a:ea typeface="Microsoft JhengHei"/>
-                <a:cs typeface="Microsoft JhengHei"/>
-              </a:defRPr>
-            </a:pPr>
-            <a:r>
-              <a:rPr sz="2175" b="0">
-                <a:solidFill>
-                  <a:srgbClr val="34483F"/>
-                </a:solidFill>
-                <a:latin typeface="Microsoft JhengHei"/>
-                <a:ea typeface="Microsoft JhengHei"/>
-                <a:cs typeface="Microsoft JhengHei"/>
-              </a:rPr>
-              <a:t>平均誤差降低</a:t>
-            </a:r>
-          </a:p>
-        </p:txBody>
-      </p:sp>
-      <p:sp>
-        <p:nvSpPr>
-          <p:cNvPr id="8" name="text">
-            <a:extLst xmlns:a="http://schemas.openxmlformats.org/drawingml/2006/main">
-              <a:ext uri="{FF2B5EF4-FFF2-40B4-BE49-F238E27FC236}">
-                <a16:creationId xmlns:a16="http://schemas.microsoft.com/office/drawing/2014/main" id="{43E05C67-68F4-4341-AB17-E78623ED740E}"/>
-              </a:ext>
-            </a:extLst>
-          </p:cNvPr>
-          <p:cNvSpPr>
-            <a:spLocks xmlns:a="http://schemas.openxmlformats.org/drawingml/2006/main" noGrp="1"/>
-          </p:cNvSpPr>
-          <p:nvPr/>
-        </p:nvSpPr>
-        <p:spPr>
-          <a:xfrm xmlns:a="http://schemas.openxmlformats.org/drawingml/2006/main">
-            <a:off x="8858250" y="4476750"/>
-            <a:ext cx="2771775" cy="952500"/>
-          </a:xfrm>
-          <a:prstGeom xmlns:a="http://schemas.openxmlformats.org/drawingml/2006/main" prst="rect">
-            <a:avLst/>
-          </a:prstGeom>
-          <a:noFill xmlns:a="http://schemas.openxmlformats.org/drawingml/2006/main"/>
-          <a:ln xmlns:a="http://schemas.openxmlformats.org/drawingml/2006/main" w="0">
-            <a:noFill/>
-          </a:ln>
-        </p:spPr>
-        <p:txBody>
-          <a:bodyPr xmlns:a="http://schemas.openxmlformats.org/drawingml/2006/main" wrap="square" lIns="0" tIns="0" rIns="0" bIns="0" anchor="t">
-            <a:noAutofit/>
-          </a:bodyPr>
-          <a:lstStyle xmlns:a="http://schemas.openxmlformats.org/drawingml/2006/main"/>
-          <a:p xmlns:a="http://schemas.openxmlformats.org/drawingml/2006/main">
-            <a:pPr algn="l">
-              <a:defRPr sz="2025" b="1">
-                <a:solidFill>
-                  <a:srgbClr val="34483F"/>
-                </a:solidFill>
-                <a:latin typeface="Microsoft JhengHei"/>
-                <a:ea typeface="Microsoft JhengHei"/>
-                <a:cs typeface="Microsoft JhengHei"/>
-              </a:defRPr>
-            </a:pPr>
-            <a:r>
-              <a:rPr sz="2025" b="1">
-                <a:solidFill>
-                  <a:srgbClr val="34483F"/>
-                </a:solidFill>
-                <a:latin typeface="Microsoft JhengHei"/>
-                <a:ea typeface="Microsoft JhengHei"/>
-                <a:cs typeface="Microsoft JhengHei"/>
-              </a:rPr>
-              <a:t>平均誤差少</a:t>
-            </a:r>
-          </a:p>
-          <a:p xmlns:a="http://schemas.openxmlformats.org/drawingml/2006/main">
-            <a:pPr algn="l">
-              <a:defRPr sz="2025" b="1">
-                <a:solidFill>
-                  <a:srgbClr val="34483F"/>
-                </a:solidFill>
-                <a:latin typeface="Microsoft JhengHei"/>
-                <a:ea typeface="Microsoft JhengHei"/>
-                <a:cs typeface="Microsoft JhengHei"/>
-              </a:defRPr>
-            </a:pPr>
-            <a:r>
-              <a:rPr sz="2025" b="1">
-                <a:solidFill>
-                  <a:srgbClr val="34483F"/>
-                </a:solidFill>
-                <a:latin typeface="Microsoft JhengHei"/>
-                <a:ea typeface="Microsoft JhengHei"/>
-                <a:cs typeface="Microsoft JhengHei"/>
-              </a:rPr>
-              <a:t>約 7.13 萬元</a:t>
-            </a:r>
-          </a:p>
-        </p:txBody>
-      </p:sp>
-      <p:sp>
-        <p:nvSpPr>
-          <p:cNvPr id="9" name="text">
-            <a:extLst xmlns:a="http://schemas.openxmlformats.org/drawingml/2006/main">
-              <a:ext uri="{FF2B5EF4-FFF2-40B4-BE49-F238E27FC236}">
-                <a16:creationId xmlns:a16="http://schemas.microsoft.com/office/drawing/2014/main" id="{6D7B0196-7115-4766-B540-92022779D66A}"/>
-              </a:ext>
-            </a:extLst>
-          </p:cNvPr>
-          <p:cNvSpPr>
-            <a:spLocks xmlns:a="http://schemas.openxmlformats.org/drawingml/2006/main" noGrp="1"/>
-          </p:cNvSpPr>
-          <p:nvPr/>
-        </p:nvSpPr>
-        <p:spPr>
-          <a:xfrm xmlns:a="http://schemas.openxmlformats.org/drawingml/2006/main">
-            <a:off x="685800" y="5915025"/>
-            <a:ext cx="10820400" cy="333375"/>
-          </a:xfrm>
-          <a:prstGeom xmlns:a="http://schemas.openxmlformats.org/drawingml/2006/main" prst="rect">
-            <a:avLst/>
-          </a:prstGeom>
-          <a:noFill xmlns:a="http://schemas.openxmlformats.org/drawingml/2006/main"/>
-          <a:ln xmlns:a="http://schemas.openxmlformats.org/drawingml/2006/main" w="0">
-            <a:noFill/>
-          </a:ln>
-        </p:spPr>
-        <p:txBody>
-          <a:bodyPr xmlns:a="http://schemas.openxmlformats.org/drawingml/2006/main" wrap="square" lIns="0" tIns="0" rIns="0" bIns="0" anchor="t">
-            <a:noAutofit/>
-          </a:bodyPr>
-          <a:lstStyle xmlns:a="http://schemas.openxmlformats.org/drawingml/2006/main"/>
-          <a:p xmlns:a="http://schemas.openxmlformats.org/drawingml/2006/main">
-            <a:pPr algn="l">
-              <a:defRPr sz="1800" b="0">
+              <a:defRPr sz="1875" b="0">
                 <a:solidFill>
                   <a:srgbClr val="69776D"/>
                 </a:solidFill>
@@ -13826,7 +12330,7 @@
               </a:defRPr>
             </a:pPr>
             <a:r>
-              <a:rPr sz="1800" b="0">
+              <a:rPr sz="1875" b="0">
                 <a:solidFill>
                   <a:srgbClr val="69776D"/>
                 </a:solidFill>
@@ -13834,7 +12338,7 @@
                 <a:ea typeface="Microsoft JhengHei"/>
                 <a:cs typeface="Microsoft JhengHei"/>
               </a:rPr>
-              <a:t>來源：使用者提供的 Kaggle 提交截圖，Private 尚未公布</a:t>
+              <a:t>每根柱代表不同年度的交易，年度差值不能解讀為改版進步</a:t>
             </a:r>
           </a:p>
         </p:txBody>
@@ -13842,7 +12346,7 @@
     </p:spTree>
     <p:extLst>
       <p:ext uri="{BB962C8B-B14F-4D97-AF65-F5344CB8AC3E}">
-        <p14:creationId xmlns:p14="http://schemas.microsoft.com/office/powerpoint/2010/main" val="471973707"/>
+        <p14:creationId xmlns:p14="http://schemas.microsoft.com/office/powerpoint/2010/main" val="2007050780"/>
       </p:ext>
     </p:extLst>
   </p:cSld>
